--- a/folletos/2026-04/pptx/FIP_VANTRUST_LIQUIDEZ_EFECTIVO.pptx
+++ b/folletos/2026-04/pptx/FIP_VANTRUST_LIQUIDEZ_EFECTIVO.pptx
@@ -2927,7 +2927,7 @@
                 <a:ea typeface="Calibri" pitchFamily="34" charset="-122"/>
                 <a:cs typeface="Calibri" pitchFamily="34" charset="-120"/>
               </a:rPr>
-              <a:t>prueba CLP</a:t>
+              <a:t>prueba 2 CLP</a:t>
             </a:r>
             <a:endParaRPr lang="en-US" sz="800" dirty="0"/>
           </a:p>

--- a/folletos/2026-04/pptx/FIP_VANTRUST_LIQUIDEZ_EFECTIVO.pptx
+++ b/folletos/2026-04/pptx/FIP_VANTRUST_LIQUIDEZ_EFECTIVO.pptx
@@ -5363,7 +5363,7 @@
                 <a:ea typeface="Calibri" pitchFamily="34" charset="-122"/>
                 <a:cs typeface="Calibri" pitchFamily="34" charset="-120"/>
               </a:rPr>
-              <a:t>prueba CLP</a:t>
+              <a:t>prueba 3 CLP</a:t>
             </a:r>
             <a:endParaRPr lang="en-US" sz="800" dirty="0"/>
           </a:p>

--- a/folletos/2026-04/pptx/FIP_VANTRUST_LIQUIDEZ_EFECTIVO.pptx
+++ b/folletos/2026-04/pptx/FIP_VANTRUST_LIQUIDEZ_EFECTIVO.pptx
@@ -6323,7 +6323,7 @@
                 <a:ea typeface="Calibri" pitchFamily="34" charset="-122"/>
                 <a:cs typeface="Calibri" pitchFamily="34" charset="-120"/>
               </a:rPr>
-              <a:t>prueba CLP</a:t>
+              <a:t>prueba 4 CLP</a:t>
             </a:r>
             <a:endParaRPr lang="en-US" sz="800" dirty="0"/>
           </a:p>

--- a/folletos/2026-04/pptx/FIP_VANTRUST_LIQUIDEZ_EFECTIVO.pptx
+++ b/folletos/2026-04/pptx/FIP_VANTRUST_LIQUIDEZ_EFECTIVO.pptx
@@ -6373,7 +6373,7 @@
                 <a:ea typeface="Calibri" pitchFamily="34" charset="-122"/>
                 <a:cs typeface="Calibri" pitchFamily="34" charset="-120"/>
               </a:rPr>
-              <a:t>prueba CLP</a:t>
+              <a:t>prueba 6 CLP</a:t>
             </a:r>
             <a:endParaRPr lang="en-US" sz="800" dirty="0"/>
           </a:p>

--- a/folletos/2026-04/pptx/FIP_VANTRUST_LIQUIDEZ_EFECTIVO.pptx
+++ b/folletos/2026-04/pptx/FIP_VANTRUST_LIQUIDEZ_EFECTIVO.pptx
@@ -6373,7 +6373,7 @@
                 <a:ea typeface="Calibri" pitchFamily="34" charset="-122"/>
                 <a:cs typeface="Calibri" pitchFamily="34" charset="-120"/>
               </a:rPr>
-              <a:t>prueba 6 CLP</a:t>
+              <a:t>prueba CLP</a:t>
             </a:r>
             <a:endParaRPr lang="en-US" sz="800" dirty="0"/>
           </a:p>
@@ -33352,13 +33352,91 @@
       </p:sp>
       <p:sp>
         <p:nvSpPr>
-          <p:cNvPr id="8" name="Shape 6"/>
+          <p:cNvPr id="8" name="Text 6"/>
           <p:cNvSpPr/>
           <p:nvPr/>
         </p:nvSpPr>
         <p:spPr>
           <a:xfrm>
-            <a:off x="118872" y="1810512"/>
+            <a:off x="118872" y="1719072"/>
+            <a:ext cx="1188720" cy="173736"/>
+          </a:xfrm>
+          <a:prstGeom prst="rect">
+            <a:avLst/>
+          </a:prstGeom>
+          <a:noFill/>
+          <a:ln/>
+        </p:spPr>
+        <p:txBody>
+          <a:bodyPr wrap="square" lIns="0" tIns="0" rIns="0" bIns="0" rtlCol="0" anchor="ctr"/>
+          <a:lstStyle/>
+          <a:p>
+            <a:pPr indent="0" marL="0">
+              <a:buNone/>
+            </a:pPr>
+            <a:r>
+              <a:rPr lang="en-US" sz="750" dirty="0">
+                <a:solidFill>
+                  <a:srgbClr val="000000"/>
+                </a:solidFill>
+                <a:latin typeface="Calibri" pitchFamily="34" charset="0"/>
+                <a:ea typeface="Calibri" pitchFamily="34" charset="-122"/>
+                <a:cs typeface="Calibri" pitchFamily="34" charset="-120"/>
+              </a:rPr>
+              <a:t>CLP</a:t>
+            </a:r>
+            <a:endParaRPr lang="en-US" sz="750" dirty="0"/>
+          </a:p>
+        </p:txBody>
+      </p:sp>
+      <p:sp>
+        <p:nvSpPr>
+          <p:cNvPr id="9" name="Text 7"/>
+          <p:cNvSpPr/>
+          <p:nvPr/>
+        </p:nvSpPr>
+        <p:spPr>
+          <a:xfrm>
+            <a:off x="1307592" y="1719072"/>
+            <a:ext cx="1024128" cy="173736"/>
+          </a:xfrm>
+          <a:prstGeom prst="rect">
+            <a:avLst/>
+          </a:prstGeom>
+          <a:noFill/>
+          <a:ln/>
+        </p:spPr>
+        <p:txBody>
+          <a:bodyPr wrap="square" lIns="0" tIns="0" rIns="0" bIns="0" rtlCol="0" anchor="ctr"/>
+          <a:lstStyle/>
+          <a:p>
+            <a:pPr algn="r" indent="0" marL="0">
+              <a:buNone/>
+            </a:pPr>
+            <a:r>
+              <a:rPr lang="en-US" sz="750" b="1" dirty="0">
+                <a:solidFill>
+                  <a:srgbClr val="000000"/>
+                </a:solidFill>
+                <a:latin typeface="Calibri" pitchFamily="34" charset="0"/>
+                <a:ea typeface="Calibri" pitchFamily="34" charset="-122"/>
+                <a:cs typeface="Calibri" pitchFamily="34" charset="-120"/>
+              </a:rPr>
+              <a:t>100,00%</a:t>
+            </a:r>
+            <a:endParaRPr lang="en-US" sz="750" dirty="0"/>
+          </a:p>
+        </p:txBody>
+      </p:sp>
+      <p:sp>
+        <p:nvSpPr>
+          <p:cNvPr id="10" name="Shape 8"/>
+          <p:cNvSpPr/>
+          <p:nvPr/>
+        </p:nvSpPr>
+        <p:spPr>
+          <a:xfrm>
+            <a:off x="118872" y="2002536"/>
             <a:ext cx="2212848" cy="0"/>
           </a:xfrm>
           <a:prstGeom prst="line">
@@ -33375,13 +33453,13 @@
       </p:sp>
       <p:sp>
         <p:nvSpPr>
-          <p:cNvPr id="9" name="Text 7"/>
+          <p:cNvPr id="11" name="Text 9"/>
           <p:cNvSpPr/>
           <p:nvPr/>
         </p:nvSpPr>
         <p:spPr>
           <a:xfrm>
-            <a:off x="118872" y="1901952"/>
+            <a:off x="118872" y="2093976"/>
             <a:ext cx="2212848" cy="164592"/>
           </a:xfrm>
           <a:prstGeom prst="rect">
@@ -33414,13 +33492,13 @@
       </p:sp>
       <p:sp>
         <p:nvSpPr>
-          <p:cNvPr id="10" name="Shape 8"/>
+          <p:cNvPr id="12" name="Shape 10"/>
           <p:cNvSpPr/>
           <p:nvPr/>
         </p:nvSpPr>
         <p:spPr>
           <a:xfrm>
-            <a:off x="118872" y="2084832"/>
+            <a:off x="118872" y="2276856"/>
             <a:ext cx="2212848" cy="0"/>
           </a:xfrm>
           <a:prstGeom prst="line">
@@ -33437,13 +33515,13 @@
       </p:sp>
       <p:sp>
         <p:nvSpPr>
-          <p:cNvPr id="11" name="Text 9"/>
+          <p:cNvPr id="13" name="Text 11"/>
           <p:cNvSpPr/>
           <p:nvPr/>
         </p:nvSpPr>
         <p:spPr>
           <a:xfrm>
-            <a:off x="118872" y="2157984"/>
+            <a:off x="118872" y="2350008"/>
             <a:ext cx="1371600" cy="164592"/>
           </a:xfrm>
           <a:prstGeom prst="rect">
@@ -33476,13 +33554,13 @@
       </p:sp>
       <p:sp>
         <p:nvSpPr>
-          <p:cNvPr id="12" name="Text 10"/>
+          <p:cNvPr id="14" name="Text 12"/>
           <p:cNvSpPr/>
           <p:nvPr/>
         </p:nvSpPr>
         <p:spPr>
           <a:xfrm>
-            <a:off x="1490472" y="2157984"/>
+            <a:off x="1490472" y="2350008"/>
             <a:ext cx="841248" cy="164592"/>
           </a:xfrm>
           <a:prstGeom prst="rect">
@@ -33515,13 +33593,13 @@
       </p:sp>
       <p:sp>
         <p:nvSpPr>
-          <p:cNvPr id="13" name="Shape 11"/>
+          <p:cNvPr id="15" name="Shape 13"/>
           <p:cNvSpPr/>
           <p:nvPr/>
         </p:nvSpPr>
         <p:spPr>
           <a:xfrm>
-            <a:off x="118872" y="2423160"/>
+            <a:off x="118872" y="2615184"/>
             <a:ext cx="2212848" cy="0"/>
           </a:xfrm>
           <a:prstGeom prst="line">
@@ -33538,13 +33616,13 @@
       </p:sp>
       <p:sp>
         <p:nvSpPr>
-          <p:cNvPr id="14" name="Text 12"/>
+          <p:cNvPr id="16" name="Text 14"/>
           <p:cNvSpPr/>
           <p:nvPr/>
         </p:nvSpPr>
         <p:spPr>
           <a:xfrm>
-            <a:off x="118872" y="2514600"/>
+            <a:off x="118872" y="2706624"/>
             <a:ext cx="2212848" cy="164592"/>
           </a:xfrm>
           <a:prstGeom prst="rect">
@@ -33577,13 +33655,13 @@
       </p:sp>
       <p:sp>
         <p:nvSpPr>
-          <p:cNvPr id="15" name="Shape 13"/>
+          <p:cNvPr id="17" name="Shape 15"/>
           <p:cNvSpPr/>
           <p:nvPr/>
         </p:nvSpPr>
         <p:spPr>
           <a:xfrm>
-            <a:off x="118872" y="2697480"/>
+            <a:off x="118872" y="2889504"/>
             <a:ext cx="2212848" cy="0"/>
           </a:xfrm>
           <a:prstGeom prst="line">
@@ -33600,13 +33678,13 @@
       </p:sp>
       <p:sp>
         <p:nvSpPr>
-          <p:cNvPr id="16" name="Text 14"/>
+          <p:cNvPr id="18" name="Text 16"/>
           <p:cNvSpPr/>
           <p:nvPr/>
         </p:nvSpPr>
         <p:spPr>
           <a:xfrm>
-            <a:off x="118872" y="2770632"/>
+            <a:off x="118872" y="2962656"/>
             <a:ext cx="1371600" cy="182880"/>
           </a:xfrm>
           <a:prstGeom prst="rect">
@@ -33639,13 +33717,13 @@
       </p:sp>
       <p:sp>
         <p:nvSpPr>
-          <p:cNvPr id="17" name="Text 15"/>
+          <p:cNvPr id="19" name="Text 17"/>
           <p:cNvSpPr/>
           <p:nvPr/>
         </p:nvSpPr>
         <p:spPr>
           <a:xfrm>
-            <a:off x="1490472" y="2770632"/>
+            <a:off x="1490472" y="2962656"/>
             <a:ext cx="841248" cy="182880"/>
           </a:xfrm>
           <a:prstGeom prst="rect">
@@ -33670,7 +33748,7 @@
                 <a:ea typeface="Calibri" pitchFamily="34" charset="-122"/>
                 <a:cs typeface="Calibri" pitchFamily="34" charset="-120"/>
               </a:rPr>
-              <a:t>63,16%</a:t>
+              <a:t>0,79%</a:t>
             </a:r>
             <a:endParaRPr lang="en-US" sz="750" dirty="0"/>
           </a:p>
@@ -33678,13 +33756,13 @@
       </p:sp>
       <p:sp>
         <p:nvSpPr>
-          <p:cNvPr id="18" name="Text 16"/>
+          <p:cNvPr id="20" name="Text 18"/>
           <p:cNvSpPr/>
           <p:nvPr/>
         </p:nvSpPr>
         <p:spPr>
           <a:xfrm>
-            <a:off x="118872" y="2971800"/>
+            <a:off x="118872" y="3163824"/>
             <a:ext cx="1371600" cy="182880"/>
           </a:xfrm>
           <a:prstGeom prst="rect">
@@ -33717,13 +33795,13 @@
       </p:sp>
       <p:sp>
         <p:nvSpPr>
-          <p:cNvPr id="19" name="Text 17"/>
+          <p:cNvPr id="21" name="Text 19"/>
           <p:cNvSpPr/>
           <p:nvPr/>
         </p:nvSpPr>
         <p:spPr>
           <a:xfrm>
-            <a:off x="1490472" y="2971800"/>
+            <a:off x="1490472" y="3163824"/>
             <a:ext cx="841248" cy="182880"/>
           </a:xfrm>
           <a:prstGeom prst="rect">
@@ -33748,7 +33826,7 @@
                 <a:ea typeface="Calibri" pitchFamily="34" charset="-122"/>
                 <a:cs typeface="Calibri" pitchFamily="34" charset="-120"/>
               </a:rPr>
-              <a:t>28,00%</a:t>
+              <a:t>99,21%</a:t>
             </a:r>
             <a:endParaRPr lang="en-US" sz="750" dirty="0"/>
           </a:p>
@@ -33756,13 +33834,13 @@
       </p:sp>
       <p:sp>
         <p:nvSpPr>
-          <p:cNvPr id="20" name="Text 18"/>
+          <p:cNvPr id="22" name="Text 20"/>
           <p:cNvSpPr/>
           <p:nvPr/>
         </p:nvSpPr>
         <p:spPr>
           <a:xfrm>
-            <a:off x="118872" y="3172968"/>
+            <a:off x="118872" y="3364992"/>
             <a:ext cx="1371600" cy="182880"/>
           </a:xfrm>
           <a:prstGeom prst="rect">
@@ -33795,91 +33873,13 @@
       </p:sp>
       <p:sp>
         <p:nvSpPr>
-          <p:cNvPr id="21" name="Text 19"/>
-          <p:cNvSpPr/>
-          <p:nvPr/>
-        </p:nvSpPr>
-        <p:spPr>
-          <a:xfrm>
-            <a:off x="1490472" y="3172968"/>
-            <a:ext cx="841248" cy="182880"/>
-          </a:xfrm>
-          <a:prstGeom prst="rect">
-            <a:avLst/>
-          </a:prstGeom>
-          <a:noFill/>
-          <a:ln/>
-        </p:spPr>
-        <p:txBody>
-          <a:bodyPr wrap="square" lIns="0" tIns="0" rIns="0" bIns="0" rtlCol="0" anchor="ctr"/>
-          <a:lstStyle/>
-          <a:p>
-            <a:pPr algn="r" indent="0" marL="0">
-              <a:buNone/>
-            </a:pPr>
-            <a:r>
-              <a:rPr lang="en-US" sz="750" b="1" dirty="0">
-                <a:solidFill>
-                  <a:srgbClr val="000000"/>
-                </a:solidFill>
-                <a:latin typeface="Calibri" pitchFamily="34" charset="0"/>
-                <a:ea typeface="Calibri" pitchFamily="34" charset="-122"/>
-                <a:cs typeface="Calibri" pitchFamily="34" charset="-120"/>
-              </a:rPr>
-              <a:t>8,84%</a:t>
-            </a:r>
-            <a:endParaRPr lang="en-US" sz="750" dirty="0"/>
-          </a:p>
-        </p:txBody>
-      </p:sp>
-      <p:sp>
-        <p:nvSpPr>
-          <p:cNvPr id="22" name="Text 20"/>
-          <p:cNvSpPr/>
-          <p:nvPr/>
-        </p:nvSpPr>
-        <p:spPr>
-          <a:xfrm>
-            <a:off x="118872" y="3374136"/>
-            <a:ext cx="1371600" cy="182880"/>
-          </a:xfrm>
-          <a:prstGeom prst="rect">
-            <a:avLst/>
-          </a:prstGeom>
-          <a:noFill/>
-          <a:ln/>
-        </p:spPr>
-        <p:txBody>
-          <a:bodyPr wrap="square" lIns="0" tIns="0" rIns="0" bIns="0" rtlCol="0" anchor="ctr"/>
-          <a:lstStyle/>
-          <a:p>
-            <a:pPr indent="0" marL="0">
-              <a:buNone/>
-            </a:pPr>
-            <a:r>
-              <a:rPr lang="en-US" sz="750" dirty="0">
-                <a:solidFill>
-                  <a:srgbClr val="000000"/>
-                </a:solidFill>
-                <a:latin typeface="Calibri" pitchFamily="34" charset="0"/>
-                <a:ea typeface="Calibri" pitchFamily="34" charset="-122"/>
-                <a:cs typeface="Calibri" pitchFamily="34" charset="-120"/>
-              </a:rPr>
-              <a:t>Entre 1 y 2 años</a:t>
-            </a:r>
-            <a:endParaRPr lang="en-US" sz="750" dirty="0"/>
-          </a:p>
-        </p:txBody>
-      </p:sp>
-      <p:sp>
-        <p:nvSpPr>
           <p:cNvPr id="23" name="Text 21"/>
           <p:cNvSpPr/>
           <p:nvPr/>
         </p:nvSpPr>
         <p:spPr>
           <a:xfrm>
-            <a:off x="1490472" y="3374136"/>
+            <a:off x="1490472" y="3364992"/>
             <a:ext cx="841248" cy="182880"/>
           </a:xfrm>
           <a:prstGeom prst="rect">
@@ -33918,6 +33918,84 @@
         </p:nvSpPr>
         <p:spPr>
           <a:xfrm>
+            <a:off x="118872" y="3566160"/>
+            <a:ext cx="1371600" cy="182880"/>
+          </a:xfrm>
+          <a:prstGeom prst="rect">
+            <a:avLst/>
+          </a:prstGeom>
+          <a:noFill/>
+          <a:ln/>
+        </p:spPr>
+        <p:txBody>
+          <a:bodyPr wrap="square" lIns="0" tIns="0" rIns="0" bIns="0" rtlCol="0" anchor="ctr"/>
+          <a:lstStyle/>
+          <a:p>
+            <a:pPr indent="0" marL="0">
+              <a:buNone/>
+            </a:pPr>
+            <a:r>
+              <a:rPr lang="en-US" sz="750" dirty="0">
+                <a:solidFill>
+                  <a:srgbClr val="000000"/>
+                </a:solidFill>
+                <a:latin typeface="Calibri" pitchFamily="34" charset="0"/>
+                <a:ea typeface="Calibri" pitchFamily="34" charset="-122"/>
+                <a:cs typeface="Calibri" pitchFamily="34" charset="-120"/>
+              </a:rPr>
+              <a:t>Entre 1 y 2 años</a:t>
+            </a:r>
+            <a:endParaRPr lang="en-US" sz="750" dirty="0"/>
+          </a:p>
+        </p:txBody>
+      </p:sp>
+      <p:sp>
+        <p:nvSpPr>
+          <p:cNvPr id="25" name="Text 23"/>
+          <p:cNvSpPr/>
+          <p:nvPr/>
+        </p:nvSpPr>
+        <p:spPr>
+          <a:xfrm>
+            <a:off x="1490472" y="3566160"/>
+            <a:ext cx="841248" cy="182880"/>
+          </a:xfrm>
+          <a:prstGeom prst="rect">
+            <a:avLst/>
+          </a:prstGeom>
+          <a:noFill/>
+          <a:ln/>
+        </p:spPr>
+        <p:txBody>
+          <a:bodyPr wrap="square" lIns="0" tIns="0" rIns="0" bIns="0" rtlCol="0" anchor="ctr"/>
+          <a:lstStyle/>
+          <a:p>
+            <a:pPr algn="r" indent="0" marL="0">
+              <a:buNone/>
+            </a:pPr>
+            <a:r>
+              <a:rPr lang="en-US" sz="750" b="1" dirty="0">
+                <a:solidFill>
+                  <a:srgbClr val="000000"/>
+                </a:solidFill>
+                <a:latin typeface="Calibri" pitchFamily="34" charset="0"/>
+                <a:ea typeface="Calibri" pitchFamily="34" charset="-122"/>
+                <a:cs typeface="Calibri" pitchFamily="34" charset="-120"/>
+              </a:rPr>
+              <a:t>0,00%</a:t>
+            </a:r>
+            <a:endParaRPr lang="en-US" sz="750" dirty="0"/>
+          </a:p>
+        </p:txBody>
+      </p:sp>
+      <p:sp>
+        <p:nvSpPr>
+          <p:cNvPr id="26" name="Text 24"/>
+          <p:cNvSpPr/>
+          <p:nvPr/>
+        </p:nvSpPr>
+        <p:spPr>
+          <a:xfrm>
             <a:off x="2606040" y="137160"/>
             <a:ext cx="4818888" cy="246888"/>
           </a:xfrm>
@@ -33951,7 +34029,7 @@
       </p:sp>
       <p:sp>
         <p:nvSpPr>
-          <p:cNvPr id="25" name="Shape 23"/>
+          <p:cNvPr id="27" name="Shape 25"/>
           <p:cNvSpPr/>
           <p:nvPr/>
         </p:nvSpPr>
@@ -33974,7 +34052,7 @@
       </p:sp>
       <p:sp>
         <p:nvSpPr>
-          <p:cNvPr id="26" name="Text 24"/>
+          <p:cNvPr id="28" name="Text 26"/>
           <p:cNvSpPr/>
           <p:nvPr/>
         </p:nvSpPr>
@@ -34030,7 +34108,7 @@
       </p:sp>
       <p:sp>
         <p:nvSpPr>
-          <p:cNvPr id="27" name="Text 25"/>
+          <p:cNvPr id="29" name="Text 27"/>
           <p:cNvSpPr/>
           <p:nvPr/>
         </p:nvSpPr>
@@ -34086,7 +34164,7 @@
       </p:sp>
       <p:sp>
         <p:nvSpPr>
-          <p:cNvPr id="28" name="Text 26"/>
+          <p:cNvPr id="30" name="Text 28"/>
           <p:cNvSpPr/>
           <p:nvPr/>
         </p:nvSpPr>
@@ -34142,7 +34220,7 @@
       </p:sp>
       <p:sp>
         <p:nvSpPr>
-          <p:cNvPr id="29" name="Text 27"/>
+          <p:cNvPr id="31" name="Text 29"/>
           <p:cNvSpPr/>
           <p:nvPr/>
         </p:nvSpPr>
@@ -34198,7 +34276,7 @@
       </p:sp>
       <p:sp>
         <p:nvSpPr>
-          <p:cNvPr id="30" name="Text 28"/>
+          <p:cNvPr id="32" name="Text 30"/>
           <p:cNvSpPr/>
           <p:nvPr/>
         </p:nvSpPr>
@@ -34254,7 +34332,7 @@
       </p:sp>
       <p:sp>
         <p:nvSpPr>
-          <p:cNvPr id="31" name="Text 29"/>
+          <p:cNvPr id="33" name="Text 31"/>
           <p:cNvSpPr/>
           <p:nvPr/>
         </p:nvSpPr>
@@ -34310,7 +34388,7 @@
       </p:sp>
       <p:sp>
         <p:nvSpPr>
-          <p:cNvPr id="32" name="Text 30"/>
+          <p:cNvPr id="34" name="Text 32"/>
           <p:cNvSpPr/>
           <p:nvPr/>
         </p:nvSpPr>
@@ -34366,7 +34444,7 @@
       </p:sp>
       <p:sp>
         <p:nvSpPr>
-          <p:cNvPr id="33" name="Text 31"/>
+          <p:cNvPr id="35" name="Text 33"/>
           <p:cNvSpPr/>
           <p:nvPr/>
         </p:nvSpPr>
@@ -34422,7 +34500,7 @@
       </p:sp>
       <p:sp>
         <p:nvSpPr>
-          <p:cNvPr id="34" name="Text 32"/>
+          <p:cNvPr id="36" name="Text 34"/>
           <p:cNvSpPr/>
           <p:nvPr/>
         </p:nvSpPr>
@@ -34478,7 +34556,7 @@
       </p:sp>
       <p:sp>
         <p:nvSpPr>
-          <p:cNvPr id="35" name="Shape 33"/>
+          <p:cNvPr id="37" name="Shape 35"/>
           <p:cNvSpPr/>
           <p:nvPr/>
         </p:nvSpPr>
@@ -34501,7 +34579,7 @@
       </p:sp>
       <p:sp>
         <p:nvSpPr>
-          <p:cNvPr id="36" name="Text 34"/>
+          <p:cNvPr id="38" name="Text 36"/>
           <p:cNvSpPr/>
           <p:nvPr/>
         </p:nvSpPr>
@@ -34540,7 +34618,7 @@
       </p:sp>
       <p:sp>
         <p:nvSpPr>
-          <p:cNvPr id="37" name="Shape 35"/>
+          <p:cNvPr id="39" name="Shape 37"/>
           <p:cNvSpPr/>
           <p:nvPr/>
         </p:nvSpPr>
@@ -34563,7 +34641,7 @@
       </p:sp>
       <p:sp>
         <p:nvSpPr>
-          <p:cNvPr id="38" name="Text 36"/>
+          <p:cNvPr id="40" name="Text 38"/>
           <p:cNvSpPr/>
           <p:nvPr/>
         </p:nvSpPr>

--- a/folletos/2026-04/pptx/FIP_VANTRUST_LIQUIDEZ_EFECTIVO.pptx
+++ b/folletos/2026-04/pptx/FIP_VANTRUST_LIQUIDEZ_EFECTIVO.pptx
@@ -6373,7 +6373,7 @@
                 <a:ea typeface="Calibri" pitchFamily="34" charset="-122"/>
                 <a:cs typeface="Calibri" pitchFamily="34" charset="-120"/>
               </a:rPr>
-              <a:t>prueba CLP</a:t>
+              <a:t>prueba 8 CLP</a:t>
             </a:r>
             <a:endParaRPr lang="en-US" sz="800" dirty="0"/>
           </a:p>

--- a/folletos/2026-04/pptx/FIP_VANTRUST_LIQUIDEZ_EFECTIVO.pptx
+++ b/folletos/2026-04/pptx/FIP_VANTRUST_LIQUIDEZ_EFECTIVO.pptx
@@ -3114,7 +3114,7 @@
                 <a:ea typeface="Calibri" pitchFamily="34" charset="-122"/>
                 <a:cs typeface="Calibri" pitchFamily="34" charset="-120"/>
               </a:rPr>
-              <a:t>prueba CLP</a:t>
+              <a:t>prueba 10 CLP</a:t>
             </a:r>
             <a:endParaRPr lang="en-US" sz="800" dirty="0"/>
           </a:p>

--- a/folletos/2026-04/pptx/FIP_VANTRUST_LIQUIDEZ_EFECTIVO.pptx
+++ b/folletos/2026-04/pptx/FIP_VANTRUST_LIQUIDEZ_EFECTIVO.pptx
@@ -3114,7 +3114,7 @@
                 <a:ea typeface="Calibri" pitchFamily="34" charset="-122"/>
                 <a:cs typeface="Calibri" pitchFamily="34" charset="-120"/>
               </a:rPr>
-              <a:t>prueba 10 CLP</a:t>
+              <a:t>prueba 11 CLP</a:t>
             </a:r>
             <a:endParaRPr lang="en-US" sz="800" dirty="0"/>
           </a:p>

--- a/folletos/2026-04/pptx/FIP_VANTRUST_LIQUIDEZ_EFECTIVO.pptx
+++ b/folletos/2026-04/pptx/FIP_VANTRUST_LIQUIDEZ_EFECTIVO.pptx
@@ -3131,7 +3131,7 @@
                 <a:ea typeface="Calibri" pitchFamily="34" charset="-122"/>
                 <a:cs typeface="Calibri" pitchFamily="34" charset="-120"/>
               </a:rPr>
-              <a:t>prueba CLP</a:t>
+              <a:t>prueba 11 CLP</a:t>
             </a:r>
             <a:endParaRPr lang="en-US" sz="800" dirty="0"/>
           </a:p>

--- a/folletos/2026-04/pptx/FIP_VANTRUST_LIQUIDEZ_EFECTIVO.pptx
+++ b/folletos/2026-04/pptx/FIP_VANTRUST_LIQUIDEZ_EFECTIVO.pptx
@@ -3131,7 +3131,7 @@
                 <a:ea typeface="Calibri" pitchFamily="34" charset="-122"/>
                 <a:cs typeface="Calibri" pitchFamily="34" charset="-120"/>
               </a:rPr>
-              <a:t>prueba 11 CLP</a:t>
+              <a:t>prueba 12 CLP</a:t>
             </a:r>
             <a:endParaRPr lang="en-US" sz="800" dirty="0"/>
           </a:p>

--- a/folletos/2026-04/pptx/FIP_VANTRUST_LIQUIDEZ_EFECTIVO.pptx
+++ b/folletos/2026-04/pptx/FIP_VANTRUST_LIQUIDEZ_EFECTIVO.pptx
@@ -3113,7 +3113,7 @@
                 <a:ea typeface="Calibri" pitchFamily="34" charset="-122"/>
                 <a:cs typeface="Calibri" pitchFamily="34" charset="-120"/>
               </a:rPr>
-              <a:t>prueba CLP</a:t>
+              <a:t>prueba 12 CLP</a:t>
             </a:r>
             <a:endParaRPr lang="en-US" sz="800" dirty="0"/>
           </a:p>

--- a/folletos/2026-04/pptx/FIP_VANTRUST_LIQUIDEZ_EFECTIVO.pptx
+++ b/folletos/2026-04/pptx/FIP_VANTRUST_LIQUIDEZ_EFECTIVO.pptx
@@ -3113,7 +3113,7 @@
                 <a:ea typeface="Calibri" pitchFamily="34" charset="-122"/>
                 <a:cs typeface="Calibri" pitchFamily="34" charset="-120"/>
               </a:rPr>
-              <a:t>prueba 12 CLP</a:t>
+              <a:t>prueba CLP</a:t>
             </a:r>
             <a:endParaRPr lang="en-US" sz="800" dirty="0"/>
           </a:p>
@@ -7188,7 +7188,7 @@
                           <a:ea typeface="Calibri" pitchFamily="34" charset="-122"/>
                           <a:cs typeface="Calibri" pitchFamily="34" charset="-120"/>
                         </a:rPr>
-                        <a:t>0.00%</a:t>
+                        <a:t>0.01%</a:t>
                       </a:r>
                       <a:endParaRPr lang="en-US" sz="500" dirty="0">
                         <a:latin typeface="Calibri" charset="0"/>
@@ -7253,7 +7253,7 @@
                           <a:ea typeface="Calibri" pitchFamily="34" charset="-122"/>
                           <a:cs typeface="Calibri" pitchFamily="34" charset="-120"/>
                         </a:rPr>
-                        <a:t>0.00%</a:t>
+                        <a:t>0.01%</a:t>
                       </a:r>
                       <a:endParaRPr lang="en-US" sz="500" dirty="0">
                         <a:latin typeface="Calibri" charset="0"/>
@@ -7318,7 +7318,7 @@
                           <a:ea typeface="Calibri" pitchFamily="34" charset="-122"/>
                           <a:cs typeface="Calibri" pitchFamily="34" charset="-120"/>
                         </a:rPr>
-                        <a:t>0.00%</a:t>
+                        <a:t>0.01%</a:t>
                       </a:r>
                       <a:endParaRPr lang="en-US" sz="500" dirty="0">
                         <a:latin typeface="Calibri" charset="0"/>
@@ -7383,7 +7383,7 @@
                           <a:ea typeface="Calibri" pitchFamily="34" charset="-122"/>
                           <a:cs typeface="Calibri" pitchFamily="34" charset="-120"/>
                         </a:rPr>
-                        <a:t>0.00%</a:t>
+                        <a:t>0.01%</a:t>
                       </a:r>
                       <a:endParaRPr lang="en-US" sz="500" dirty="0">
                         <a:latin typeface="Calibri" charset="0"/>
@@ -7448,7 +7448,7 @@
                           <a:ea typeface="Calibri" pitchFamily="34" charset="-122"/>
                           <a:cs typeface="Calibri" pitchFamily="34" charset="-120"/>
                         </a:rPr>
-                        <a:t>0.00%</a:t>
+                        <a:t>0.01%</a:t>
                       </a:r>
                       <a:endParaRPr lang="en-US" sz="500" dirty="0">
                         <a:latin typeface="Calibri" charset="0"/>
@@ -7513,7 +7513,7 @@
                           <a:ea typeface="Calibri" pitchFamily="34" charset="-122"/>
                           <a:cs typeface="Calibri" pitchFamily="34" charset="-120"/>
                         </a:rPr>
-                        <a:t>0.00%</a:t>
+                        <a:t>0.01%</a:t>
                       </a:r>
                       <a:endParaRPr lang="en-US" sz="500" dirty="0">
                         <a:latin typeface="Calibri" charset="0"/>
@@ -7578,7 +7578,7 @@
                           <a:ea typeface="Calibri" pitchFamily="34" charset="-122"/>
                           <a:cs typeface="Calibri" pitchFamily="34" charset="-120"/>
                         </a:rPr>
-                        <a:t>0.00%</a:t>
+                        <a:t>0.01%</a:t>
                       </a:r>
                       <a:endParaRPr lang="en-US" sz="500" dirty="0">
                         <a:latin typeface="Calibri" charset="0"/>
@@ -7643,7 +7643,7 @@
                           <a:ea typeface="Calibri" pitchFamily="34" charset="-122"/>
                           <a:cs typeface="Calibri" pitchFamily="34" charset="-120"/>
                         </a:rPr>
-                        <a:t>-0.00%</a:t>
+                        <a:t>-0.01%</a:t>
                       </a:r>
                       <a:endParaRPr lang="en-US" sz="500" dirty="0">
                         <a:latin typeface="Calibri" charset="0"/>
@@ -7708,7 +7708,7 @@
                           <a:ea typeface="Calibri" pitchFamily="34" charset="-122"/>
                           <a:cs typeface="Calibri" pitchFamily="34" charset="-120"/>
                         </a:rPr>
-                        <a:t>0.00%</a:t>
+                        <a:t>0.10%</a:t>
                       </a:r>
                       <a:endParaRPr lang="en-US" sz="500" dirty="0">
                         <a:latin typeface="Calibri" charset="0"/>
@@ -7773,7 +7773,7 @@
                           <a:ea typeface="Calibri" pitchFamily="34" charset="-122"/>
                           <a:cs typeface="Calibri" pitchFamily="34" charset="-120"/>
                         </a:rPr>
-                        <a:t>0.00%</a:t>
+                        <a:t>0.13%</a:t>
                       </a:r>
                       <a:endParaRPr lang="en-US" sz="500" dirty="0">
                         <a:latin typeface="Calibri" charset="0"/>
@@ -7903,7 +7903,7 @@
                           <a:ea typeface="Calibri" pitchFamily="34" charset="-122"/>
                           <a:cs typeface="Calibri" pitchFamily="34" charset="-120"/>
                         </a:rPr>
-                        <a:t>0.60%</a:t>
+                        <a:t>0.86%</a:t>
                       </a:r>
                       <a:endParaRPr lang="en-US" sz="500" dirty="0">
                         <a:latin typeface="Calibri" charset="0"/>
@@ -8143,7 +8143,7 @@
                           <a:ea typeface="Calibri" pitchFamily="34" charset="-122"/>
                           <a:cs typeface="Calibri" pitchFamily="34" charset="-120"/>
                         </a:rPr>
-                        <a:t>0.00%</a:t>
+                        <a:t>0.14%</a:t>
                       </a:r>
                       <a:endParaRPr lang="en-US" sz="500" dirty="0">
                         <a:latin typeface="Calibri" charset="0"/>
@@ -8208,7 +8208,7 @@
                           <a:ea typeface="Calibri" pitchFamily="34" charset="-122"/>
                           <a:cs typeface="Calibri" pitchFamily="34" charset="-120"/>
                         </a:rPr>
-                        <a:t>0.00%</a:t>
+                        <a:t>0.14%</a:t>
                       </a:r>
                       <a:endParaRPr lang="en-US" sz="500" dirty="0">
                         <a:latin typeface="Calibri" charset="0"/>
@@ -8273,7 +8273,7 @@
                           <a:ea typeface="Calibri" pitchFamily="34" charset="-122"/>
                           <a:cs typeface="Calibri" pitchFamily="34" charset="-120"/>
                         </a:rPr>
-                        <a:t>0.00%</a:t>
+                        <a:t>0.20%</a:t>
                       </a:r>
                       <a:endParaRPr lang="en-US" sz="500" dirty="0">
                         <a:latin typeface="Calibri" charset="0"/>
@@ -8338,7 +8338,7 @@
                           <a:ea typeface="Calibri" pitchFamily="34" charset="-122"/>
                           <a:cs typeface="Calibri" pitchFamily="34" charset="-120"/>
                         </a:rPr>
-                        <a:t>0.00%</a:t>
+                        <a:t>0.21%</a:t>
                       </a:r>
                       <a:endParaRPr lang="en-US" sz="500" dirty="0">
                         <a:latin typeface="Calibri" charset="0"/>
@@ -8403,7 +8403,7 @@
                           <a:ea typeface="Calibri" pitchFamily="34" charset="-122"/>
                           <a:cs typeface="Calibri" pitchFamily="34" charset="-120"/>
                         </a:rPr>
-                        <a:t>0.00%</a:t>
+                        <a:t>0.17%</a:t>
                       </a:r>
                       <a:endParaRPr lang="en-US" sz="500" dirty="0">
                         <a:latin typeface="Calibri" charset="0"/>
@@ -8468,7 +8468,7 @@
                           <a:ea typeface="Calibri" pitchFamily="34" charset="-122"/>
                           <a:cs typeface="Calibri" pitchFamily="34" charset="-120"/>
                         </a:rPr>
-                        <a:t>0.00%</a:t>
+                        <a:t>0.16%</a:t>
                       </a:r>
                       <a:endParaRPr lang="en-US" sz="500" dirty="0">
                         <a:latin typeface="Calibri" charset="0"/>
@@ -8533,7 +8533,7 @@
                           <a:ea typeface="Calibri" pitchFamily="34" charset="-122"/>
                           <a:cs typeface="Calibri" pitchFamily="34" charset="-120"/>
                         </a:rPr>
-                        <a:t>0.00%</a:t>
+                        <a:t>0.12%</a:t>
                       </a:r>
                       <a:endParaRPr lang="en-US" sz="500" dirty="0">
                         <a:latin typeface="Calibri" charset="0"/>
@@ -8598,7 +8598,7 @@
                           <a:ea typeface="Calibri" pitchFamily="34" charset="-122"/>
                           <a:cs typeface="Calibri" pitchFamily="34" charset="-120"/>
                         </a:rPr>
-                        <a:t>0.00%</a:t>
+                        <a:t>0.13%</a:t>
                       </a:r>
                       <a:endParaRPr lang="en-US" sz="500" dirty="0">
                         <a:latin typeface="Calibri" charset="0"/>
@@ -8663,7 +8663,7 @@
                           <a:ea typeface="Calibri" pitchFamily="34" charset="-122"/>
                           <a:cs typeface="Calibri" pitchFamily="34" charset="-120"/>
                         </a:rPr>
-                        <a:t>0.00%</a:t>
+                        <a:t>0.16%</a:t>
                       </a:r>
                       <a:endParaRPr lang="en-US" sz="500" dirty="0">
                         <a:latin typeface="Calibri" charset="0"/>
@@ -8728,7 +8728,7 @@
                           <a:ea typeface="Calibri" pitchFamily="34" charset="-122"/>
                           <a:cs typeface="Calibri" pitchFamily="34" charset="-120"/>
                         </a:rPr>
-                        <a:t>0.00%</a:t>
+                        <a:t>0.19%</a:t>
                       </a:r>
                       <a:endParaRPr lang="en-US" sz="500" dirty="0">
                         <a:latin typeface="Calibri" charset="0"/>
@@ -8793,7 +8793,7 @@
                           <a:ea typeface="Calibri" pitchFamily="34" charset="-122"/>
                           <a:cs typeface="Calibri" pitchFamily="34" charset="-120"/>
                         </a:rPr>
-                        <a:t>0.00%</a:t>
+                        <a:t>0.28%</a:t>
                       </a:r>
                       <a:endParaRPr lang="en-US" sz="500" dirty="0">
                         <a:latin typeface="Calibri" charset="0"/>
@@ -8858,7 +8858,7 @@
                           <a:ea typeface="Calibri" pitchFamily="34" charset="-122"/>
                           <a:cs typeface="Calibri" pitchFamily="34" charset="-120"/>
                         </a:rPr>
-                        <a:t>0.02%</a:t>
+                        <a:t>1.91%</a:t>
                       </a:r>
                       <a:endParaRPr lang="en-US" sz="500" dirty="0">
                         <a:latin typeface="Calibri" charset="0"/>
@@ -10086,7 +10086,7 @@
                           <a:ea typeface="Calibri" pitchFamily="34" charset="-122"/>
                           <a:cs typeface="Calibri" pitchFamily="34" charset="-120"/>
                         </a:rPr>
-                        <a:t>0.00%</a:t>
+                        <a:t>0.26%</a:t>
                       </a:r>
                       <a:endParaRPr lang="en-US" sz="500" dirty="0">
                         <a:latin typeface="Calibri" charset="0"/>
@@ -10151,7 +10151,7 @@
                           <a:ea typeface="Calibri" pitchFamily="34" charset="-122"/>
                           <a:cs typeface="Calibri" pitchFamily="34" charset="-120"/>
                         </a:rPr>
-                        <a:t>0.00%</a:t>
+                        <a:t>0.33%</a:t>
                       </a:r>
                       <a:endParaRPr lang="en-US" sz="500" dirty="0">
                         <a:latin typeface="Calibri" charset="0"/>
@@ -10216,7 +10216,7 @@
                           <a:ea typeface="Calibri" pitchFamily="34" charset="-122"/>
                           <a:cs typeface="Calibri" pitchFamily="34" charset="-120"/>
                         </a:rPr>
-                        <a:t>0.00%</a:t>
+                        <a:t>0.38%</a:t>
                       </a:r>
                       <a:endParaRPr lang="en-US" sz="500" dirty="0">
                         <a:latin typeface="Calibri" charset="0"/>
@@ -10281,7 +10281,7 @@
                           <a:ea typeface="Calibri" pitchFamily="34" charset="-122"/>
                           <a:cs typeface="Calibri" pitchFamily="34" charset="-120"/>
                         </a:rPr>
-                        <a:t>0.01%</a:t>
+                        <a:t>0.55%</a:t>
                       </a:r>
                       <a:endParaRPr lang="en-US" sz="500" dirty="0">
                         <a:latin typeface="Calibri" charset="0"/>
@@ -10346,7 +10346,7 @@
                           <a:ea typeface="Calibri" pitchFamily="34" charset="-122"/>
                           <a:cs typeface="Calibri" pitchFamily="34" charset="-120"/>
                         </a:rPr>
-                        <a:t>0.01%</a:t>
+                        <a:t>0.59%</a:t>
                       </a:r>
                       <a:endParaRPr lang="en-US" sz="500" dirty="0">
                         <a:latin typeface="Calibri" charset="0"/>
@@ -10411,7 +10411,7 @@
                           <a:ea typeface="Calibri" pitchFamily="34" charset="-122"/>
                           <a:cs typeface="Calibri" pitchFamily="34" charset="-120"/>
                         </a:rPr>
-                        <a:t>0.01%</a:t>
+                        <a:t>0.65%</a:t>
                       </a:r>
                       <a:endParaRPr lang="en-US" sz="500" dirty="0">
                         <a:latin typeface="Calibri" charset="0"/>
@@ -10476,7 +10476,7 @@
                           <a:ea typeface="Calibri" pitchFamily="34" charset="-122"/>
                           <a:cs typeface="Calibri" pitchFamily="34" charset="-120"/>
                         </a:rPr>
-                        <a:t>0.01%</a:t>
+                        <a:t>0.70%</a:t>
                       </a:r>
                       <a:endParaRPr lang="en-US" sz="500" dirty="0">
                         <a:latin typeface="Calibri" charset="0"/>
@@ -10541,7 +10541,7 @@
                           <a:ea typeface="Calibri" pitchFamily="34" charset="-122"/>
                           <a:cs typeface="Calibri" pitchFamily="34" charset="-120"/>
                         </a:rPr>
-                        <a:t>0.01%</a:t>
+                        <a:t>0.73%</a:t>
                       </a:r>
                       <a:endParaRPr lang="en-US" sz="500" dirty="0">
                         <a:latin typeface="Calibri" charset="0"/>
@@ -10606,7 +10606,7 @@
                           <a:ea typeface="Calibri" pitchFamily="34" charset="-122"/>
                           <a:cs typeface="Calibri" pitchFamily="34" charset="-120"/>
                         </a:rPr>
-                        <a:t>0.01%</a:t>
+                        <a:t>0.72%</a:t>
                       </a:r>
                       <a:endParaRPr lang="en-US" sz="500" dirty="0">
                         <a:latin typeface="Calibri" charset="0"/>
@@ -10671,7 +10671,7 @@
                           <a:ea typeface="Calibri" pitchFamily="34" charset="-122"/>
                           <a:cs typeface="Calibri" pitchFamily="34" charset="-120"/>
                         </a:rPr>
-                        <a:t>0.01%</a:t>
+                        <a:t>0.87%</a:t>
                       </a:r>
                       <a:endParaRPr lang="en-US" sz="500" dirty="0">
                         <a:latin typeface="Calibri" charset="0"/>
@@ -10801,7 +10801,7 @@
                           <a:ea typeface="Calibri" pitchFamily="34" charset="-122"/>
                           <a:cs typeface="Calibri" pitchFamily="34" charset="-120"/>
                         </a:rPr>
-                        <a:t>8.50%</a:t>
+                        <a:t>14.88%</a:t>
                       </a:r>
                       <a:endParaRPr lang="en-US" sz="500" dirty="0">
                         <a:latin typeface="Calibri" charset="0"/>
@@ -11041,7 +11041,7 @@
                           <a:ea typeface="Calibri" pitchFamily="34" charset="-122"/>
                           <a:cs typeface="Calibri" pitchFamily="34" charset="-120"/>
                         </a:rPr>
-                        <a:t>0.00%</a:t>
+                        <a:t>0.37%</a:t>
                       </a:r>
                       <a:endParaRPr lang="en-US" sz="500" dirty="0">
                         <a:latin typeface="Calibri" charset="0"/>
@@ -11106,7 +11106,7 @@
                           <a:ea typeface="Calibri" pitchFamily="34" charset="-122"/>
                           <a:cs typeface="Calibri" pitchFamily="34" charset="-120"/>
                         </a:rPr>
-                        <a:t>0.00%</a:t>
+                        <a:t>0.43%</a:t>
                       </a:r>
                       <a:endParaRPr lang="en-US" sz="500" dirty="0">
                         <a:latin typeface="Calibri" charset="0"/>
@@ -11171,7 +11171,7 @@
                           <a:ea typeface="Calibri" pitchFamily="34" charset="-122"/>
                           <a:cs typeface="Calibri" pitchFamily="34" charset="-120"/>
                         </a:rPr>
-                        <a:t>0.00%</a:t>
+                        <a:t>0.48%</a:t>
                       </a:r>
                       <a:endParaRPr lang="en-US" sz="500" dirty="0">
                         <a:latin typeface="Calibri" charset="0"/>
@@ -11236,7 +11236,7 @@
                           <a:ea typeface="Calibri" pitchFamily="34" charset="-122"/>
                           <a:cs typeface="Calibri" pitchFamily="34" charset="-120"/>
                         </a:rPr>
-                        <a:t>0.01%</a:t>
+                        <a:t>0.84%</a:t>
                       </a:r>
                       <a:endParaRPr lang="en-US" sz="500" dirty="0">
                         <a:latin typeface="Calibri" charset="0"/>
@@ -11301,7 +11301,7 @@
                           <a:ea typeface="Calibri" pitchFamily="34" charset="-122"/>
                           <a:cs typeface="Calibri" pitchFamily="34" charset="-120"/>
                         </a:rPr>
-                        <a:t>0.01%</a:t>
+                        <a:t>0.98%</a:t>
                       </a:r>
                       <a:endParaRPr lang="en-US" sz="500" dirty="0">
                         <a:latin typeface="Calibri" charset="0"/>
@@ -11366,7 +11366,7 @@
                           <a:ea typeface="Calibri" pitchFamily="34" charset="-122"/>
                           <a:cs typeface="Calibri" pitchFamily="34" charset="-120"/>
                         </a:rPr>
-                        <a:t>0.01%</a:t>
+                        <a:t>0.68%</a:t>
                       </a:r>
                       <a:endParaRPr lang="en-US" sz="500" dirty="0">
                         <a:latin typeface="Calibri" charset="0"/>
@@ -11431,7 +11431,7 @@
                           <a:ea typeface="Calibri" pitchFamily="34" charset="-122"/>
                           <a:cs typeface="Calibri" pitchFamily="34" charset="-120"/>
                         </a:rPr>
-                        <a:t>0.01%</a:t>
+                        <a:t>0.96%</a:t>
                       </a:r>
                       <a:endParaRPr lang="en-US" sz="500" dirty="0">
                         <a:latin typeface="Calibri" charset="0"/>
@@ -11496,7 +11496,7 @@
                           <a:ea typeface="Calibri" pitchFamily="34" charset="-122"/>
                           <a:cs typeface="Calibri" pitchFamily="34" charset="-120"/>
                         </a:rPr>
-                        <a:t>0.01%</a:t>
+                        <a:t>0.93%</a:t>
                       </a:r>
                       <a:endParaRPr lang="en-US" sz="500" dirty="0">
                         <a:latin typeface="Calibri" charset="0"/>
@@ -11561,7 +11561,7 @@
                           <a:ea typeface="Calibri" pitchFamily="34" charset="-122"/>
                           <a:cs typeface="Calibri" pitchFamily="34" charset="-120"/>
                         </a:rPr>
-                        <a:t>0.01%</a:t>
+                        <a:t>0.92%</a:t>
                       </a:r>
                       <a:endParaRPr lang="en-US" sz="500" dirty="0">
                         <a:latin typeface="Calibri" charset="0"/>
@@ -11626,7 +11626,7 @@
                           <a:ea typeface="Calibri" pitchFamily="34" charset="-122"/>
                           <a:cs typeface="Calibri" pitchFamily="34" charset="-120"/>
                         </a:rPr>
-                        <a:t>0.01%</a:t>
+                        <a:t>1.14%</a:t>
                       </a:r>
                       <a:endParaRPr lang="en-US" sz="500" dirty="0">
                         <a:latin typeface="Calibri" charset="0"/>
@@ -11691,7 +11691,7 @@
                           <a:ea typeface="Calibri" pitchFamily="34" charset="-122"/>
                           <a:cs typeface="Calibri" pitchFamily="34" charset="-120"/>
                         </a:rPr>
-                        <a:t>0.01%</a:t>
+                        <a:t>1.04%</a:t>
                       </a:r>
                       <a:endParaRPr lang="en-US" sz="500" dirty="0">
                         <a:latin typeface="Calibri" charset="0"/>
@@ -11756,7 +11756,7 @@
                           <a:ea typeface="Calibri" pitchFamily="34" charset="-122"/>
                           <a:cs typeface="Calibri" pitchFamily="34" charset="-120"/>
                         </a:rPr>
-                        <a:t>0.09%</a:t>
+                        <a:t>9.13%</a:t>
                       </a:r>
                       <a:endParaRPr lang="en-US" sz="500" dirty="0">
                         <a:latin typeface="Calibri" charset="0"/>
@@ -12984,7 +12984,7 @@
                           <a:ea typeface="Calibri" pitchFamily="34" charset="-122"/>
                           <a:cs typeface="Calibri" pitchFamily="34" charset="-120"/>
                         </a:rPr>
-                        <a:t>0.01%</a:t>
+                        <a:t>0.74%</a:t>
                       </a:r>
                       <a:endParaRPr lang="en-US" sz="500" dirty="0">
                         <a:latin typeface="Calibri" charset="0"/>
@@ -13049,7 +13049,7 @@
                           <a:ea typeface="Calibri" pitchFamily="34" charset="-122"/>
                           <a:cs typeface="Calibri" pitchFamily="34" charset="-120"/>
                         </a:rPr>
-                        <a:t>0.01%</a:t>
+                        <a:t>0.82%</a:t>
                       </a:r>
                       <a:endParaRPr lang="en-US" sz="500" dirty="0">
                         <a:latin typeface="Calibri" charset="0"/>
@@ -13114,7 +13114,7 @@
                           <a:ea typeface="Calibri" pitchFamily="34" charset="-122"/>
                           <a:cs typeface="Calibri" pitchFamily="34" charset="-120"/>
                         </a:rPr>
-                        <a:t>0.01%</a:t>
+                        <a:t>0.75%</a:t>
                       </a:r>
                       <a:endParaRPr lang="en-US" sz="500" dirty="0">
                         <a:latin typeface="Calibri" charset="0"/>
@@ -13179,7 +13179,7 @@
                           <a:ea typeface="Calibri" pitchFamily="34" charset="-122"/>
                           <a:cs typeface="Calibri" pitchFamily="34" charset="-120"/>
                         </a:rPr>
-                        <a:t>0.01%</a:t>
+                        <a:t>0.88%</a:t>
                       </a:r>
                       <a:endParaRPr lang="en-US" sz="500" dirty="0">
                         <a:latin typeface="Calibri" charset="0"/>
@@ -13244,7 +13244,7 @@
                           <a:ea typeface="Calibri" pitchFamily="34" charset="-122"/>
                           <a:cs typeface="Calibri" pitchFamily="34" charset="-120"/>
                         </a:rPr>
-                        <a:t>0.01%</a:t>
+                        <a:t>0.80%</a:t>
                       </a:r>
                       <a:endParaRPr lang="en-US" sz="500" dirty="0">
                         <a:latin typeface="Calibri" charset="0"/>
@@ -13309,7 +13309,7 @@
                           <a:ea typeface="Calibri" pitchFamily="34" charset="-122"/>
                           <a:cs typeface="Calibri" pitchFamily="34" charset="-120"/>
                         </a:rPr>
-                        <a:t>0.01%</a:t>
+                        <a:t>0.82%</a:t>
                       </a:r>
                       <a:endParaRPr lang="en-US" sz="500" dirty="0">
                         <a:latin typeface="Calibri" charset="0"/>
@@ -13374,7 +13374,7 @@
                           <a:ea typeface="Calibri" pitchFamily="34" charset="-122"/>
                           <a:cs typeface="Calibri" pitchFamily="34" charset="-120"/>
                         </a:rPr>
-                        <a:t>0.01%</a:t>
+                        <a:t>0.76%</a:t>
                       </a:r>
                       <a:endParaRPr lang="en-US" sz="500" dirty="0">
                         <a:latin typeface="Calibri" charset="0"/>
@@ -13439,7 +13439,7 @@
                           <a:ea typeface="Calibri" pitchFamily="34" charset="-122"/>
                           <a:cs typeface="Calibri" pitchFamily="34" charset="-120"/>
                         </a:rPr>
-                        <a:t>0.01%</a:t>
+                        <a:t>0.68%</a:t>
                       </a:r>
                       <a:endParaRPr lang="en-US" sz="500" dirty="0">
                         <a:latin typeface="Calibri" charset="0"/>
@@ -13504,7 +13504,7 @@
                           <a:ea typeface="Calibri" pitchFamily="34" charset="-122"/>
                           <a:cs typeface="Calibri" pitchFamily="34" charset="-120"/>
                         </a:rPr>
-                        <a:t>0.01%</a:t>
+                        <a:t>0.67%</a:t>
                       </a:r>
                       <a:endParaRPr lang="en-US" sz="500" dirty="0">
                         <a:latin typeface="Calibri" charset="0"/>
@@ -13569,7 +13569,7 @@
                           <a:ea typeface="Calibri" pitchFamily="34" charset="-122"/>
                           <a:cs typeface="Calibri" pitchFamily="34" charset="-120"/>
                         </a:rPr>
-                        <a:t>0.01%</a:t>
+                        <a:t>0.62%</a:t>
                       </a:r>
                       <a:endParaRPr lang="en-US" sz="500" dirty="0">
                         <a:latin typeface="Calibri" charset="0"/>
@@ -13699,7 +13699,7 @@
                           <a:ea typeface="Calibri" pitchFamily="34" charset="-122"/>
                           <a:cs typeface="Calibri" pitchFamily="34" charset="-120"/>
                         </a:rPr>
-                        <a:t>7.57%</a:t>
+                        <a:t>15.86%</a:t>
                       </a:r>
                       <a:endParaRPr lang="en-US" sz="500" dirty="0">
                         <a:latin typeface="Calibri" charset="0"/>
@@ -13885,7 +13885,7 @@
                           <a:ea typeface="Calibri" pitchFamily="34" charset="-122"/>
                           <a:cs typeface="Calibri" pitchFamily="34" charset="-120"/>
                         </a:rPr>
-                        <a:t>0.01%</a:t>
+                        <a:t>1.17%</a:t>
                       </a:r>
                       <a:endParaRPr lang="en-US" sz="500" dirty="0">
                         <a:latin typeface="Calibri" charset="0"/>
@@ -13950,7 +13950,7 @@
                           <a:ea typeface="Calibri" pitchFamily="34" charset="-122"/>
                           <a:cs typeface="Calibri" pitchFamily="34" charset="-120"/>
                         </a:rPr>
-                        <a:t>0.01%</a:t>
+                        <a:t>1.11%</a:t>
                       </a:r>
                       <a:endParaRPr lang="en-US" sz="500" dirty="0">
                         <a:latin typeface="Calibri" charset="0"/>
@@ -14015,7 +14015,7 @@
                           <a:ea typeface="Calibri" pitchFamily="34" charset="-122"/>
                           <a:cs typeface="Calibri" pitchFamily="34" charset="-120"/>
                         </a:rPr>
-                        <a:t>0.01%</a:t>
+                        <a:t>1.19%</a:t>
                       </a:r>
                       <a:endParaRPr lang="en-US" sz="500" dirty="0">
                         <a:latin typeface="Calibri" charset="0"/>
@@ -14080,7 +14080,7 @@
                           <a:ea typeface="Calibri" pitchFamily="34" charset="-122"/>
                           <a:cs typeface="Calibri" pitchFamily="34" charset="-120"/>
                         </a:rPr>
-                        <a:t>0.01%</a:t>
+                        <a:t>1.06%</a:t>
                       </a:r>
                       <a:endParaRPr lang="en-US" sz="500" dirty="0">
                         <a:latin typeface="Calibri" charset="0"/>
@@ -14145,7 +14145,7 @@
                           <a:ea typeface="Calibri" pitchFamily="34" charset="-122"/>
                           <a:cs typeface="Calibri" pitchFamily="34" charset="-120"/>
                         </a:rPr>
-                        <a:t>0.01%</a:t>
+                        <a:t>1.24%</a:t>
                       </a:r>
                       <a:endParaRPr lang="en-US" sz="500" dirty="0">
                         <a:latin typeface="Calibri" charset="0"/>
@@ -14210,7 +14210,7 @@
                           <a:ea typeface="Calibri" pitchFamily="34" charset="-122"/>
                           <a:cs typeface="Calibri" pitchFamily="34" charset="-120"/>
                         </a:rPr>
-                        <a:t>0.01%</a:t>
+                        <a:t>1.05%</a:t>
                       </a:r>
                       <a:endParaRPr lang="en-US" sz="500" dirty="0">
                         <a:latin typeface="Calibri" charset="0"/>
@@ -14275,7 +14275,7 @@
                           <a:ea typeface="Calibri" pitchFamily="34" charset="-122"/>
                           <a:cs typeface="Calibri" pitchFamily="34" charset="-120"/>
                         </a:rPr>
-                        <a:t>0.01%</a:t>
+                        <a:t>1.10%</a:t>
                       </a:r>
                       <a:endParaRPr lang="en-US" sz="500" dirty="0">
                         <a:latin typeface="Calibri" charset="0"/>
@@ -14340,7 +14340,7 @@
                           <a:ea typeface="Calibri" pitchFamily="34" charset="-122"/>
                           <a:cs typeface="Calibri" pitchFamily="34" charset="-120"/>
                         </a:rPr>
-                        <a:t>0.01%</a:t>
+                        <a:t>1.08%</a:t>
                       </a:r>
                       <a:endParaRPr lang="en-US" sz="500" dirty="0">
                         <a:latin typeface="Calibri" charset="0"/>
@@ -14405,7 +14405,7 @@
                           <a:ea typeface="Calibri" pitchFamily="34" charset="-122"/>
                           <a:cs typeface="Calibri" pitchFamily="34" charset="-120"/>
                         </a:rPr>
-                        <a:t>0.01%</a:t>
+                        <a:t>0.98%</a:t>
                       </a:r>
                       <a:endParaRPr lang="en-US" sz="500" dirty="0">
                         <a:latin typeface="Calibri" charset="0"/>
@@ -14470,7 +14470,7 @@
                           <a:ea typeface="Calibri" pitchFamily="34" charset="-122"/>
                           <a:cs typeface="Calibri" pitchFamily="34" charset="-120"/>
                         </a:rPr>
-                        <a:t>0.01%</a:t>
+                        <a:t>0.95%</a:t>
                       </a:r>
                       <a:endParaRPr lang="en-US" sz="500" dirty="0">
                         <a:latin typeface="Calibri" charset="0"/>
@@ -14535,7 +14535,7 @@
                           <a:ea typeface="Calibri" pitchFamily="34" charset="-122"/>
                           <a:cs typeface="Calibri" pitchFamily="34" charset="-120"/>
                         </a:rPr>
-                        <a:t>0.01%</a:t>
+                        <a:t>0.91%</a:t>
                       </a:r>
                       <a:endParaRPr lang="en-US" sz="500" dirty="0">
                         <a:latin typeface="Calibri" charset="0"/>
@@ -14600,7 +14600,7 @@
                           <a:ea typeface="Calibri" pitchFamily="34" charset="-122"/>
                           <a:cs typeface="Calibri" pitchFamily="34" charset="-120"/>
                         </a:rPr>
-                        <a:t>0.01%</a:t>
+                        <a:t>0.95%</a:t>
                       </a:r>
                       <a:endParaRPr lang="en-US" sz="500" dirty="0">
                         <a:latin typeface="Calibri" charset="0"/>
@@ -14665,7 +14665,7 @@
                           <a:ea typeface="Calibri" pitchFamily="34" charset="-122"/>
                           <a:cs typeface="Calibri" pitchFamily="34" charset="-120"/>
                         </a:rPr>
-                        <a:t>0.13%</a:t>
+                        <a:t>13.54%</a:t>
                       </a:r>
                       <a:endParaRPr lang="en-US" sz="500" dirty="0">
                         <a:latin typeface="Calibri" charset="0"/>
@@ -15893,7 +15893,7 @@
                           <a:ea typeface="Calibri" pitchFamily="34" charset="-122"/>
                           <a:cs typeface="Calibri" pitchFamily="34" charset="-120"/>
                         </a:rPr>
-                        <a:t>0.01%</a:t>
+                        <a:t>0.51%</a:t>
                       </a:r>
                       <a:endParaRPr lang="en-US" sz="500" dirty="0">
                         <a:latin typeface="Calibri" charset="0"/>
@@ -15958,7 +15958,7 @@
                           <a:ea typeface="Calibri" pitchFamily="34" charset="-122"/>
                           <a:cs typeface="Calibri" pitchFamily="34" charset="-120"/>
                         </a:rPr>
-                        <a:t>0.00%</a:t>
+                        <a:t>0.45%</a:t>
                       </a:r>
                       <a:endParaRPr lang="en-US" sz="500" dirty="0">
                         <a:latin typeface="Calibri" charset="0"/>
@@ -16023,7 +16023,7 @@
                           <a:ea typeface="Calibri" pitchFamily="34" charset="-122"/>
                           <a:cs typeface="Calibri" pitchFamily="34" charset="-120"/>
                         </a:rPr>
-                        <a:t>0.00%</a:t>
+                        <a:t>0.47%</a:t>
                       </a:r>
                       <a:endParaRPr lang="en-US" sz="500" dirty="0">
                         <a:latin typeface="Calibri" charset="0"/>
@@ -16088,7 +16088,7 @@
                           <a:ea typeface="Calibri" pitchFamily="34" charset="-122"/>
                           <a:cs typeface="Calibri" pitchFamily="34" charset="-120"/>
                         </a:rPr>
-                        <a:t>0.00%</a:t>
+                        <a:t>0.42%</a:t>
                       </a:r>
                       <a:endParaRPr lang="en-US" sz="500" dirty="0">
                         <a:latin typeface="Calibri" charset="0"/>
@@ -16153,7 +16153,7 @@
                           <a:ea typeface="Calibri" pitchFamily="34" charset="-122"/>
                           <a:cs typeface="Calibri" pitchFamily="34" charset="-120"/>
                         </a:rPr>
-                        <a:t>0.00%</a:t>
+                        <a:t>0.37%</a:t>
                       </a:r>
                       <a:endParaRPr lang="en-US" sz="500" dirty="0">
                         <a:latin typeface="Calibri" charset="0"/>
@@ -16218,7 +16218,7 @@
                           <a:ea typeface="Calibri" pitchFamily="34" charset="-122"/>
                           <a:cs typeface="Calibri" pitchFamily="34" charset="-120"/>
                         </a:rPr>
-                        <a:t>0.00%</a:t>
+                        <a:t>0.36%</a:t>
                       </a:r>
                       <a:endParaRPr lang="en-US" sz="500" dirty="0">
                         <a:latin typeface="Calibri" charset="0"/>
@@ -16283,7 +16283,7 @@
                           <a:ea typeface="Calibri" pitchFamily="34" charset="-122"/>
                           <a:cs typeface="Calibri" pitchFamily="34" charset="-120"/>
                         </a:rPr>
-                        <a:t>0.00%</a:t>
+                        <a:t>0.36%</a:t>
                       </a:r>
                       <a:endParaRPr lang="en-US" sz="500" dirty="0">
                         <a:latin typeface="Calibri" charset="0"/>
@@ -16348,7 +16348,7 @@
                           <a:ea typeface="Calibri" pitchFamily="34" charset="-122"/>
                           <a:cs typeface="Calibri" pitchFamily="34" charset="-120"/>
                         </a:rPr>
-                        <a:t>0.00%</a:t>
+                        <a:t>0.34%</a:t>
                       </a:r>
                       <a:endParaRPr lang="en-US" sz="500" dirty="0">
                         <a:latin typeface="Calibri" charset="0"/>
@@ -16413,7 +16413,7 @@
                           <a:ea typeface="Calibri" pitchFamily="34" charset="-122"/>
                           <a:cs typeface="Calibri" pitchFamily="34" charset="-120"/>
                         </a:rPr>
-                        <a:t>0.00%</a:t>
+                        <a:t>0.34%</a:t>
                       </a:r>
                       <a:endParaRPr lang="en-US" sz="500" dirty="0">
                         <a:latin typeface="Calibri" charset="0"/>
@@ -16478,7 +16478,7 @@
                           <a:ea typeface="Calibri" pitchFamily="34" charset="-122"/>
                           <a:cs typeface="Calibri" pitchFamily="34" charset="-120"/>
                         </a:rPr>
-                        <a:t>0.00%</a:t>
+                        <a:t>0.32%</a:t>
                       </a:r>
                       <a:endParaRPr lang="en-US" sz="500" dirty="0">
                         <a:latin typeface="Calibri" charset="0"/>
@@ -16608,7 +16608,7 @@
                           <a:ea typeface="Calibri" pitchFamily="34" charset="-122"/>
                           <a:cs typeface="Calibri" pitchFamily="34" charset="-120"/>
                         </a:rPr>
-                        <a:t>-2.95%</a:t>
+                        <a:t>0.90%</a:t>
                       </a:r>
                       <a:endParaRPr lang="en-US" sz="500" dirty="0">
                         <a:latin typeface="Calibri" charset="0"/>
@@ -16794,7 +16794,7 @@
                           <a:ea typeface="Calibri" pitchFamily="34" charset="-122"/>
                           <a:cs typeface="Calibri" pitchFamily="34" charset="-120"/>
                         </a:rPr>
-                        <a:t>0.01%</a:t>
+                        <a:t>0.85%</a:t>
                       </a:r>
                       <a:endParaRPr lang="en-US" sz="500" dirty="0">
                         <a:latin typeface="Calibri" charset="0"/>
@@ -16859,7 +16859,7 @@
                           <a:ea typeface="Calibri" pitchFamily="34" charset="-122"/>
                           <a:cs typeface="Calibri" pitchFamily="34" charset="-120"/>
                         </a:rPr>
-                        <a:t>0.01%</a:t>
+                        <a:t>0.69%</a:t>
                       </a:r>
                       <a:endParaRPr lang="en-US" sz="500" dirty="0">
                         <a:latin typeface="Calibri" charset="0"/>
@@ -16924,7 +16924,7 @@
                           <a:ea typeface="Calibri" pitchFamily="34" charset="-122"/>
                           <a:cs typeface="Calibri" pitchFamily="34" charset="-120"/>
                         </a:rPr>
-                        <a:t>0.01%</a:t>
+                        <a:t>0.64%</a:t>
                       </a:r>
                       <a:endParaRPr lang="en-US" sz="500" dirty="0">
                         <a:latin typeface="Calibri" charset="0"/>
@@ -16989,7 +16989,7 @@
                           <a:ea typeface="Calibri" pitchFamily="34" charset="-122"/>
                           <a:cs typeface="Calibri" pitchFamily="34" charset="-120"/>
                         </a:rPr>
-                        <a:t>0.01%</a:t>
+                        <a:t>0.72%</a:t>
                       </a:r>
                       <a:endParaRPr lang="en-US" sz="500" dirty="0">
                         <a:latin typeface="Calibri" charset="0"/>
@@ -17054,7 +17054,7 @@
                           <a:ea typeface="Calibri" pitchFamily="34" charset="-122"/>
                           <a:cs typeface="Calibri" pitchFamily="34" charset="-120"/>
                         </a:rPr>
-                        <a:t>0.01%</a:t>
+                        <a:t>0.57%</a:t>
                       </a:r>
                       <a:endParaRPr lang="en-US" sz="500" dirty="0">
                         <a:latin typeface="Calibri" charset="0"/>
@@ -17119,7 +17119,7 @@
                           <a:ea typeface="Calibri" pitchFamily="34" charset="-122"/>
                           <a:cs typeface="Calibri" pitchFamily="34" charset="-120"/>
                         </a:rPr>
-                        <a:t>0.01%</a:t>
+                        <a:t>0.60%</a:t>
                       </a:r>
                       <a:endParaRPr lang="en-US" sz="500" dirty="0">
                         <a:latin typeface="Calibri" charset="0"/>
@@ -17184,7 +17184,7 @@
                           <a:ea typeface="Calibri" pitchFamily="34" charset="-122"/>
                           <a:cs typeface="Calibri" pitchFamily="34" charset="-120"/>
                         </a:rPr>
-                        <a:t>0.01%</a:t>
+                        <a:t>0.58%</a:t>
                       </a:r>
                       <a:endParaRPr lang="en-US" sz="500" dirty="0">
                         <a:latin typeface="Calibri" charset="0"/>
@@ -17249,7 +17249,7 @@
                           <a:ea typeface="Calibri" pitchFamily="34" charset="-122"/>
                           <a:cs typeface="Calibri" pitchFamily="34" charset="-120"/>
                         </a:rPr>
-                        <a:t>0.01%</a:t>
+                        <a:t>0.57%</a:t>
                       </a:r>
                       <a:endParaRPr lang="en-US" sz="500" dirty="0">
                         <a:latin typeface="Calibri" charset="0"/>
@@ -17314,7 +17314,7 @@
                           <a:ea typeface="Calibri" pitchFamily="34" charset="-122"/>
                           <a:cs typeface="Calibri" pitchFamily="34" charset="-120"/>
                         </a:rPr>
-                        <a:t>0.01%</a:t>
+                        <a:t>0.55%</a:t>
                       </a:r>
                       <a:endParaRPr lang="en-US" sz="500" dirty="0">
                         <a:latin typeface="Calibri" charset="0"/>
@@ -17379,7 +17379,7 @@
                           <a:ea typeface="Calibri" pitchFamily="34" charset="-122"/>
                           <a:cs typeface="Calibri" pitchFamily="34" charset="-120"/>
                         </a:rPr>
-                        <a:t>0.01%</a:t>
+                        <a:t>0.54%</a:t>
                       </a:r>
                       <a:endParaRPr lang="en-US" sz="500" dirty="0">
                         <a:latin typeface="Calibri" charset="0"/>
@@ -17444,7 +17444,7 @@
                           <a:ea typeface="Calibri" pitchFamily="34" charset="-122"/>
                           <a:cs typeface="Calibri" pitchFamily="34" charset="-120"/>
                         </a:rPr>
-                        <a:t>0.00%</a:t>
+                        <a:t>0.49%</a:t>
                       </a:r>
                       <a:endParaRPr lang="en-US" sz="500" dirty="0">
                         <a:latin typeface="Calibri" charset="0"/>
@@ -17509,7 +17509,7 @@
                           <a:ea typeface="Calibri" pitchFamily="34" charset="-122"/>
                           <a:cs typeface="Calibri" pitchFamily="34" charset="-120"/>
                         </a:rPr>
-                        <a:t>0.00%</a:t>
+                        <a:t>0.37%</a:t>
                       </a:r>
                       <a:endParaRPr lang="en-US" sz="500" dirty="0">
                         <a:latin typeface="Calibri" charset="0"/>
@@ -17574,7 +17574,7 @@
                           <a:ea typeface="Calibri" pitchFamily="34" charset="-122"/>
                           <a:cs typeface="Calibri" pitchFamily="34" charset="-120"/>
                         </a:rPr>
-                        <a:t>0.07%</a:t>
+                        <a:t>7.42%</a:t>
                       </a:r>
                       <a:endParaRPr lang="en-US" sz="500" dirty="0">
                         <a:latin typeface="Calibri" charset="0"/>
@@ -19703,7 +19703,7 @@
                           <a:ea typeface="Calibri" pitchFamily="34" charset="-122"/>
                           <a:cs typeface="Calibri" pitchFamily="34" charset="-120"/>
                         </a:rPr>
-                        <a:t>0.00%</a:t>
+                        <a:t>0.39%</a:t>
                       </a:r>
                       <a:endParaRPr lang="en-US" sz="500" dirty="0">
                         <a:latin typeface="Calibri" charset="0"/>
@@ -19768,7 +19768,7 @@
                           <a:ea typeface="Calibri" pitchFamily="34" charset="-122"/>
                           <a:cs typeface="Calibri" pitchFamily="34" charset="-120"/>
                         </a:rPr>
-                        <a:t>0.00%</a:t>
+                        <a:t>0.40%</a:t>
                       </a:r>
                       <a:endParaRPr lang="en-US" sz="500" dirty="0">
                         <a:latin typeface="Calibri" charset="0"/>
@@ -19833,7 +19833,7 @@
                           <a:ea typeface="Calibri" pitchFamily="34" charset="-122"/>
                           <a:cs typeface="Calibri" pitchFamily="34" charset="-120"/>
                         </a:rPr>
-                        <a:t>0.00%</a:t>
+                        <a:t>0.43%</a:t>
                       </a:r>
                       <a:endParaRPr lang="en-US" sz="500" dirty="0">
                         <a:latin typeface="Calibri" charset="0"/>
@@ -19898,7 +19898,7 @@
                           <a:ea typeface="Calibri" pitchFamily="34" charset="-122"/>
                           <a:cs typeface="Calibri" pitchFamily="34" charset="-120"/>
                         </a:rPr>
-                        <a:t>0.01%</a:t>
+                        <a:t>0.51%</a:t>
                       </a:r>
                       <a:endParaRPr lang="en-US" sz="500" dirty="0">
                         <a:latin typeface="Calibri" charset="0"/>
@@ -19963,7 +19963,7 @@
                           <a:ea typeface="Calibri" pitchFamily="34" charset="-122"/>
                           <a:cs typeface="Calibri" pitchFamily="34" charset="-120"/>
                         </a:rPr>
-                        <a:t>0.01%</a:t>
+                        <a:t>0.53%</a:t>
                       </a:r>
                       <a:endParaRPr lang="en-US" sz="500" dirty="0">
                         <a:latin typeface="Calibri" charset="0"/>
@@ -20028,7 +20028,7 @@
                           <a:ea typeface="Calibri" pitchFamily="34" charset="-122"/>
                           <a:cs typeface="Calibri" pitchFamily="34" charset="-120"/>
                         </a:rPr>
-                        <a:t>0.00%</a:t>
+                        <a:t>0.48%</a:t>
                       </a:r>
                       <a:endParaRPr lang="en-US" sz="500" dirty="0">
                         <a:latin typeface="Calibri" charset="0"/>
@@ -20093,7 +20093,7 @@
                           <a:ea typeface="Calibri" pitchFamily="34" charset="-122"/>
                           <a:cs typeface="Calibri" pitchFamily="34" charset="-120"/>
                         </a:rPr>
-                        <a:t>0.00%</a:t>
+                        <a:t>0.47%</a:t>
                       </a:r>
                       <a:endParaRPr lang="en-US" sz="500" dirty="0">
                         <a:latin typeface="Calibri" charset="0"/>
@@ -20483,7 +20483,7 @@
                           <a:ea typeface="Calibri" pitchFamily="34" charset="-122"/>
                           <a:cs typeface="Calibri" pitchFamily="34" charset="-120"/>
                         </a:rPr>
-                        <a:t>2.60%</a:t>
+                        <a:t>5.90%</a:t>
                       </a:r>
                       <a:endParaRPr lang="en-US" sz="500" dirty="0">
                         <a:latin typeface="Calibri" charset="0"/>

--- a/folletos/2026-04/pptx/FIP_VANTRUST_LIQUIDEZ_EFECTIVO.pptx
+++ b/folletos/2026-04/pptx/FIP_VANTRUST_LIQUIDEZ_EFECTIVO.pptx
@@ -3113,7 +3113,7 @@
                 <a:ea typeface="Calibri" pitchFamily="34" charset="-122"/>
                 <a:cs typeface="Calibri" pitchFamily="34" charset="-120"/>
               </a:rPr>
-              <a:t>prueba CLP</a:t>
+              <a:t>prueba 13 CLP</a:t>
             </a:r>
             <a:endParaRPr lang="en-US" sz="800" dirty="0"/>
           </a:p>

--- a/folletos/2026-04/pptx/FIP_VANTRUST_LIQUIDEZ_EFECTIVO.pptx
+++ b/folletos/2026-04/pptx/FIP_VANTRUST_LIQUIDEZ_EFECTIVO.pptx
@@ -189,38 +189,200 @@
           </c:marker>
           <c:cat>
             <c:multiLvlStrRef>
-              <c:f>Sheet1!$A$2:$A$11</c:f>
+              <c:f>Sheet1!$A$2:$A$65</c:f>
               <c:multiLvlStrCache>
-                <c:ptCount val="10"/>
+                <c:ptCount val="64"/>
                 <c:lvl>
                   <c:pt idx="0">
+                    <c:v>Feb 2021</c:v>
+                  </c:pt>
+                  <c:pt idx="1">
+                    <c:v>Feb 2021</c:v>
+                  </c:pt>
+                  <c:pt idx="2">
+                    <c:v>Mar 2021</c:v>
+                  </c:pt>
+                  <c:pt idx="3">
+                    <c:v>Apr 2021</c:v>
+                  </c:pt>
+                  <c:pt idx="4">
+                    <c:v>May 2021</c:v>
+                  </c:pt>
+                  <c:pt idx="5">
+                    <c:v>Jun 2021</c:v>
+                  </c:pt>
+                  <c:pt idx="6">
+                    <c:v>Jul 2021</c:v>
+                  </c:pt>
+                  <c:pt idx="7">
+                    <c:v>Aug 2021</c:v>
+                  </c:pt>
+                  <c:pt idx="8">
+                    <c:v>Sep 2021</c:v>
+                  </c:pt>
+                  <c:pt idx="9">
+                    <c:v>Oct 2021</c:v>
+                  </c:pt>
+                  <c:pt idx="10">
+                    <c:v>Nov 2021</c:v>
+                  </c:pt>
+                  <c:pt idx="11">
+                    <c:v>Dec 2021</c:v>
+                  </c:pt>
+                  <c:pt idx="12">
+                    <c:v>Jan 2022</c:v>
+                  </c:pt>
+                  <c:pt idx="13">
+                    <c:v>Feb 2022</c:v>
+                  </c:pt>
+                  <c:pt idx="14">
+                    <c:v>Mar 2022</c:v>
+                  </c:pt>
+                  <c:pt idx="15">
+                    <c:v>Apr 2022</c:v>
+                  </c:pt>
+                  <c:pt idx="16">
+                    <c:v>May 2022</c:v>
+                  </c:pt>
+                  <c:pt idx="17">
+                    <c:v>Jun 2022</c:v>
+                  </c:pt>
+                  <c:pt idx="18">
+                    <c:v>Jul 2022</c:v>
+                  </c:pt>
+                  <c:pt idx="19">
+                    <c:v>Aug 2022</c:v>
+                  </c:pt>
+                  <c:pt idx="20">
+                    <c:v>Sep 2022</c:v>
+                  </c:pt>
+                  <c:pt idx="21">
+                    <c:v>Oct 2022</c:v>
+                  </c:pt>
+                  <c:pt idx="22">
+                    <c:v>Nov 2022</c:v>
+                  </c:pt>
+                  <c:pt idx="23">
+                    <c:v>Dec 2022</c:v>
+                  </c:pt>
+                  <c:pt idx="24">
+                    <c:v>Jan 2023</c:v>
+                  </c:pt>
+                  <c:pt idx="25">
+                    <c:v>Feb 2023</c:v>
+                  </c:pt>
+                  <c:pt idx="26">
+                    <c:v>Mar 2023</c:v>
+                  </c:pt>
+                  <c:pt idx="27">
+                    <c:v>Apr 2023</c:v>
+                  </c:pt>
+                  <c:pt idx="28">
+                    <c:v>May 2023</c:v>
+                  </c:pt>
+                  <c:pt idx="29">
+                    <c:v>Jun 2023</c:v>
+                  </c:pt>
+                  <c:pt idx="30">
+                    <c:v>Jul 2023</c:v>
+                  </c:pt>
+                  <c:pt idx="31">
+                    <c:v>Aug 2023</c:v>
+                  </c:pt>
+                  <c:pt idx="32">
+                    <c:v>Sep 2023</c:v>
+                  </c:pt>
+                  <c:pt idx="33">
+                    <c:v>Oct 2023</c:v>
+                  </c:pt>
+                  <c:pt idx="34">
+                    <c:v>Nov 2023</c:v>
+                  </c:pt>
+                  <c:pt idx="35">
+                    <c:v>Dec 2023</c:v>
+                  </c:pt>
+                  <c:pt idx="36">
+                    <c:v>Jan 2024</c:v>
+                  </c:pt>
+                  <c:pt idx="37">
+                    <c:v>Feb 2024</c:v>
+                  </c:pt>
+                  <c:pt idx="38">
+                    <c:v>Mar 2024</c:v>
+                  </c:pt>
+                  <c:pt idx="39">
+                    <c:v>Apr 2024</c:v>
+                  </c:pt>
+                  <c:pt idx="40">
+                    <c:v>May 2024</c:v>
+                  </c:pt>
+                  <c:pt idx="41">
+                    <c:v>Jun 2024</c:v>
+                  </c:pt>
+                  <c:pt idx="42">
+                    <c:v>Jul 2024</c:v>
+                  </c:pt>
+                  <c:pt idx="43">
+                    <c:v>Aug 2024</c:v>
+                  </c:pt>
+                  <c:pt idx="44">
+                    <c:v>Sep 2024</c:v>
+                  </c:pt>
+                  <c:pt idx="45">
+                    <c:v>Oct 2024</c:v>
+                  </c:pt>
+                  <c:pt idx="46">
+                    <c:v>Nov 2024</c:v>
+                  </c:pt>
+                  <c:pt idx="47">
+                    <c:v>Dec 2024</c:v>
+                  </c:pt>
+                  <c:pt idx="48">
+                    <c:v>Jan 2025</c:v>
+                  </c:pt>
+                  <c:pt idx="49">
+                    <c:v>Feb 2025</c:v>
+                  </c:pt>
+                  <c:pt idx="50">
+                    <c:v>Mar 2025</c:v>
+                  </c:pt>
+                  <c:pt idx="51">
+                    <c:v>Apr 2025</c:v>
+                  </c:pt>
+                  <c:pt idx="52">
+                    <c:v>May 2025</c:v>
+                  </c:pt>
+                  <c:pt idx="53">
+                    <c:v>Jun 2025</c:v>
+                  </c:pt>
+                  <c:pt idx="54">
                     <c:v>Jul 2025</c:v>
                   </c:pt>
-                  <c:pt idx="1">
+                  <c:pt idx="55">
                     <c:v>Aug 2025</c:v>
                   </c:pt>
-                  <c:pt idx="2">
+                  <c:pt idx="56">
                     <c:v>Sep 2025</c:v>
                   </c:pt>
-                  <c:pt idx="3">
+                  <c:pt idx="57">
                     <c:v>Oct 2025</c:v>
                   </c:pt>
-                  <c:pt idx="4">
+                  <c:pt idx="58">
                     <c:v>Nov 2025</c:v>
                   </c:pt>
-                  <c:pt idx="5">
+                  <c:pt idx="59">
                     <c:v>Dec 2025</c:v>
                   </c:pt>
-                  <c:pt idx="6">
+                  <c:pt idx="60">
                     <c:v>Jan 2026</c:v>
                   </c:pt>
-                  <c:pt idx="7">
+                  <c:pt idx="61">
                     <c:v>Feb 2026</c:v>
                   </c:pt>
-                  <c:pt idx="8">
+                  <c:pt idx="62">
                     <c:v>Mar 2026</c:v>
                   </c:pt>
-                  <c:pt idx="9">
+                  <c:pt idx="63">
                     <c:v>Apr 2026</c:v>
                   </c:pt>
                 </c:lvl>
@@ -229,39 +391,201 @@
           </c:cat>
           <c:val>
             <c:numRef>
-              <c:f>Sheet1!$B$2:$B$11</c:f>
+              <c:f>Sheet1!$B$2:$B$65</c:f>
               <c:numCache>
                 <c:formatCode>General</c:formatCode>
-                <c:ptCount val="10"/>
+                <c:ptCount val="64"/>
                 <c:pt idx="0">
                   <c:v>100</c:v>
                 </c:pt>
                 <c:pt idx="1">
-                  <c:v>100.4</c:v>
+                  <c:v>100.02</c:v>
                 </c:pt>
                 <c:pt idx="2">
+                  <c:v>100.05</c:v>
+                </c:pt>
+                <c:pt idx="3">
+                  <c:v>100.08</c:v>
+                </c:pt>
+                <c:pt idx="4">
+                  <c:v>100.1</c:v>
+                </c:pt>
+                <c:pt idx="5">
+                  <c:v>100.13</c:v>
+                </c:pt>
+                <c:pt idx="6">
+                  <c:v>100.18</c:v>
+                </c:pt>
+                <c:pt idx="7">
+                  <c:v>100.24</c:v>
+                </c:pt>
+                <c:pt idx="8">
+                  <c:v>100.37</c:v>
+                </c:pt>
+                <c:pt idx="9">
+                  <c:v>100.58</c:v>
+                </c:pt>
+                <c:pt idx="10">
                   <c:v>100.79</c:v>
                 </c:pt>
-                <c:pt idx="3">
-                  <c:v>101.19</c:v>
+                <c:pt idx="11">
+                  <c:v>101.11</c:v>
                 </c:pt>
-                <c:pt idx="4">
-                  <c:v>101.59</c:v>
+                <c:pt idx="12">
+                  <c:v>101.46</c:v>
                 </c:pt>
-                <c:pt idx="5">
-                  <c:v>101.98</c:v>
+                <c:pt idx="13">
+                  <c:v>101.9</c:v>
                 </c:pt>
-                <c:pt idx="6">
-                  <c:v>102.37</c:v>
+                <c:pt idx="14">
+                  <c:v>102.39</c:v>
                 </c:pt>
-                <c:pt idx="7">
-                  <c:v>102.75</c:v>
+                <c:pt idx="15">
+                  <c:v>102.95</c:v>
                 </c:pt>
-                <c:pt idx="8">
-                  <c:v>103.14</c:v>
+                <c:pt idx="16">
+                  <c:v>103.68</c:v>
                 </c:pt>
-                <c:pt idx="9">
-                  <c:v>103.52</c:v>
+                <c:pt idx="17">
+                  <c:v>104.44</c:v>
+                </c:pt>
+                <c:pt idx="18">
+                  <c:v>105.23</c:v>
+                </c:pt>
+                <c:pt idx="19">
+                  <c:v>106.18</c:v>
+                </c:pt>
+                <c:pt idx="20">
+                  <c:v>107.11</c:v>
+                </c:pt>
+                <c:pt idx="21">
+                  <c:v>108.03</c:v>
+                </c:pt>
+                <c:pt idx="22">
+                  <c:v>109.15</c:v>
+                </c:pt>
+                <c:pt idx="23">
+                  <c:v>110.18</c:v>
+                </c:pt>
+                <c:pt idx="24">
+                  <c:v>111.29</c:v>
+                </c:pt>
+                <c:pt idx="25">
+                  <c:v>112.27</c:v>
+                </c:pt>
+                <c:pt idx="26">
+                  <c:v>113.36</c:v>
+                </c:pt>
+                <c:pt idx="27">
+                  <c:v>114.36</c:v>
+                </c:pt>
+                <c:pt idx="28">
+                  <c:v>115.54</c:v>
+                </c:pt>
+                <c:pt idx="29">
+                  <c:v>116.63</c:v>
+                </c:pt>
+                <c:pt idx="30">
+                  <c:v>117.76</c:v>
+                </c:pt>
+                <c:pt idx="31">
+                  <c:v>118.81</c:v>
+                </c:pt>
+                <c:pt idx="32">
+                  <c:v>119.73</c:v>
+                </c:pt>
+                <c:pt idx="33">
+                  <c:v>120.75</c:v>
+                </c:pt>
+                <c:pt idx="34">
+                  <c:v>121.65</c:v>
+                </c:pt>
+                <c:pt idx="35">
+                  <c:v>122.52</c:v>
+                </c:pt>
+                <c:pt idx="36">
+                  <c:v>123.42</c:v>
+                </c:pt>
+                <c:pt idx="37">
+                  <c:v>124.17</c:v>
+                </c:pt>
+                <c:pt idx="38">
+                  <c:v>124.87</c:v>
+                </c:pt>
+                <c:pt idx="39">
+                  <c:v>125.63</c:v>
+                </c:pt>
+                <c:pt idx="40">
+                  <c:v>126.33</c:v>
+                </c:pt>
+                <c:pt idx="41">
+                  <c:v>126.91</c:v>
+                </c:pt>
+                <c:pt idx="42">
+                  <c:v>127.58</c:v>
+                </c:pt>
+                <c:pt idx="43">
+                  <c:v>128.19</c:v>
+                </c:pt>
+                <c:pt idx="44">
+                  <c:v>128.81</c:v>
+                </c:pt>
+                <c:pt idx="45">
+                  <c:v>129.39</c:v>
+                </c:pt>
+                <c:pt idx="46">
+                  <c:v>129.95</c:v>
+                </c:pt>
+                <c:pt idx="47">
+                  <c:v>130.53</c:v>
+                </c:pt>
+                <c:pt idx="48">
+                  <c:v>131.11</c:v>
+                </c:pt>
+                <c:pt idx="49">
+                  <c:v>131.62</c:v>
+                </c:pt>
+                <c:pt idx="50">
+                  <c:v>132.19</c:v>
+                </c:pt>
+                <c:pt idx="51">
+                  <c:v>132.74</c:v>
+                </c:pt>
+                <c:pt idx="52">
+                  <c:v>133.3</c:v>
+                </c:pt>
+                <c:pt idx="53">
+                  <c:v>133.87</c:v>
+                </c:pt>
+                <c:pt idx="54">
+                  <c:v>134.45</c:v>
+                </c:pt>
+                <c:pt idx="55">
+                  <c:v>134.96</c:v>
+                </c:pt>
+                <c:pt idx="56">
+                  <c:v>135.54</c:v>
+                </c:pt>
+                <c:pt idx="57">
+                  <c:v>136.07</c:v>
+                </c:pt>
+                <c:pt idx="58">
+                  <c:v>136.59</c:v>
+                </c:pt>
+                <c:pt idx="59">
+                  <c:v>137.16</c:v>
+                </c:pt>
+                <c:pt idx="60">
+                  <c:v>137.69</c:v>
+                </c:pt>
+                <c:pt idx="61">
+                  <c:v>138.19</c:v>
+                </c:pt>
+                <c:pt idx="62">
+                  <c:v>138.73</c:v>
+                </c:pt>
+                <c:pt idx="63">
+                  <c:v>139.25</c:v>
                 </c:pt>
               </c:numCache>
             </c:numRef>
@@ -339,38 +663,200 @@
           </c:marker>
           <c:cat>
             <c:multiLvlStrRef>
-              <c:f>Sheet1!$A$2:$A$11</c:f>
+              <c:f>Sheet1!$A$2:$A$65</c:f>
               <c:multiLvlStrCache>
-                <c:ptCount val="10"/>
+                <c:ptCount val="64"/>
                 <c:lvl>
                   <c:pt idx="0">
+                    <c:v>Feb 2021</c:v>
+                  </c:pt>
+                  <c:pt idx="1">
+                    <c:v>Feb 2021</c:v>
+                  </c:pt>
+                  <c:pt idx="2">
+                    <c:v>Mar 2021</c:v>
+                  </c:pt>
+                  <c:pt idx="3">
+                    <c:v>Apr 2021</c:v>
+                  </c:pt>
+                  <c:pt idx="4">
+                    <c:v>May 2021</c:v>
+                  </c:pt>
+                  <c:pt idx="5">
+                    <c:v>Jun 2021</c:v>
+                  </c:pt>
+                  <c:pt idx="6">
+                    <c:v>Jul 2021</c:v>
+                  </c:pt>
+                  <c:pt idx="7">
+                    <c:v>Aug 2021</c:v>
+                  </c:pt>
+                  <c:pt idx="8">
+                    <c:v>Sep 2021</c:v>
+                  </c:pt>
+                  <c:pt idx="9">
+                    <c:v>Oct 2021</c:v>
+                  </c:pt>
+                  <c:pt idx="10">
+                    <c:v>Nov 2021</c:v>
+                  </c:pt>
+                  <c:pt idx="11">
+                    <c:v>Dec 2021</c:v>
+                  </c:pt>
+                  <c:pt idx="12">
+                    <c:v>Jan 2022</c:v>
+                  </c:pt>
+                  <c:pt idx="13">
+                    <c:v>Feb 2022</c:v>
+                  </c:pt>
+                  <c:pt idx="14">
+                    <c:v>Mar 2022</c:v>
+                  </c:pt>
+                  <c:pt idx="15">
+                    <c:v>Apr 2022</c:v>
+                  </c:pt>
+                  <c:pt idx="16">
+                    <c:v>May 2022</c:v>
+                  </c:pt>
+                  <c:pt idx="17">
+                    <c:v>Jun 2022</c:v>
+                  </c:pt>
+                  <c:pt idx="18">
+                    <c:v>Jul 2022</c:v>
+                  </c:pt>
+                  <c:pt idx="19">
+                    <c:v>Aug 2022</c:v>
+                  </c:pt>
+                  <c:pt idx="20">
+                    <c:v>Sep 2022</c:v>
+                  </c:pt>
+                  <c:pt idx="21">
+                    <c:v>Oct 2022</c:v>
+                  </c:pt>
+                  <c:pt idx="22">
+                    <c:v>Nov 2022</c:v>
+                  </c:pt>
+                  <c:pt idx="23">
+                    <c:v>Dec 2022</c:v>
+                  </c:pt>
+                  <c:pt idx="24">
+                    <c:v>Jan 2023</c:v>
+                  </c:pt>
+                  <c:pt idx="25">
+                    <c:v>Feb 2023</c:v>
+                  </c:pt>
+                  <c:pt idx="26">
+                    <c:v>Mar 2023</c:v>
+                  </c:pt>
+                  <c:pt idx="27">
+                    <c:v>Apr 2023</c:v>
+                  </c:pt>
+                  <c:pt idx="28">
+                    <c:v>May 2023</c:v>
+                  </c:pt>
+                  <c:pt idx="29">
+                    <c:v>Jun 2023</c:v>
+                  </c:pt>
+                  <c:pt idx="30">
+                    <c:v>Jul 2023</c:v>
+                  </c:pt>
+                  <c:pt idx="31">
+                    <c:v>Aug 2023</c:v>
+                  </c:pt>
+                  <c:pt idx="32">
+                    <c:v>Sep 2023</c:v>
+                  </c:pt>
+                  <c:pt idx="33">
+                    <c:v>Oct 2023</c:v>
+                  </c:pt>
+                  <c:pt idx="34">
+                    <c:v>Nov 2023</c:v>
+                  </c:pt>
+                  <c:pt idx="35">
+                    <c:v>Dec 2023</c:v>
+                  </c:pt>
+                  <c:pt idx="36">
+                    <c:v>Jan 2024</c:v>
+                  </c:pt>
+                  <c:pt idx="37">
+                    <c:v>Feb 2024</c:v>
+                  </c:pt>
+                  <c:pt idx="38">
+                    <c:v>Mar 2024</c:v>
+                  </c:pt>
+                  <c:pt idx="39">
+                    <c:v>Apr 2024</c:v>
+                  </c:pt>
+                  <c:pt idx="40">
+                    <c:v>May 2024</c:v>
+                  </c:pt>
+                  <c:pt idx="41">
+                    <c:v>Jun 2024</c:v>
+                  </c:pt>
+                  <c:pt idx="42">
+                    <c:v>Jul 2024</c:v>
+                  </c:pt>
+                  <c:pt idx="43">
+                    <c:v>Aug 2024</c:v>
+                  </c:pt>
+                  <c:pt idx="44">
+                    <c:v>Sep 2024</c:v>
+                  </c:pt>
+                  <c:pt idx="45">
+                    <c:v>Oct 2024</c:v>
+                  </c:pt>
+                  <c:pt idx="46">
+                    <c:v>Nov 2024</c:v>
+                  </c:pt>
+                  <c:pt idx="47">
+                    <c:v>Dec 2024</c:v>
+                  </c:pt>
+                  <c:pt idx="48">
+                    <c:v>Jan 2025</c:v>
+                  </c:pt>
+                  <c:pt idx="49">
+                    <c:v>Feb 2025</c:v>
+                  </c:pt>
+                  <c:pt idx="50">
+                    <c:v>Mar 2025</c:v>
+                  </c:pt>
+                  <c:pt idx="51">
+                    <c:v>Apr 2025</c:v>
+                  </c:pt>
+                  <c:pt idx="52">
+                    <c:v>May 2025</c:v>
+                  </c:pt>
+                  <c:pt idx="53">
+                    <c:v>Jun 2025</c:v>
+                  </c:pt>
+                  <c:pt idx="54">
                     <c:v>Jul 2025</c:v>
                   </c:pt>
-                  <c:pt idx="1">
+                  <c:pt idx="55">
                     <c:v>Aug 2025</c:v>
                   </c:pt>
-                  <c:pt idx="2">
+                  <c:pt idx="56">
                     <c:v>Sep 2025</c:v>
                   </c:pt>
-                  <c:pt idx="3">
+                  <c:pt idx="57">
                     <c:v>Oct 2025</c:v>
                   </c:pt>
-                  <c:pt idx="4">
+                  <c:pt idx="58">
                     <c:v>Nov 2025</c:v>
                   </c:pt>
-                  <c:pt idx="5">
+                  <c:pt idx="59">
                     <c:v>Dec 2025</c:v>
                   </c:pt>
-                  <c:pt idx="6">
+                  <c:pt idx="60">
                     <c:v>Jan 2026</c:v>
                   </c:pt>
-                  <c:pt idx="7">
+                  <c:pt idx="61">
                     <c:v>Feb 2026</c:v>
                   </c:pt>
-                  <c:pt idx="8">
+                  <c:pt idx="62">
                     <c:v>Mar 2026</c:v>
                   </c:pt>
-                  <c:pt idx="9">
+                  <c:pt idx="63">
                     <c:v>Apr 2026</c:v>
                   </c:pt>
                 </c:lvl>
@@ -379,39 +865,201 @@
           </c:cat>
           <c:val>
             <c:numRef>
-              <c:f>Sheet1!$C$2:$C$11</c:f>
+              <c:f>Sheet1!$C$2:$C$65</c:f>
               <c:numCache>
                 <c:formatCode>General</c:formatCode>
-                <c:ptCount val="10"/>
+                <c:ptCount val="64"/>
                 <c:pt idx="0">
                   <c:v>100</c:v>
                 </c:pt>
                 <c:pt idx="1">
-                  <c:v>100.5</c:v>
+                  <c:v>100.12</c:v>
                 </c:pt>
                 <c:pt idx="2">
-                  <c:v>100.96</c:v>
+                  <c:v>100.25</c:v>
                 </c:pt>
                 <c:pt idx="3">
-                  <c:v>101.53</c:v>
+                  <c:v>100.45</c:v>
                 </c:pt>
                 <c:pt idx="4">
-                  <c:v>102.03</c:v>
+                  <c:v>100.66</c:v>
                 </c:pt>
                 <c:pt idx="5">
-                  <c:v>102.57</c:v>
+                  <c:v>100.83</c:v>
                 </c:pt>
                 <c:pt idx="6">
-                  <c:v>103.13</c:v>
+                  <c:v>100.99</c:v>
                 </c:pt>
                 <c:pt idx="7">
-                  <c:v>103.63</c:v>
+                  <c:v>101.11</c:v>
                 </c:pt>
                 <c:pt idx="8">
-                  <c:v>104.16</c:v>
+                  <c:v>101.24</c:v>
                 </c:pt>
                 <c:pt idx="9">
-                  <c:v>104.68</c:v>
+                  <c:v>101.41</c:v>
+                </c:pt>
+                <c:pt idx="10">
+                  <c:v>101.6</c:v>
+                </c:pt>
+                <c:pt idx="11">
+                  <c:v>101.88</c:v>
+                </c:pt>
+                <c:pt idx="12">
+                  <c:v>102.26</c:v>
+                </c:pt>
+                <c:pt idx="13">
+                  <c:v>102.7</c:v>
+                </c:pt>
+                <c:pt idx="14">
+                  <c:v>103.19</c:v>
+                </c:pt>
+                <c:pt idx="15">
+                  <c:v>103.85</c:v>
+                </c:pt>
+                <c:pt idx="16">
+                  <c:v>104.73</c:v>
+                </c:pt>
+                <c:pt idx="17">
+                  <c:v>105.75</c:v>
+                </c:pt>
+                <c:pt idx="18">
+                  <c:v>106.47</c:v>
+                </c:pt>
+                <c:pt idx="19">
+                  <c:v>107.49</c:v>
+                </c:pt>
+                <c:pt idx="20">
+                  <c:v>108.49</c:v>
+                </c:pt>
+                <c:pt idx="21">
+                  <c:v>109.49</c:v>
+                </c:pt>
+                <c:pt idx="22">
+                  <c:v>110.74</c:v>
+                </c:pt>
+                <c:pt idx="23">
+                  <c:v>111.9</c:v>
+                </c:pt>
+                <c:pt idx="24">
+                  <c:v>113.21</c:v>
+                </c:pt>
+                <c:pt idx="25">
+                  <c:v>114.46</c:v>
+                </c:pt>
+                <c:pt idx="26">
+                  <c:v>115.82</c:v>
+                </c:pt>
+                <c:pt idx="27">
+                  <c:v>117.04</c:v>
+                </c:pt>
+                <c:pt idx="28">
+                  <c:v>118.49</c:v>
+                </c:pt>
+                <c:pt idx="29">
+                  <c:v>119.74</c:v>
+                </c:pt>
+                <c:pt idx="30">
+                  <c:v>121.05</c:v>
+                </c:pt>
+                <c:pt idx="31">
+                  <c:v>122.35</c:v>
+                </c:pt>
+                <c:pt idx="32">
+                  <c:v>123.55</c:v>
+                </c:pt>
+                <c:pt idx="33">
+                  <c:v>124.73</c:v>
+                </c:pt>
+                <c:pt idx="34">
+                  <c:v>125.86</c:v>
+                </c:pt>
+                <c:pt idx="35">
+                  <c:v>127.06</c:v>
+                </c:pt>
+                <c:pt idx="36">
+                  <c:v>128.14</c:v>
+                </c:pt>
+                <c:pt idx="37">
+                  <c:v>129.03</c:v>
+                </c:pt>
+                <c:pt idx="38">
+                  <c:v>129.85</c:v>
+                </c:pt>
+                <c:pt idx="39">
+                  <c:v>130.78</c:v>
+                </c:pt>
+                <c:pt idx="40">
+                  <c:v>131.53</c:v>
+                </c:pt>
+                <c:pt idx="41">
+                  <c:v>132.32</c:v>
+                </c:pt>
+                <c:pt idx="42">
+                  <c:v>133.09</c:v>
+                </c:pt>
+                <c:pt idx="43">
+                  <c:v>133.85</c:v>
+                </c:pt>
+                <c:pt idx="44">
+                  <c:v>134.59</c:v>
+                </c:pt>
+                <c:pt idx="45">
+                  <c:v>135.32</c:v>
+                </c:pt>
+                <c:pt idx="46">
+                  <c:v>135.99</c:v>
+                </c:pt>
+                <c:pt idx="47">
+                  <c:v>136.49</c:v>
+                </c:pt>
+                <c:pt idx="48">
+                  <c:v>137.02</c:v>
+                </c:pt>
+                <c:pt idx="49">
+                  <c:v>137.56</c:v>
+                </c:pt>
+                <c:pt idx="50">
+                  <c:v>138.16</c:v>
+                </c:pt>
+                <c:pt idx="51">
+                  <c:v>138.86</c:v>
+                </c:pt>
+                <c:pt idx="52">
+                  <c:v>139.59</c:v>
+                </c:pt>
+                <c:pt idx="53">
+                  <c:v>140.26</c:v>
+                </c:pt>
+                <c:pt idx="54">
+                  <c:v>140.92</c:v>
+                </c:pt>
+                <c:pt idx="55">
+                  <c:v>141.63</c:v>
+                </c:pt>
+                <c:pt idx="56">
+                  <c:v>142.28</c:v>
+                </c:pt>
+                <c:pt idx="57">
+                  <c:v>143.07</c:v>
+                </c:pt>
+                <c:pt idx="58">
+                  <c:v>143.77</c:v>
+                </c:pt>
+                <c:pt idx="59">
+                  <c:v>144.54</c:v>
+                </c:pt>
+                <c:pt idx="60">
+                  <c:v>145.34</c:v>
+                </c:pt>
+                <c:pt idx="61">
+                  <c:v>146.04</c:v>
+                </c:pt>
+                <c:pt idx="62">
+                  <c:v>146.77</c:v>
+                </c:pt>
+                <c:pt idx="63">
+                  <c:v>147.51</c:v>
                 </c:pt>
               </c:numCache>
             </c:numRef>
@@ -489,38 +1137,200 @@
           </c:marker>
           <c:cat>
             <c:multiLvlStrRef>
-              <c:f>Sheet1!$A$2:$A$11</c:f>
+              <c:f>Sheet1!$A$2:$A$65</c:f>
               <c:multiLvlStrCache>
-                <c:ptCount val="10"/>
+                <c:ptCount val="64"/>
                 <c:lvl>
                   <c:pt idx="0">
+                    <c:v>Feb 2021</c:v>
+                  </c:pt>
+                  <c:pt idx="1">
+                    <c:v>Feb 2021</c:v>
+                  </c:pt>
+                  <c:pt idx="2">
+                    <c:v>Mar 2021</c:v>
+                  </c:pt>
+                  <c:pt idx="3">
+                    <c:v>Apr 2021</c:v>
+                  </c:pt>
+                  <c:pt idx="4">
+                    <c:v>May 2021</c:v>
+                  </c:pt>
+                  <c:pt idx="5">
+                    <c:v>Jun 2021</c:v>
+                  </c:pt>
+                  <c:pt idx="6">
+                    <c:v>Jul 2021</c:v>
+                  </c:pt>
+                  <c:pt idx="7">
+                    <c:v>Aug 2021</c:v>
+                  </c:pt>
+                  <c:pt idx="8">
+                    <c:v>Sep 2021</c:v>
+                  </c:pt>
+                  <c:pt idx="9">
+                    <c:v>Oct 2021</c:v>
+                  </c:pt>
+                  <c:pt idx="10">
+                    <c:v>Nov 2021</c:v>
+                  </c:pt>
+                  <c:pt idx="11">
+                    <c:v>Dec 2021</c:v>
+                  </c:pt>
+                  <c:pt idx="12">
+                    <c:v>Jan 2022</c:v>
+                  </c:pt>
+                  <c:pt idx="13">
+                    <c:v>Feb 2022</c:v>
+                  </c:pt>
+                  <c:pt idx="14">
+                    <c:v>Mar 2022</c:v>
+                  </c:pt>
+                  <c:pt idx="15">
+                    <c:v>Apr 2022</c:v>
+                  </c:pt>
+                  <c:pt idx="16">
+                    <c:v>May 2022</c:v>
+                  </c:pt>
+                  <c:pt idx="17">
+                    <c:v>Jun 2022</c:v>
+                  </c:pt>
+                  <c:pt idx="18">
+                    <c:v>Jul 2022</c:v>
+                  </c:pt>
+                  <c:pt idx="19">
+                    <c:v>Aug 2022</c:v>
+                  </c:pt>
+                  <c:pt idx="20">
+                    <c:v>Sep 2022</c:v>
+                  </c:pt>
+                  <c:pt idx="21">
+                    <c:v>Oct 2022</c:v>
+                  </c:pt>
+                  <c:pt idx="22">
+                    <c:v>Nov 2022</c:v>
+                  </c:pt>
+                  <c:pt idx="23">
+                    <c:v>Dec 2022</c:v>
+                  </c:pt>
+                  <c:pt idx="24">
+                    <c:v>Jan 2023</c:v>
+                  </c:pt>
+                  <c:pt idx="25">
+                    <c:v>Feb 2023</c:v>
+                  </c:pt>
+                  <c:pt idx="26">
+                    <c:v>Mar 2023</c:v>
+                  </c:pt>
+                  <c:pt idx="27">
+                    <c:v>Apr 2023</c:v>
+                  </c:pt>
+                  <c:pt idx="28">
+                    <c:v>May 2023</c:v>
+                  </c:pt>
+                  <c:pt idx="29">
+                    <c:v>Jun 2023</c:v>
+                  </c:pt>
+                  <c:pt idx="30">
+                    <c:v>Jul 2023</c:v>
+                  </c:pt>
+                  <c:pt idx="31">
+                    <c:v>Aug 2023</c:v>
+                  </c:pt>
+                  <c:pt idx="32">
+                    <c:v>Sep 2023</c:v>
+                  </c:pt>
+                  <c:pt idx="33">
+                    <c:v>Oct 2023</c:v>
+                  </c:pt>
+                  <c:pt idx="34">
+                    <c:v>Nov 2023</c:v>
+                  </c:pt>
+                  <c:pt idx="35">
+                    <c:v>Dec 2023</c:v>
+                  </c:pt>
+                  <c:pt idx="36">
+                    <c:v>Jan 2024</c:v>
+                  </c:pt>
+                  <c:pt idx="37">
+                    <c:v>Feb 2024</c:v>
+                  </c:pt>
+                  <c:pt idx="38">
+                    <c:v>Mar 2024</c:v>
+                  </c:pt>
+                  <c:pt idx="39">
+                    <c:v>Apr 2024</c:v>
+                  </c:pt>
+                  <c:pt idx="40">
+                    <c:v>May 2024</c:v>
+                  </c:pt>
+                  <c:pt idx="41">
+                    <c:v>Jun 2024</c:v>
+                  </c:pt>
+                  <c:pt idx="42">
+                    <c:v>Jul 2024</c:v>
+                  </c:pt>
+                  <c:pt idx="43">
+                    <c:v>Aug 2024</c:v>
+                  </c:pt>
+                  <c:pt idx="44">
+                    <c:v>Sep 2024</c:v>
+                  </c:pt>
+                  <c:pt idx="45">
+                    <c:v>Oct 2024</c:v>
+                  </c:pt>
+                  <c:pt idx="46">
+                    <c:v>Nov 2024</c:v>
+                  </c:pt>
+                  <c:pt idx="47">
+                    <c:v>Dec 2024</c:v>
+                  </c:pt>
+                  <c:pt idx="48">
+                    <c:v>Jan 2025</c:v>
+                  </c:pt>
+                  <c:pt idx="49">
+                    <c:v>Feb 2025</c:v>
+                  </c:pt>
+                  <c:pt idx="50">
+                    <c:v>Mar 2025</c:v>
+                  </c:pt>
+                  <c:pt idx="51">
+                    <c:v>Apr 2025</c:v>
+                  </c:pt>
+                  <c:pt idx="52">
+                    <c:v>May 2025</c:v>
+                  </c:pt>
+                  <c:pt idx="53">
+                    <c:v>Jun 2025</c:v>
+                  </c:pt>
+                  <c:pt idx="54">
                     <c:v>Jul 2025</c:v>
                   </c:pt>
-                  <c:pt idx="1">
+                  <c:pt idx="55">
                     <c:v>Aug 2025</c:v>
                   </c:pt>
-                  <c:pt idx="2">
+                  <c:pt idx="56">
                     <c:v>Sep 2025</c:v>
                   </c:pt>
-                  <c:pt idx="3">
+                  <c:pt idx="57">
                     <c:v>Oct 2025</c:v>
                   </c:pt>
-                  <c:pt idx="4">
+                  <c:pt idx="58">
                     <c:v>Nov 2025</c:v>
                   </c:pt>
-                  <c:pt idx="5">
+                  <c:pt idx="59">
                     <c:v>Dec 2025</c:v>
                   </c:pt>
-                  <c:pt idx="6">
+                  <c:pt idx="60">
                     <c:v>Jan 2026</c:v>
                   </c:pt>
-                  <c:pt idx="7">
+                  <c:pt idx="61">
                     <c:v>Feb 2026</c:v>
                   </c:pt>
-                  <c:pt idx="8">
+                  <c:pt idx="62">
                     <c:v>Mar 2026</c:v>
                   </c:pt>
-                  <c:pt idx="9">
+                  <c:pt idx="63">
                     <c:v>Apr 2026</c:v>
                   </c:pt>
                 </c:lvl>
@@ -529,39 +1339,201 @@
           </c:cat>
           <c:val>
             <c:numRef>
-              <c:f>Sheet1!$D$2:$D$11</c:f>
+              <c:f>Sheet1!$D$2:$D$65</c:f>
               <c:numCache>
                 <c:formatCode>General</c:formatCode>
-                <c:ptCount val="10"/>
+                <c:ptCount val="64"/>
                 <c:pt idx="0">
                   <c:v>100</c:v>
                 </c:pt>
                 <c:pt idx="1">
-                  <c:v>100.3</c:v>
+                  <c:v>100.01</c:v>
                 </c:pt>
                 <c:pt idx="2">
-                  <c:v>100.58</c:v>
+                  <c:v>100.01</c:v>
                 </c:pt>
                 <c:pt idx="3">
-                  <c:v>100.87</c:v>
+                  <c:v>100.02</c:v>
                 </c:pt>
                 <c:pt idx="4">
-                  <c:v>101.15</c:v>
+                  <c:v>100.02</c:v>
                 </c:pt>
                 <c:pt idx="5">
-                  <c:v>101.71</c:v>
+                  <c:v>100.03</c:v>
                 </c:pt>
                 <c:pt idx="6">
-                  <c:v>101.71</c:v>
+                  <c:v>100.04</c:v>
                 </c:pt>
                 <c:pt idx="7">
-                  <c:v>101.96</c:v>
+                  <c:v>100.04</c:v>
                 </c:pt>
                 <c:pt idx="8">
-                  <c:v>102.23</c:v>
+                  <c:v>100.03</c:v>
                 </c:pt>
                 <c:pt idx="9">
-                  <c:v>102.5</c:v>
+                  <c:v>100.13</c:v>
+                </c:pt>
+                <c:pt idx="10">
+                  <c:v>100.26</c:v>
+                </c:pt>
+                <c:pt idx="11">
+                  <c:v>100.44</c:v>
+                </c:pt>
+                <c:pt idx="12">
+                  <c:v>100.7</c:v>
+                </c:pt>
+                <c:pt idx="13">
+                  <c:v>101.03</c:v>
+                </c:pt>
+                <c:pt idx="14">
+                  <c:v>101.42</c:v>
+                </c:pt>
+                <c:pt idx="15">
+                  <c:v>101.88</c:v>
+                </c:pt>
+                <c:pt idx="16">
+                  <c:v>102.44</c:v>
+                </c:pt>
+                <c:pt idx="17">
+                  <c:v>103.04</c:v>
+                </c:pt>
+                <c:pt idx="18">
+                  <c:v>103.71</c:v>
+                </c:pt>
+                <c:pt idx="19">
+                  <c:v>104.44</c:v>
+                </c:pt>
+                <c:pt idx="20">
+                  <c:v>105.21</c:v>
+                </c:pt>
+                <c:pt idx="21">
+                  <c:v>105.97</c:v>
+                </c:pt>
+                <c:pt idx="22">
+                  <c:v>106.9</c:v>
+                </c:pt>
+                <c:pt idx="23">
+                  <c:v>107.74</c:v>
+                </c:pt>
+                <c:pt idx="24">
+                  <c:v>108.65</c:v>
+                </c:pt>
+                <c:pt idx="25">
+                  <c:v>109.46</c:v>
+                </c:pt>
+                <c:pt idx="26">
+                  <c:v>110.36</c:v>
+                </c:pt>
+                <c:pt idx="27">
+                  <c:v>111.18</c:v>
+                </c:pt>
+                <c:pt idx="28">
+                  <c:v>112.16</c:v>
+                </c:pt>
+                <c:pt idx="29">
+                  <c:v>113.06</c:v>
+                </c:pt>
+                <c:pt idx="30">
+                  <c:v>113.99</c:v>
+                </c:pt>
+                <c:pt idx="31">
+                  <c:v>114.85</c:v>
+                </c:pt>
+                <c:pt idx="32">
+                  <c:v>115.63</c:v>
+                </c:pt>
+                <c:pt idx="33">
+                  <c:v>116.4</c:v>
+                </c:pt>
+                <c:pt idx="34">
+                  <c:v>117.12</c:v>
+                </c:pt>
+                <c:pt idx="35">
+                  <c:v>117.84</c:v>
+                </c:pt>
+                <c:pt idx="36">
+                  <c:v>118.53</c:v>
+                </c:pt>
+                <c:pt idx="37">
+                  <c:v>119.13</c:v>
+                </c:pt>
+                <c:pt idx="38">
+                  <c:v>119.66</c:v>
+                </c:pt>
+                <c:pt idx="39">
+                  <c:v>120.22</c:v>
+                </c:pt>
+                <c:pt idx="40">
+                  <c:v>120.73</c:v>
+                </c:pt>
+                <c:pt idx="41">
+                  <c:v>121.17</c:v>
+                </c:pt>
+                <c:pt idx="42">
+                  <c:v>121.61</c:v>
+                </c:pt>
+                <c:pt idx="43">
+                  <c:v>122.05</c:v>
+                </c:pt>
+                <c:pt idx="44">
+                  <c:v>122.46</c:v>
+                </c:pt>
+                <c:pt idx="45">
+                  <c:v>122.88</c:v>
+                </c:pt>
+                <c:pt idx="46">
+                  <c:v>123.27</c:v>
+                </c:pt>
+                <c:pt idx="47">
+                  <c:v>123.67</c:v>
+                </c:pt>
+                <c:pt idx="48">
+                  <c:v>124.04</c:v>
+                </c:pt>
+                <c:pt idx="49">
+                  <c:v>124.39</c:v>
+                </c:pt>
+                <c:pt idx="50">
+                  <c:v>124.77</c:v>
+                </c:pt>
+                <c:pt idx="51">
+                  <c:v>125.14</c:v>
+                </c:pt>
+                <c:pt idx="52">
+                  <c:v>125.53</c:v>
+                </c:pt>
+                <c:pt idx="53">
+                  <c:v>125.9</c:v>
+                </c:pt>
+                <c:pt idx="54">
+                  <c:v>126.27</c:v>
+                </c:pt>
+                <c:pt idx="55">
+                  <c:v>126.65</c:v>
+                </c:pt>
+                <c:pt idx="56">
+                  <c:v>127</c:v>
+                </c:pt>
+                <c:pt idx="57">
+                  <c:v>127.37</c:v>
+                </c:pt>
+                <c:pt idx="58">
+                  <c:v>127.72</c:v>
+                </c:pt>
+                <c:pt idx="59">
+                  <c:v>128.09</c:v>
+                </c:pt>
+                <c:pt idx="60">
+                  <c:v>128.43</c:v>
+                </c:pt>
+                <c:pt idx="61">
+                  <c:v>128.75</c:v>
+                </c:pt>
+                <c:pt idx="62">
+                  <c:v>129.09</c:v>
+                </c:pt>
+                <c:pt idx="63">
+                  <c:v>129.43</c:v>
                 </c:pt>
               </c:numCache>
             </c:numRef>
@@ -637,7 +1609,7 @@
         <c:auto val="1"/>
         <c:lblAlgn val="ctr"/>
         <c:noMultiLvlLbl val="1"/>
-        <c:tickLblSkip val="1"/>
+        <c:tickLblSkip val="6"/>
       </c:catAx>
       <c:valAx>
         <c:axId val="2094734552"/>
@@ -3113,7 +4085,7 @@
                 <a:ea typeface="Calibri" pitchFamily="34" charset="-122"/>
                 <a:cs typeface="Calibri" pitchFamily="34" charset="-120"/>
               </a:rPr>
-              <a:t>prueba 13 CLP</a:t>
+              <a:t>prueba CLP</a:t>
             </a:r>
             <a:endParaRPr lang="en-US" sz="800" dirty="0"/>
           </a:p>
@@ -3762,7 +4734,7 @@
                           <a:ea typeface="Calibri" pitchFamily="34" charset="-122"/>
                           <a:cs typeface="Calibri" pitchFamily="34" charset="-120"/>
                         </a:rPr>
-                        <a:t>0.37%</a:t>
+                        <a:t>0.38%</a:t>
                       </a:r>
                       <a:endParaRPr lang="en-US" sz="750" dirty="0">
                         <a:latin typeface="Calibri" charset="0"/>
@@ -3898,7 +4870,7 @@
                           <a:ea typeface="Calibri" pitchFamily="34" charset="-122"/>
                           <a:cs typeface="Calibri" pitchFamily="34" charset="-120"/>
                         </a:rPr>
-                        <a:t>2.30%</a:t>
+                        <a:t>2.33%</a:t>
                       </a:r>
                       <a:endParaRPr lang="en-US" sz="750" dirty="0">
                         <a:latin typeface="Calibri" charset="0"/>
@@ -3966,7 +4938,7 @@
                           <a:ea typeface="Calibri" pitchFamily="34" charset="-122"/>
                           <a:cs typeface="Calibri" pitchFamily="34" charset="-120"/>
                         </a:rPr>
-                        <a:t>4.82%</a:t>
+                        <a:t>4.90%</a:t>
                       </a:r>
                       <a:endParaRPr lang="en-US" sz="750" dirty="0">
                         <a:latin typeface="Calibri" charset="0"/>
@@ -4786,7 +5758,7 @@
                           <a:ea typeface="Calibri" pitchFamily="34" charset="-122"/>
                           <a:cs typeface="Calibri" pitchFamily="34" charset="-120"/>
                         </a:rPr>
-                        <a:t>—</a:t>
+                        <a:t>6.23%</a:t>
                       </a:r>
                       <a:endParaRPr lang="en-US" sz="750" dirty="0">
                         <a:latin typeface="Calibri" charset="0"/>
@@ -4996,20 +5968,20 @@
               <a:tblPr/>
               <a:tblGrid>
                 <a:gridCol w="201168"/>
-                <a:gridCol w="822960"/>
-                <a:gridCol w="246888"/>
-                <a:gridCol w="246888"/>
-                <a:gridCol w="246888"/>
-                <a:gridCol w="246888"/>
-                <a:gridCol w="246888"/>
-                <a:gridCol w="246888"/>
-                <a:gridCol w="246888"/>
-                <a:gridCol w="246888"/>
-                <a:gridCol w="246888"/>
-                <a:gridCol w="246888"/>
-                <a:gridCol w="246888"/>
-                <a:gridCol w="246888"/>
-                <a:gridCol w="283464"/>
+                <a:gridCol w="804672"/>
+                <a:gridCol w="292608"/>
+                <a:gridCol w="292608"/>
+                <a:gridCol w="292608"/>
+                <a:gridCol w="292608"/>
+                <a:gridCol w="292608"/>
+                <a:gridCol w="292608"/>
+                <a:gridCol w="292608"/>
+                <a:gridCol w="292608"/>
+                <a:gridCol w="292608"/>
+                <a:gridCol w="292608"/>
+                <a:gridCol w="292608"/>
+                <a:gridCol w="292608"/>
+                <a:gridCol w="301752"/>
               </a:tblGrid>
               <a:tr h="123444">
                 <a:tc>
@@ -6148,6 +7120,60 @@
                       <a:pPr algn="ctr" indent="0" marL="0">
                         <a:buNone/>
                       </a:pPr>
+                      <a:endParaRPr lang="en-US" sz="500" dirty="0">
+                        <a:latin typeface="Calibri" charset="0"/>
+                        <a:ea typeface="Calibri" charset="0"/>
+                        <a:cs typeface="Calibri" charset="0"/>
+                      </a:endParaRPr>
+                    </a:p>
+                  </a:txBody>
+                  <a:tcPr marL="91440" marR="91440" marT="45720" marB="45720">
+                    <a:lnL w="2540" cap="flat" cmpd="sng" algn="ctr">
+                      <a:solidFill>
+                        <a:srgbClr val="EEEEEE"/>
+                      </a:solidFill>
+                      <a:prstDash val="solid"/>
+                      <a:round/>
+                      <a:headEnd type="none" w="med" len="med"/>
+                      <a:tailEnd type="none" w="med" len="med"/>
+                    </a:lnL>
+                    <a:lnR w="2540" cap="flat" cmpd="sng" algn="ctr">
+                      <a:solidFill>
+                        <a:srgbClr val="EEEEEE"/>
+                      </a:solidFill>
+                      <a:prstDash val="solid"/>
+                      <a:round/>
+                      <a:headEnd type="none" w="med" len="med"/>
+                      <a:tailEnd type="none" w="med" len="med"/>
+                    </a:lnR>
+                    <a:lnT w="2540" cap="flat" cmpd="sng" algn="ctr">
+                      <a:solidFill>
+                        <a:srgbClr val="EEEEEE"/>
+                      </a:solidFill>
+                      <a:prstDash val="solid"/>
+                      <a:round/>
+                      <a:headEnd type="none" w="med" len="med"/>
+                      <a:tailEnd type="none" w="med" len="med"/>
+                    </a:lnT>
+                    <a:lnB w="2540" cap="flat" cmpd="sng" algn="ctr">
+                      <a:solidFill>
+                        <a:srgbClr val="EEEEEE"/>
+                      </a:solidFill>
+                      <a:prstDash val="solid"/>
+                      <a:round/>
+                      <a:headEnd type="none" w="med" len="med"/>
+                      <a:tailEnd type="none" w="med" len="med"/>
+                    </a:lnB>
+                  </a:tcPr>
+                </a:tc>
+                <a:tc>
+                  <a:txBody>
+                    <a:bodyPr/>
+                    <a:lstStyle/>
+                    <a:p>
+                      <a:pPr algn="ctr" indent="0" marL="0">
+                        <a:buNone/>
+                      </a:pPr>
                       <a:r>
                         <a:rPr lang="en-US" sz="500" dirty="0">
                           <a:solidFill>
@@ -6157,7 +7183,7 @@
                           <a:ea typeface="Calibri" pitchFamily="34" charset="-122"/>
                           <a:cs typeface="Calibri" pitchFamily="34" charset="-120"/>
                         </a:rPr>
-                        <a:t>0.04%</a:t>
+                        <a:t>0.02%</a:t>
                       </a:r>
                       <a:endParaRPr lang="en-US" sz="500" dirty="0">
                         <a:latin typeface="Calibri" charset="0"/>
@@ -6222,7 +7248,7 @@
                           <a:ea typeface="Calibri" pitchFamily="34" charset="-122"/>
                           <a:cs typeface="Calibri" pitchFamily="34" charset="-120"/>
                         </a:rPr>
-                        <a:t>0.04%</a:t>
+                        <a:t>0.03%</a:t>
                       </a:r>
                       <a:endParaRPr lang="en-US" sz="500" dirty="0">
                         <a:latin typeface="Calibri" charset="0"/>
@@ -6287,7 +7313,7 @@
                           <a:ea typeface="Calibri" pitchFamily="34" charset="-122"/>
                           <a:cs typeface="Calibri" pitchFamily="34" charset="-120"/>
                         </a:rPr>
-                        <a:t>0.04%</a:t>
+                        <a:t>0.03%</a:t>
                       </a:r>
                       <a:endParaRPr lang="en-US" sz="500" dirty="0">
                         <a:latin typeface="Calibri" charset="0"/>
@@ -6352,7 +7378,7 @@
                           <a:ea typeface="Calibri" pitchFamily="34" charset="-122"/>
                           <a:cs typeface="Calibri" pitchFamily="34" charset="-120"/>
                         </a:rPr>
-                        <a:t>0.04%</a:t>
+                        <a:t>0.02%</a:t>
                       </a:r>
                       <a:endParaRPr lang="en-US" sz="500" dirty="0">
                         <a:latin typeface="Calibri" charset="0"/>
@@ -6417,7 +7443,7 @@
                           <a:ea typeface="Calibri" pitchFamily="34" charset="-122"/>
                           <a:cs typeface="Calibri" pitchFamily="34" charset="-120"/>
                         </a:rPr>
-                        <a:t>0.04%</a:t>
+                        <a:t>0.03%</a:t>
                       </a:r>
                       <a:endParaRPr lang="en-US" sz="500" dirty="0">
                         <a:latin typeface="Calibri" charset="0"/>
@@ -6482,7 +7508,7 @@
                           <a:ea typeface="Calibri" pitchFamily="34" charset="-122"/>
                           <a:cs typeface="Calibri" pitchFamily="34" charset="-120"/>
                         </a:rPr>
-                        <a:t>0.04%</a:t>
+                        <a:t>0.05%</a:t>
                       </a:r>
                       <a:endParaRPr lang="en-US" sz="500" dirty="0">
                         <a:latin typeface="Calibri" charset="0"/>
@@ -6547,7 +7573,7 @@
                           <a:ea typeface="Calibri" pitchFamily="34" charset="-122"/>
                           <a:cs typeface="Calibri" pitchFamily="34" charset="-120"/>
                         </a:rPr>
-                        <a:t>0.05%</a:t>
+                        <a:t>0.06%</a:t>
                       </a:r>
                       <a:endParaRPr lang="en-US" sz="500" dirty="0">
                         <a:latin typeface="Calibri" charset="0"/>
@@ -6612,7 +7638,7 @@
                           <a:ea typeface="Calibri" pitchFamily="34" charset="-122"/>
                           <a:cs typeface="Calibri" pitchFamily="34" charset="-120"/>
                         </a:rPr>
-                        <a:t>0.06%</a:t>
+                        <a:t>0.12%</a:t>
                       </a:r>
                       <a:endParaRPr lang="en-US" sz="500" dirty="0">
                         <a:latin typeface="Calibri" charset="0"/>
@@ -6677,7 +7703,7 @@
                           <a:ea typeface="Calibri" pitchFamily="34" charset="-122"/>
                           <a:cs typeface="Calibri" pitchFamily="34" charset="-120"/>
                         </a:rPr>
-                        <a:t>0.12%</a:t>
+                        <a:t>0.21%</a:t>
                       </a:r>
                       <a:endParaRPr lang="en-US" sz="500" dirty="0">
                         <a:latin typeface="Calibri" charset="0"/>
@@ -6742,7 +7768,7 @@
                           <a:ea typeface="Calibri" pitchFamily="34" charset="-122"/>
                           <a:cs typeface="Calibri" pitchFamily="34" charset="-120"/>
                         </a:rPr>
-                        <a:t>0.19%</a:t>
+                        <a:t>0.21%</a:t>
                       </a:r>
                       <a:endParaRPr lang="en-US" sz="500" dirty="0">
                         <a:latin typeface="Calibri" charset="0"/>
@@ -6807,64 +7833,64 @@
                           <a:ea typeface="Calibri" pitchFamily="34" charset="-122"/>
                           <a:cs typeface="Calibri" pitchFamily="34" charset="-120"/>
                         </a:rPr>
-                        <a:t>0.23%</a:t>
-                      </a:r>
-                      <a:endParaRPr lang="en-US" sz="500" dirty="0">
-                        <a:latin typeface="Calibri" charset="0"/>
-                        <a:ea typeface="Calibri" charset="0"/>
-                        <a:cs typeface="Calibri" charset="0"/>
-                      </a:endParaRPr>
-                    </a:p>
-                  </a:txBody>
-                  <a:tcPr marL="91440" marR="91440" marT="45720" marB="45720">
-                    <a:lnL w="2540" cap="flat" cmpd="sng" algn="ctr">
-                      <a:solidFill>
-                        <a:srgbClr val="EEEEEE"/>
-                      </a:solidFill>
-                      <a:prstDash val="solid"/>
-                      <a:round/>
-                      <a:headEnd type="none" w="med" len="med"/>
-                      <a:tailEnd type="none" w="med" len="med"/>
-                    </a:lnL>
-                    <a:lnR w="2540" cap="flat" cmpd="sng" algn="ctr">
-                      <a:solidFill>
-                        <a:srgbClr val="EEEEEE"/>
-                      </a:solidFill>
-                      <a:prstDash val="solid"/>
-                      <a:round/>
-                      <a:headEnd type="none" w="med" len="med"/>
-                      <a:tailEnd type="none" w="med" len="med"/>
-                    </a:lnR>
-                    <a:lnT w="2540" cap="flat" cmpd="sng" algn="ctr">
-                      <a:solidFill>
-                        <a:srgbClr val="EEEEEE"/>
-                      </a:solidFill>
-                      <a:prstDash val="solid"/>
-                      <a:round/>
-                      <a:headEnd type="none" w="med" len="med"/>
-                      <a:tailEnd type="none" w="med" len="med"/>
-                    </a:lnT>
-                    <a:lnB w="2540" cap="flat" cmpd="sng" algn="ctr">
-                      <a:solidFill>
-                        <a:srgbClr val="EEEEEE"/>
-                      </a:solidFill>
-                      <a:prstDash val="solid"/>
-                      <a:round/>
-                      <a:headEnd type="none" w="med" len="med"/>
-                      <a:tailEnd type="none" w="med" len="med"/>
-                    </a:lnB>
-                  </a:tcPr>
-                </a:tc>
-                <a:tc>
-                  <a:txBody>
-                    <a:bodyPr/>
-                    <a:lstStyle/>
-                    <a:p>
-                      <a:pPr algn="ctr" indent="0" marL="0">
-                        <a:buNone/>
-                      </a:pPr>
-                      <a:r>
-                        <a:rPr lang="en-US" sz="500" dirty="0">
+                        <a:t>0.32%</a:t>
+                      </a:r>
+                      <a:endParaRPr lang="en-US" sz="500" dirty="0">
+                        <a:latin typeface="Calibri" charset="0"/>
+                        <a:ea typeface="Calibri" charset="0"/>
+                        <a:cs typeface="Calibri" charset="0"/>
+                      </a:endParaRPr>
+                    </a:p>
+                  </a:txBody>
+                  <a:tcPr marL="91440" marR="91440" marT="45720" marB="45720">
+                    <a:lnL w="2540" cap="flat" cmpd="sng" algn="ctr">
+                      <a:solidFill>
+                        <a:srgbClr val="EEEEEE"/>
+                      </a:solidFill>
+                      <a:prstDash val="solid"/>
+                      <a:round/>
+                      <a:headEnd type="none" w="med" len="med"/>
+                      <a:tailEnd type="none" w="med" len="med"/>
+                    </a:lnL>
+                    <a:lnR w="2540" cap="flat" cmpd="sng" algn="ctr">
+                      <a:solidFill>
+                        <a:srgbClr val="EEEEEE"/>
+                      </a:solidFill>
+                      <a:prstDash val="solid"/>
+                      <a:round/>
+                      <a:headEnd type="none" w="med" len="med"/>
+                      <a:tailEnd type="none" w="med" len="med"/>
+                    </a:lnR>
+                    <a:lnT w="2540" cap="flat" cmpd="sng" algn="ctr">
+                      <a:solidFill>
+                        <a:srgbClr val="EEEEEE"/>
+                      </a:solidFill>
+                      <a:prstDash val="solid"/>
+                      <a:round/>
+                      <a:headEnd type="none" w="med" len="med"/>
+                      <a:tailEnd type="none" w="med" len="med"/>
+                    </a:lnT>
+                    <a:lnB w="2540" cap="flat" cmpd="sng" algn="ctr">
+                      <a:solidFill>
+                        <a:srgbClr val="EEEEEE"/>
+                      </a:solidFill>
+                      <a:prstDash val="solid"/>
+                      <a:round/>
+                      <a:headEnd type="none" w="med" len="med"/>
+                      <a:tailEnd type="none" w="med" len="med"/>
+                    </a:lnB>
+                  </a:tcPr>
+                </a:tc>
+                <a:tc>
+                  <a:txBody>
+                    <a:bodyPr/>
+                    <a:lstStyle/>
+                    <a:p>
+                      <a:pPr algn="ctr" indent="0" marL="0">
+                        <a:buNone/>
+                      </a:pPr>
+                      <a:r>
+                        <a:rPr lang="en-US" sz="500" b="1" dirty="0">
                           <a:solidFill>
                             <a:srgbClr val="777777"/>
                           </a:solidFill>
@@ -6872,72 +7898,7 @@
                           <a:ea typeface="Calibri" pitchFamily="34" charset="-122"/>
                           <a:cs typeface="Calibri" pitchFamily="34" charset="-120"/>
                         </a:rPr>
-                        <a:t>0.29%</a:t>
-                      </a:r>
-                      <a:endParaRPr lang="en-US" sz="500" dirty="0">
-                        <a:latin typeface="Calibri" charset="0"/>
-                        <a:ea typeface="Calibri" charset="0"/>
-                        <a:cs typeface="Calibri" charset="0"/>
-                      </a:endParaRPr>
-                    </a:p>
-                  </a:txBody>
-                  <a:tcPr marL="91440" marR="91440" marT="45720" marB="45720">
-                    <a:lnL w="2540" cap="flat" cmpd="sng" algn="ctr">
-                      <a:solidFill>
-                        <a:srgbClr val="EEEEEE"/>
-                      </a:solidFill>
-                      <a:prstDash val="solid"/>
-                      <a:round/>
-                      <a:headEnd type="none" w="med" len="med"/>
-                      <a:tailEnd type="none" w="med" len="med"/>
-                    </a:lnL>
-                    <a:lnR w="2540" cap="flat" cmpd="sng" algn="ctr">
-                      <a:solidFill>
-                        <a:srgbClr val="EEEEEE"/>
-                      </a:solidFill>
-                      <a:prstDash val="solid"/>
-                      <a:round/>
-                      <a:headEnd type="none" w="med" len="med"/>
-                      <a:tailEnd type="none" w="med" len="med"/>
-                    </a:lnR>
-                    <a:lnT w="2540" cap="flat" cmpd="sng" algn="ctr">
-                      <a:solidFill>
-                        <a:srgbClr val="EEEEEE"/>
-                      </a:solidFill>
-                      <a:prstDash val="solid"/>
-                      <a:round/>
-                      <a:headEnd type="none" w="med" len="med"/>
-                      <a:tailEnd type="none" w="med" len="med"/>
-                    </a:lnT>
-                    <a:lnB w="2540" cap="flat" cmpd="sng" algn="ctr">
-                      <a:solidFill>
-                        <a:srgbClr val="EEEEEE"/>
-                      </a:solidFill>
-                      <a:prstDash val="solid"/>
-                      <a:round/>
-                      <a:headEnd type="none" w="med" len="med"/>
-                      <a:tailEnd type="none" w="med" len="med"/>
-                    </a:lnB>
-                  </a:tcPr>
-                </a:tc>
-                <a:tc>
-                  <a:txBody>
-                    <a:bodyPr/>
-                    <a:lstStyle/>
-                    <a:p>
-                      <a:pPr algn="ctr" indent="0" marL="0">
-                        <a:buNone/>
-                      </a:pPr>
-                      <a:r>
-                        <a:rPr lang="en-US" sz="500" b="1" dirty="0">
-                          <a:solidFill>
-                            <a:srgbClr val="777777"/>
-                          </a:solidFill>
-                          <a:latin typeface="Calibri" pitchFamily="34" charset="0"/>
-                          <a:ea typeface="Calibri" pitchFamily="34" charset="-122"/>
-                          <a:cs typeface="Calibri" pitchFamily="34" charset="-120"/>
-                        </a:rPr>
-                        <a:t>1.20%</a:t>
+                        <a:t>1.19%</a:t>
                       </a:r>
                       <a:endParaRPr lang="en-US" sz="500" dirty="0">
                         <a:latin typeface="Calibri" charset="0"/>
@@ -7114,6 +8075,60 @@
                       <a:pPr algn="ctr" indent="0" marL="0">
                         <a:buNone/>
                       </a:pPr>
+                      <a:endParaRPr lang="en-US" sz="500" dirty="0">
+                        <a:latin typeface="Calibri" charset="0"/>
+                        <a:ea typeface="Calibri" charset="0"/>
+                        <a:cs typeface="Calibri" charset="0"/>
+                      </a:endParaRPr>
+                    </a:p>
+                  </a:txBody>
+                  <a:tcPr marL="91440" marR="91440" marT="45720" marB="45720">
+                    <a:lnL w="2540" cap="flat" cmpd="sng" algn="ctr">
+                      <a:solidFill>
+                        <a:srgbClr val="EEEEEE"/>
+                      </a:solidFill>
+                      <a:prstDash val="solid"/>
+                      <a:round/>
+                      <a:headEnd type="none" w="med" len="med"/>
+                      <a:tailEnd type="none" w="med" len="med"/>
+                    </a:lnL>
+                    <a:lnR w="2540" cap="flat" cmpd="sng" algn="ctr">
+                      <a:solidFill>
+                        <a:srgbClr val="EEEEEE"/>
+                      </a:solidFill>
+                      <a:prstDash val="solid"/>
+                      <a:round/>
+                      <a:headEnd type="none" w="med" len="med"/>
+                      <a:tailEnd type="none" w="med" len="med"/>
+                    </a:lnR>
+                    <a:lnT w="2540" cap="flat" cmpd="sng" algn="ctr">
+                      <a:solidFill>
+                        <a:srgbClr val="EEEEEE"/>
+                      </a:solidFill>
+                      <a:prstDash val="solid"/>
+                      <a:round/>
+                      <a:headEnd type="none" w="med" len="med"/>
+                      <a:tailEnd type="none" w="med" len="med"/>
+                    </a:lnT>
+                    <a:lnB w="2540" cap="flat" cmpd="sng" algn="ctr">
+                      <a:solidFill>
+                        <a:srgbClr val="EEEEEE"/>
+                      </a:solidFill>
+                      <a:prstDash val="solid"/>
+                      <a:round/>
+                      <a:headEnd type="none" w="med" len="med"/>
+                      <a:tailEnd type="none" w="med" len="med"/>
+                    </a:lnB>
+                  </a:tcPr>
+                </a:tc>
+                <a:tc>
+                  <a:txBody>
+                    <a:bodyPr/>
+                    <a:lstStyle/>
+                    <a:p>
+                      <a:pPr algn="ctr" indent="0" marL="0">
+                        <a:buNone/>
+                      </a:pPr>
                       <a:r>
                         <a:rPr lang="en-US" sz="500" dirty="0">
                           <a:solidFill>
@@ -7123,7 +8138,7 @@
                           <a:ea typeface="Calibri" pitchFamily="34" charset="-122"/>
                           <a:cs typeface="Calibri" pitchFamily="34" charset="-120"/>
                         </a:rPr>
-                        <a:t>0.00%</a:t>
+                        <a:t>0.01%</a:t>
                       </a:r>
                       <a:endParaRPr lang="en-US" sz="500" dirty="0">
                         <a:latin typeface="Calibri" charset="0"/>
@@ -7578,7 +8593,7 @@
                           <a:ea typeface="Calibri" pitchFamily="34" charset="-122"/>
                           <a:cs typeface="Calibri" pitchFamily="34" charset="-120"/>
                         </a:rPr>
-                        <a:t>0.01%</a:t>
+                        <a:t>-0.01%</a:t>
                       </a:r>
                       <a:endParaRPr lang="en-US" sz="500" dirty="0">
                         <a:latin typeface="Calibri" charset="0"/>
@@ -7643,7 +8658,7 @@
                           <a:ea typeface="Calibri" pitchFamily="34" charset="-122"/>
                           <a:cs typeface="Calibri" pitchFamily="34" charset="-120"/>
                         </a:rPr>
-                        <a:t>-0.01%</a:t>
+                        <a:t>0.10%</a:t>
                       </a:r>
                       <a:endParaRPr lang="en-US" sz="500" dirty="0">
                         <a:latin typeface="Calibri" charset="0"/>
@@ -7708,7 +8723,7 @@
                           <a:ea typeface="Calibri" pitchFamily="34" charset="-122"/>
                           <a:cs typeface="Calibri" pitchFamily="34" charset="-120"/>
                         </a:rPr>
-                        <a:t>0.10%</a:t>
+                        <a:t>0.13%</a:t>
                       </a:r>
                       <a:endParaRPr lang="en-US" sz="500" dirty="0">
                         <a:latin typeface="Calibri" charset="0"/>
@@ -7773,64 +8788,64 @@
                           <a:ea typeface="Calibri" pitchFamily="34" charset="-122"/>
                           <a:cs typeface="Calibri" pitchFamily="34" charset="-120"/>
                         </a:rPr>
-                        <a:t>0.13%</a:t>
-                      </a:r>
-                      <a:endParaRPr lang="en-US" sz="500" dirty="0">
-                        <a:latin typeface="Calibri" charset="0"/>
-                        <a:ea typeface="Calibri" charset="0"/>
-                        <a:cs typeface="Calibri" charset="0"/>
-                      </a:endParaRPr>
-                    </a:p>
-                  </a:txBody>
-                  <a:tcPr marL="91440" marR="91440" marT="45720" marB="45720">
-                    <a:lnL w="2540" cap="flat" cmpd="sng" algn="ctr">
-                      <a:solidFill>
-                        <a:srgbClr val="EEEEEE"/>
-                      </a:solidFill>
-                      <a:prstDash val="solid"/>
-                      <a:round/>
-                      <a:headEnd type="none" w="med" len="med"/>
-                      <a:tailEnd type="none" w="med" len="med"/>
-                    </a:lnL>
-                    <a:lnR w="2540" cap="flat" cmpd="sng" algn="ctr">
-                      <a:solidFill>
-                        <a:srgbClr val="EEEEEE"/>
-                      </a:solidFill>
-                      <a:prstDash val="solid"/>
-                      <a:round/>
-                      <a:headEnd type="none" w="med" len="med"/>
-                      <a:tailEnd type="none" w="med" len="med"/>
-                    </a:lnR>
-                    <a:lnT w="2540" cap="flat" cmpd="sng" algn="ctr">
-                      <a:solidFill>
-                        <a:srgbClr val="EEEEEE"/>
-                      </a:solidFill>
-                      <a:prstDash val="solid"/>
-                      <a:round/>
-                      <a:headEnd type="none" w="med" len="med"/>
-                      <a:tailEnd type="none" w="med" len="med"/>
-                    </a:lnT>
-                    <a:lnB w="2540" cap="flat" cmpd="sng" algn="ctr">
-                      <a:solidFill>
-                        <a:srgbClr val="EEEEEE"/>
-                      </a:solidFill>
-                      <a:prstDash val="solid"/>
-                      <a:round/>
-                      <a:headEnd type="none" w="med" len="med"/>
-                      <a:tailEnd type="none" w="med" len="med"/>
-                    </a:lnB>
-                  </a:tcPr>
-                </a:tc>
-                <a:tc>
-                  <a:txBody>
-                    <a:bodyPr/>
-                    <a:lstStyle/>
-                    <a:p>
-                      <a:pPr algn="ctr" indent="0" marL="0">
-                        <a:buNone/>
-                      </a:pPr>
-                      <a:r>
-                        <a:rPr lang="en-US" sz="500" dirty="0">
+                        <a:t>0.18%</a:t>
+                      </a:r>
+                      <a:endParaRPr lang="en-US" sz="500" dirty="0">
+                        <a:latin typeface="Calibri" charset="0"/>
+                        <a:ea typeface="Calibri" charset="0"/>
+                        <a:cs typeface="Calibri" charset="0"/>
+                      </a:endParaRPr>
+                    </a:p>
+                  </a:txBody>
+                  <a:tcPr marL="91440" marR="91440" marT="45720" marB="45720">
+                    <a:lnL w="2540" cap="flat" cmpd="sng" algn="ctr">
+                      <a:solidFill>
+                        <a:srgbClr val="EEEEEE"/>
+                      </a:solidFill>
+                      <a:prstDash val="solid"/>
+                      <a:round/>
+                      <a:headEnd type="none" w="med" len="med"/>
+                      <a:tailEnd type="none" w="med" len="med"/>
+                    </a:lnL>
+                    <a:lnR w="2540" cap="flat" cmpd="sng" algn="ctr">
+                      <a:solidFill>
+                        <a:srgbClr val="EEEEEE"/>
+                      </a:solidFill>
+                      <a:prstDash val="solid"/>
+                      <a:round/>
+                      <a:headEnd type="none" w="med" len="med"/>
+                      <a:tailEnd type="none" w="med" len="med"/>
+                    </a:lnR>
+                    <a:lnT w="2540" cap="flat" cmpd="sng" algn="ctr">
+                      <a:solidFill>
+                        <a:srgbClr val="EEEEEE"/>
+                      </a:solidFill>
+                      <a:prstDash val="solid"/>
+                      <a:round/>
+                      <a:headEnd type="none" w="med" len="med"/>
+                      <a:tailEnd type="none" w="med" len="med"/>
+                    </a:lnT>
+                    <a:lnB w="2540" cap="flat" cmpd="sng" algn="ctr">
+                      <a:solidFill>
+                        <a:srgbClr val="EEEEEE"/>
+                      </a:solidFill>
+                      <a:prstDash val="solid"/>
+                      <a:round/>
+                      <a:headEnd type="none" w="med" len="med"/>
+                      <a:tailEnd type="none" w="med" len="med"/>
+                    </a:lnB>
+                  </a:tcPr>
+                </a:tc>
+                <a:tc>
+                  <a:txBody>
+                    <a:bodyPr/>
+                    <a:lstStyle/>
+                    <a:p>
+                      <a:pPr algn="ctr" indent="0" marL="0">
+                        <a:buNone/>
+                      </a:pPr>
+                      <a:r>
+                        <a:rPr lang="en-US" sz="500" b="1" dirty="0">
                           <a:solidFill>
                             <a:srgbClr val="999999"/>
                           </a:solidFill>
@@ -7838,72 +8853,7 @@
                           <a:ea typeface="Calibri" pitchFamily="34" charset="-122"/>
                           <a:cs typeface="Calibri" pitchFamily="34" charset="-120"/>
                         </a:rPr>
-                        <a:t>0.60%</a:t>
-                      </a:r>
-                      <a:endParaRPr lang="en-US" sz="500" dirty="0">
-                        <a:latin typeface="Calibri" charset="0"/>
-                        <a:ea typeface="Calibri" charset="0"/>
-                        <a:cs typeface="Calibri" charset="0"/>
-                      </a:endParaRPr>
-                    </a:p>
-                  </a:txBody>
-                  <a:tcPr marL="91440" marR="91440" marT="45720" marB="45720">
-                    <a:lnL w="2540" cap="flat" cmpd="sng" algn="ctr">
-                      <a:solidFill>
-                        <a:srgbClr val="EEEEEE"/>
-                      </a:solidFill>
-                      <a:prstDash val="solid"/>
-                      <a:round/>
-                      <a:headEnd type="none" w="med" len="med"/>
-                      <a:tailEnd type="none" w="med" len="med"/>
-                    </a:lnL>
-                    <a:lnR w="2540" cap="flat" cmpd="sng" algn="ctr">
-                      <a:solidFill>
-                        <a:srgbClr val="EEEEEE"/>
-                      </a:solidFill>
-                      <a:prstDash val="solid"/>
-                      <a:round/>
-                      <a:headEnd type="none" w="med" len="med"/>
-                      <a:tailEnd type="none" w="med" len="med"/>
-                    </a:lnR>
-                    <a:lnT w="2540" cap="flat" cmpd="sng" algn="ctr">
-                      <a:solidFill>
-                        <a:srgbClr val="EEEEEE"/>
-                      </a:solidFill>
-                      <a:prstDash val="solid"/>
-                      <a:round/>
-                      <a:headEnd type="none" w="med" len="med"/>
-                      <a:tailEnd type="none" w="med" len="med"/>
-                    </a:lnT>
-                    <a:lnB w="2540" cap="flat" cmpd="sng" algn="ctr">
-                      <a:solidFill>
-                        <a:srgbClr val="EEEEEE"/>
-                      </a:solidFill>
-                      <a:prstDash val="solid"/>
-                      <a:round/>
-                      <a:headEnd type="none" w="med" len="med"/>
-                      <a:tailEnd type="none" w="med" len="med"/>
-                    </a:lnB>
-                  </a:tcPr>
-                </a:tc>
-                <a:tc>
-                  <a:txBody>
-                    <a:bodyPr/>
-                    <a:lstStyle/>
-                    <a:p>
-                      <a:pPr algn="ctr" indent="0" marL="0">
-                        <a:buNone/>
-                      </a:pPr>
-                      <a:r>
-                        <a:rPr lang="en-US" sz="500" b="1" dirty="0">
-                          <a:solidFill>
-                            <a:srgbClr val="999999"/>
-                          </a:solidFill>
-                          <a:latin typeface="Calibri" pitchFamily="34" charset="0"/>
-                          <a:ea typeface="Calibri" pitchFamily="34" charset="-122"/>
-                          <a:cs typeface="Calibri" pitchFamily="34" charset="-120"/>
-                        </a:rPr>
-                        <a:t>0.86%</a:t>
+                        <a:t>0.48%</a:t>
                       </a:r>
                       <a:endParaRPr lang="en-US" sz="500" dirty="0">
                         <a:latin typeface="Calibri" charset="0"/>
@@ -8016,6 +8966,125 @@
                         <a:buNone/>
                       </a:pPr>
                       <a:r>
+                        <a:rPr lang="en-US" sz="400" dirty="0">
+                          <a:solidFill>
+                            <a:srgbClr val="000000"/>
+                          </a:solidFill>
+                          <a:latin typeface="Calibri" pitchFamily="34" charset="0"/>
+                          <a:ea typeface="Calibri" pitchFamily="34" charset="-122"/>
+                          <a:cs typeface="Calibri" pitchFamily="34" charset="-120"/>
+                        </a:rPr>
+                        <a:t>FIP LIQUIDEZ EFECTIVO</a:t>
+                      </a:r>
+                      <a:endParaRPr lang="en-US" sz="400" dirty="0">
+                        <a:latin typeface="Calibri" charset="0"/>
+                        <a:ea typeface="Calibri" charset="0"/>
+                        <a:cs typeface="Calibri" charset="0"/>
+                      </a:endParaRPr>
+                    </a:p>
+                  </a:txBody>
+                  <a:tcPr marL="91440" marR="91440" marT="45720" marB="45720">
+                    <a:lnL w="2540" cap="flat" cmpd="sng" algn="ctr">
+                      <a:solidFill>
+                        <a:srgbClr val="EEEEEE"/>
+                      </a:solidFill>
+                      <a:prstDash val="solid"/>
+                      <a:round/>
+                      <a:headEnd type="none" w="med" len="med"/>
+                      <a:tailEnd type="none" w="med" len="med"/>
+                    </a:lnL>
+                    <a:lnR w="2540" cap="flat" cmpd="sng" algn="ctr">
+                      <a:solidFill>
+                        <a:srgbClr val="EEEEEE"/>
+                      </a:solidFill>
+                      <a:prstDash val="solid"/>
+                      <a:round/>
+                      <a:headEnd type="none" w="med" len="med"/>
+                      <a:tailEnd type="none" w="med" len="med"/>
+                    </a:lnR>
+                    <a:lnT w="2540" cap="flat" cmpd="sng" algn="ctr">
+                      <a:solidFill>
+                        <a:srgbClr val="EEEEEE"/>
+                      </a:solidFill>
+                      <a:prstDash val="solid"/>
+                      <a:round/>
+                      <a:headEnd type="none" w="med" len="med"/>
+                      <a:tailEnd type="none" w="med" len="med"/>
+                    </a:lnT>
+                    <a:lnB w="2540" cap="flat" cmpd="sng" algn="ctr">
+                      <a:solidFill>
+                        <a:srgbClr val="EEEEEE"/>
+                      </a:solidFill>
+                      <a:prstDash val="solid"/>
+                      <a:round/>
+                      <a:headEnd type="none" w="med" len="med"/>
+                      <a:tailEnd type="none" w="med" len="med"/>
+                    </a:lnB>
+                  </a:tcPr>
+                </a:tc>
+                <a:tc>
+                  <a:txBody>
+                    <a:bodyPr/>
+                    <a:lstStyle/>
+                    <a:p>
+                      <a:pPr algn="ctr" indent="0" marL="0">
+                        <a:buNone/>
+                      </a:pPr>
+                      <a:endParaRPr lang="en-US" sz="500" dirty="0">
+                        <a:latin typeface="Calibri" charset="0"/>
+                        <a:ea typeface="Calibri" charset="0"/>
+                        <a:cs typeface="Calibri" charset="0"/>
+                      </a:endParaRPr>
+                    </a:p>
+                  </a:txBody>
+                  <a:tcPr marL="91440" marR="91440" marT="45720" marB="45720">
+                    <a:lnL w="2540" cap="flat" cmpd="sng" algn="ctr">
+                      <a:solidFill>
+                        <a:srgbClr val="EEEEEE"/>
+                      </a:solidFill>
+                      <a:prstDash val="solid"/>
+                      <a:round/>
+                      <a:headEnd type="none" w="med" len="med"/>
+                      <a:tailEnd type="none" w="med" len="med"/>
+                    </a:lnL>
+                    <a:lnR w="2540" cap="flat" cmpd="sng" algn="ctr">
+                      <a:solidFill>
+                        <a:srgbClr val="EEEEEE"/>
+                      </a:solidFill>
+                      <a:prstDash val="solid"/>
+                      <a:round/>
+                      <a:headEnd type="none" w="med" len="med"/>
+                      <a:tailEnd type="none" w="med" len="med"/>
+                    </a:lnR>
+                    <a:lnT w="2540" cap="flat" cmpd="sng" algn="ctr">
+                      <a:solidFill>
+                        <a:srgbClr val="EEEEEE"/>
+                      </a:solidFill>
+                      <a:prstDash val="solid"/>
+                      <a:round/>
+                      <a:headEnd type="none" w="med" len="med"/>
+                      <a:tailEnd type="none" w="med" len="med"/>
+                    </a:lnT>
+                    <a:lnB w="2540" cap="flat" cmpd="sng" algn="ctr">
+                      <a:solidFill>
+                        <a:srgbClr val="EEEEEE"/>
+                      </a:solidFill>
+                      <a:prstDash val="solid"/>
+                      <a:round/>
+                      <a:headEnd type="none" w="med" len="med"/>
+                      <a:tailEnd type="none" w="med" len="med"/>
+                    </a:lnB>
+                  </a:tcPr>
+                </a:tc>
+                <a:tc>
+                  <a:txBody>
+                    <a:bodyPr/>
+                    <a:lstStyle/>
+                    <a:p>
+                      <a:pPr algn="ctr" indent="0" marL="0">
+                        <a:buNone/>
+                      </a:pPr>
+                      <a:r>
                         <a:rPr lang="en-US" sz="500" dirty="0">
                           <a:solidFill>
                             <a:srgbClr val="000000"/>
@@ -8024,62 +9093,8 @@
                           <a:ea typeface="Calibri" pitchFamily="34" charset="-122"/>
                           <a:cs typeface="Calibri" pitchFamily="34" charset="-120"/>
                         </a:rPr>
-                        <a:t>FIP LIQUIDEZ EFECTIVO</a:t>
-                      </a:r>
-                      <a:endParaRPr lang="en-US" sz="500" dirty="0">
-                        <a:latin typeface="Calibri" charset="0"/>
-                        <a:ea typeface="Calibri" charset="0"/>
-                        <a:cs typeface="Calibri" charset="0"/>
-                      </a:endParaRPr>
-                    </a:p>
-                  </a:txBody>
-                  <a:tcPr marL="91440" marR="91440" marT="45720" marB="45720">
-                    <a:lnL w="2540" cap="flat" cmpd="sng" algn="ctr">
-                      <a:solidFill>
-                        <a:srgbClr val="EEEEEE"/>
-                      </a:solidFill>
-                      <a:prstDash val="solid"/>
-                      <a:round/>
-                      <a:headEnd type="none" w="med" len="med"/>
-                      <a:tailEnd type="none" w="med" len="med"/>
-                    </a:lnL>
-                    <a:lnR w="2540" cap="flat" cmpd="sng" algn="ctr">
-                      <a:solidFill>
-                        <a:srgbClr val="EEEEEE"/>
-                      </a:solidFill>
-                      <a:prstDash val="solid"/>
-                      <a:round/>
-                      <a:headEnd type="none" w="med" len="med"/>
-                      <a:tailEnd type="none" w="med" len="med"/>
-                    </a:lnR>
-                    <a:lnT w="2540" cap="flat" cmpd="sng" algn="ctr">
-                      <a:solidFill>
-                        <a:srgbClr val="EEEEEE"/>
-                      </a:solidFill>
-                      <a:prstDash val="solid"/>
-                      <a:round/>
-                      <a:headEnd type="none" w="med" len="med"/>
-                      <a:tailEnd type="none" w="med" len="med"/>
-                    </a:lnT>
-                    <a:lnB w="2540" cap="flat" cmpd="sng" algn="ctr">
-                      <a:solidFill>
-                        <a:srgbClr val="EEEEEE"/>
-                      </a:solidFill>
-                      <a:prstDash val="solid"/>
-                      <a:round/>
-                      <a:headEnd type="none" w="med" len="med"/>
-                      <a:tailEnd type="none" w="med" len="med"/>
-                    </a:lnB>
-                  </a:tcPr>
-                </a:tc>
-                <a:tc>
-                  <a:txBody>
-                    <a:bodyPr/>
-                    <a:lstStyle/>
-                    <a:p>
-                      <a:pPr algn="ctr" indent="0" marL="0">
-                        <a:buNone/>
-                      </a:pPr>
+                        <a:t>0.14%</a:t>
+                      </a:r>
                       <a:endParaRPr lang="en-US" sz="500" dirty="0">
                         <a:latin typeface="Calibri" charset="0"/>
                         <a:ea typeface="Calibri" charset="0"/>
@@ -8208,7 +9223,7 @@
                           <a:ea typeface="Calibri" pitchFamily="34" charset="-122"/>
                           <a:cs typeface="Calibri" pitchFamily="34" charset="-120"/>
                         </a:rPr>
-                        <a:t>0.14%</a:t>
+                        <a:t>0.20%</a:t>
                       </a:r>
                       <a:endParaRPr lang="en-US" sz="500" dirty="0">
                         <a:latin typeface="Calibri" charset="0"/>
@@ -8273,7 +9288,7 @@
                           <a:ea typeface="Calibri" pitchFamily="34" charset="-122"/>
                           <a:cs typeface="Calibri" pitchFamily="34" charset="-120"/>
                         </a:rPr>
-                        <a:t>0.20%</a:t>
+                        <a:t>0.21%</a:t>
                       </a:r>
                       <a:endParaRPr lang="en-US" sz="500" dirty="0">
                         <a:latin typeface="Calibri" charset="0"/>
@@ -8338,7 +9353,7 @@
                           <a:ea typeface="Calibri" pitchFamily="34" charset="-122"/>
                           <a:cs typeface="Calibri" pitchFamily="34" charset="-120"/>
                         </a:rPr>
-                        <a:t>0.21%</a:t>
+                        <a:t>0.17%</a:t>
                       </a:r>
                       <a:endParaRPr lang="en-US" sz="500" dirty="0">
                         <a:latin typeface="Calibri" charset="0"/>
@@ -8403,7 +9418,7 @@
                           <a:ea typeface="Calibri" pitchFamily="34" charset="-122"/>
                           <a:cs typeface="Calibri" pitchFamily="34" charset="-120"/>
                         </a:rPr>
-                        <a:t>0.17%</a:t>
+                        <a:t>0.16%</a:t>
                       </a:r>
                       <a:endParaRPr lang="en-US" sz="500" dirty="0">
                         <a:latin typeface="Calibri" charset="0"/>
@@ -8468,6 +9483,136 @@
                           <a:ea typeface="Calibri" pitchFamily="34" charset="-122"/>
                           <a:cs typeface="Calibri" pitchFamily="34" charset="-120"/>
                         </a:rPr>
+                        <a:t>0.12%</a:t>
+                      </a:r>
+                      <a:endParaRPr lang="en-US" sz="500" dirty="0">
+                        <a:latin typeface="Calibri" charset="0"/>
+                        <a:ea typeface="Calibri" charset="0"/>
+                        <a:cs typeface="Calibri" charset="0"/>
+                      </a:endParaRPr>
+                    </a:p>
+                  </a:txBody>
+                  <a:tcPr marL="91440" marR="91440" marT="45720" marB="45720">
+                    <a:lnL w="2540" cap="flat" cmpd="sng" algn="ctr">
+                      <a:solidFill>
+                        <a:srgbClr val="EEEEEE"/>
+                      </a:solidFill>
+                      <a:prstDash val="solid"/>
+                      <a:round/>
+                      <a:headEnd type="none" w="med" len="med"/>
+                      <a:tailEnd type="none" w="med" len="med"/>
+                    </a:lnL>
+                    <a:lnR w="2540" cap="flat" cmpd="sng" algn="ctr">
+                      <a:solidFill>
+                        <a:srgbClr val="EEEEEE"/>
+                      </a:solidFill>
+                      <a:prstDash val="solid"/>
+                      <a:round/>
+                      <a:headEnd type="none" w="med" len="med"/>
+                      <a:tailEnd type="none" w="med" len="med"/>
+                    </a:lnR>
+                    <a:lnT w="2540" cap="flat" cmpd="sng" algn="ctr">
+                      <a:solidFill>
+                        <a:srgbClr val="EEEEEE"/>
+                      </a:solidFill>
+                      <a:prstDash val="solid"/>
+                      <a:round/>
+                      <a:headEnd type="none" w="med" len="med"/>
+                      <a:tailEnd type="none" w="med" len="med"/>
+                    </a:lnT>
+                    <a:lnB w="2540" cap="flat" cmpd="sng" algn="ctr">
+                      <a:solidFill>
+                        <a:srgbClr val="EEEEEE"/>
+                      </a:solidFill>
+                      <a:prstDash val="solid"/>
+                      <a:round/>
+                      <a:headEnd type="none" w="med" len="med"/>
+                      <a:tailEnd type="none" w="med" len="med"/>
+                    </a:lnB>
+                  </a:tcPr>
+                </a:tc>
+                <a:tc>
+                  <a:txBody>
+                    <a:bodyPr/>
+                    <a:lstStyle/>
+                    <a:p>
+                      <a:pPr algn="ctr" indent="0" marL="0">
+                        <a:buNone/>
+                      </a:pPr>
+                      <a:r>
+                        <a:rPr lang="en-US" sz="500" dirty="0">
+                          <a:solidFill>
+                            <a:srgbClr val="000000"/>
+                          </a:solidFill>
+                          <a:latin typeface="Calibri" pitchFamily="34" charset="0"/>
+                          <a:ea typeface="Calibri" pitchFamily="34" charset="-122"/>
+                          <a:cs typeface="Calibri" pitchFamily="34" charset="-120"/>
+                        </a:rPr>
+                        <a:t>0.13%</a:t>
+                      </a:r>
+                      <a:endParaRPr lang="en-US" sz="500" dirty="0">
+                        <a:latin typeface="Calibri" charset="0"/>
+                        <a:ea typeface="Calibri" charset="0"/>
+                        <a:cs typeface="Calibri" charset="0"/>
+                      </a:endParaRPr>
+                    </a:p>
+                  </a:txBody>
+                  <a:tcPr marL="91440" marR="91440" marT="45720" marB="45720">
+                    <a:lnL w="2540" cap="flat" cmpd="sng" algn="ctr">
+                      <a:solidFill>
+                        <a:srgbClr val="EEEEEE"/>
+                      </a:solidFill>
+                      <a:prstDash val="solid"/>
+                      <a:round/>
+                      <a:headEnd type="none" w="med" len="med"/>
+                      <a:tailEnd type="none" w="med" len="med"/>
+                    </a:lnL>
+                    <a:lnR w="2540" cap="flat" cmpd="sng" algn="ctr">
+                      <a:solidFill>
+                        <a:srgbClr val="EEEEEE"/>
+                      </a:solidFill>
+                      <a:prstDash val="solid"/>
+                      <a:round/>
+                      <a:headEnd type="none" w="med" len="med"/>
+                      <a:tailEnd type="none" w="med" len="med"/>
+                    </a:lnR>
+                    <a:lnT w="2540" cap="flat" cmpd="sng" algn="ctr">
+                      <a:solidFill>
+                        <a:srgbClr val="EEEEEE"/>
+                      </a:solidFill>
+                      <a:prstDash val="solid"/>
+                      <a:round/>
+                      <a:headEnd type="none" w="med" len="med"/>
+                      <a:tailEnd type="none" w="med" len="med"/>
+                    </a:lnT>
+                    <a:lnB w="2540" cap="flat" cmpd="sng" algn="ctr">
+                      <a:solidFill>
+                        <a:srgbClr val="EEEEEE"/>
+                      </a:solidFill>
+                      <a:prstDash val="solid"/>
+                      <a:round/>
+                      <a:headEnd type="none" w="med" len="med"/>
+                      <a:tailEnd type="none" w="med" len="med"/>
+                    </a:lnB>
+                  </a:tcPr>
+                </a:tc>
+                <a:tc>
+                  <a:txBody>
+                    <a:bodyPr/>
+                    <a:lstStyle/>
+                    <a:p>
+                      <a:pPr algn="ctr" indent="0" marL="0">
+                        <a:buNone/>
+                      </a:pPr>
+                      <a:r>
+                        <a:rPr lang="en-US" sz="500" dirty="0">
+                          <a:solidFill>
+                            <a:srgbClr val="000000"/>
+                          </a:solidFill>
+                          <a:latin typeface="Calibri" pitchFamily="34" charset="0"/>
+                          <a:ea typeface="Calibri" pitchFamily="34" charset="-122"/>
+                          <a:cs typeface="Calibri" pitchFamily="34" charset="-120"/>
+                        </a:rPr>
                         <a:t>0.16%</a:t>
                       </a:r>
                       <a:endParaRPr lang="en-US" sz="500" dirty="0">
@@ -8533,7 +9678,7 @@
                           <a:ea typeface="Calibri" pitchFamily="34" charset="-122"/>
                           <a:cs typeface="Calibri" pitchFamily="34" charset="-120"/>
                         </a:rPr>
-                        <a:t>0.12%</a:t>
+                        <a:t>0.19%</a:t>
                       </a:r>
                       <a:endParaRPr lang="en-US" sz="500" dirty="0">
                         <a:latin typeface="Calibri" charset="0"/>
@@ -8598,64 +9743,64 @@
                           <a:ea typeface="Calibri" pitchFamily="34" charset="-122"/>
                           <a:cs typeface="Calibri" pitchFamily="34" charset="-120"/>
                         </a:rPr>
-                        <a:t>0.13%</a:t>
-                      </a:r>
-                      <a:endParaRPr lang="en-US" sz="500" dirty="0">
-                        <a:latin typeface="Calibri" charset="0"/>
-                        <a:ea typeface="Calibri" charset="0"/>
-                        <a:cs typeface="Calibri" charset="0"/>
-                      </a:endParaRPr>
-                    </a:p>
-                  </a:txBody>
-                  <a:tcPr marL="91440" marR="91440" marT="45720" marB="45720">
-                    <a:lnL w="2540" cap="flat" cmpd="sng" algn="ctr">
-                      <a:solidFill>
-                        <a:srgbClr val="EEEEEE"/>
-                      </a:solidFill>
-                      <a:prstDash val="solid"/>
-                      <a:round/>
-                      <a:headEnd type="none" w="med" len="med"/>
-                      <a:tailEnd type="none" w="med" len="med"/>
-                    </a:lnL>
-                    <a:lnR w="2540" cap="flat" cmpd="sng" algn="ctr">
-                      <a:solidFill>
-                        <a:srgbClr val="EEEEEE"/>
-                      </a:solidFill>
-                      <a:prstDash val="solid"/>
-                      <a:round/>
-                      <a:headEnd type="none" w="med" len="med"/>
-                      <a:tailEnd type="none" w="med" len="med"/>
-                    </a:lnR>
-                    <a:lnT w="2540" cap="flat" cmpd="sng" algn="ctr">
-                      <a:solidFill>
-                        <a:srgbClr val="EEEEEE"/>
-                      </a:solidFill>
-                      <a:prstDash val="solid"/>
-                      <a:round/>
-                      <a:headEnd type="none" w="med" len="med"/>
-                      <a:tailEnd type="none" w="med" len="med"/>
-                    </a:lnT>
-                    <a:lnB w="2540" cap="flat" cmpd="sng" algn="ctr">
-                      <a:solidFill>
-                        <a:srgbClr val="EEEEEE"/>
-                      </a:solidFill>
-                      <a:prstDash val="solid"/>
-                      <a:round/>
-                      <a:headEnd type="none" w="med" len="med"/>
-                      <a:tailEnd type="none" w="med" len="med"/>
-                    </a:lnB>
-                  </a:tcPr>
-                </a:tc>
-                <a:tc>
-                  <a:txBody>
-                    <a:bodyPr/>
-                    <a:lstStyle/>
-                    <a:p>
-                      <a:pPr algn="ctr" indent="0" marL="0">
-                        <a:buNone/>
-                      </a:pPr>
-                      <a:r>
-                        <a:rPr lang="en-US" sz="500" dirty="0">
+                        <a:t>0.28%</a:t>
+                      </a:r>
+                      <a:endParaRPr lang="en-US" sz="500" dirty="0">
+                        <a:latin typeface="Calibri" charset="0"/>
+                        <a:ea typeface="Calibri" charset="0"/>
+                        <a:cs typeface="Calibri" charset="0"/>
+                      </a:endParaRPr>
+                    </a:p>
+                  </a:txBody>
+                  <a:tcPr marL="91440" marR="91440" marT="45720" marB="45720">
+                    <a:lnL w="2540" cap="flat" cmpd="sng" algn="ctr">
+                      <a:solidFill>
+                        <a:srgbClr val="EEEEEE"/>
+                      </a:solidFill>
+                      <a:prstDash val="solid"/>
+                      <a:round/>
+                      <a:headEnd type="none" w="med" len="med"/>
+                      <a:tailEnd type="none" w="med" len="med"/>
+                    </a:lnL>
+                    <a:lnR w="2540" cap="flat" cmpd="sng" algn="ctr">
+                      <a:solidFill>
+                        <a:srgbClr val="EEEEEE"/>
+                      </a:solidFill>
+                      <a:prstDash val="solid"/>
+                      <a:round/>
+                      <a:headEnd type="none" w="med" len="med"/>
+                      <a:tailEnd type="none" w="med" len="med"/>
+                    </a:lnR>
+                    <a:lnT w="2540" cap="flat" cmpd="sng" algn="ctr">
+                      <a:solidFill>
+                        <a:srgbClr val="EEEEEE"/>
+                      </a:solidFill>
+                      <a:prstDash val="solid"/>
+                      <a:round/>
+                      <a:headEnd type="none" w="med" len="med"/>
+                      <a:tailEnd type="none" w="med" len="med"/>
+                    </a:lnT>
+                    <a:lnB w="2540" cap="flat" cmpd="sng" algn="ctr">
+                      <a:solidFill>
+                        <a:srgbClr val="EEEEEE"/>
+                      </a:solidFill>
+                      <a:prstDash val="solid"/>
+                      <a:round/>
+                      <a:headEnd type="none" w="med" len="med"/>
+                      <a:tailEnd type="none" w="med" len="med"/>
+                    </a:lnB>
+                  </a:tcPr>
+                </a:tc>
+                <a:tc>
+                  <a:txBody>
+                    <a:bodyPr/>
+                    <a:lstStyle/>
+                    <a:p>
+                      <a:pPr algn="ctr" indent="0" marL="0">
+                        <a:buNone/>
+                      </a:pPr>
+                      <a:r>
+                        <a:rPr lang="en-US" sz="500" b="1" dirty="0">
                           <a:solidFill>
                             <a:srgbClr val="000000"/>
                           </a:solidFill>
@@ -8663,202 +9808,7 @@
                           <a:ea typeface="Calibri" pitchFamily="34" charset="-122"/>
                           <a:cs typeface="Calibri" pitchFamily="34" charset="-120"/>
                         </a:rPr>
-                        <a:t>0.16%</a:t>
-                      </a:r>
-                      <a:endParaRPr lang="en-US" sz="500" dirty="0">
-                        <a:latin typeface="Calibri" charset="0"/>
-                        <a:ea typeface="Calibri" charset="0"/>
-                        <a:cs typeface="Calibri" charset="0"/>
-                      </a:endParaRPr>
-                    </a:p>
-                  </a:txBody>
-                  <a:tcPr marL="91440" marR="91440" marT="45720" marB="45720">
-                    <a:lnL w="2540" cap="flat" cmpd="sng" algn="ctr">
-                      <a:solidFill>
-                        <a:srgbClr val="EEEEEE"/>
-                      </a:solidFill>
-                      <a:prstDash val="solid"/>
-                      <a:round/>
-                      <a:headEnd type="none" w="med" len="med"/>
-                      <a:tailEnd type="none" w="med" len="med"/>
-                    </a:lnL>
-                    <a:lnR w="2540" cap="flat" cmpd="sng" algn="ctr">
-                      <a:solidFill>
-                        <a:srgbClr val="EEEEEE"/>
-                      </a:solidFill>
-                      <a:prstDash val="solid"/>
-                      <a:round/>
-                      <a:headEnd type="none" w="med" len="med"/>
-                      <a:tailEnd type="none" w="med" len="med"/>
-                    </a:lnR>
-                    <a:lnT w="2540" cap="flat" cmpd="sng" algn="ctr">
-                      <a:solidFill>
-                        <a:srgbClr val="EEEEEE"/>
-                      </a:solidFill>
-                      <a:prstDash val="solid"/>
-                      <a:round/>
-                      <a:headEnd type="none" w="med" len="med"/>
-                      <a:tailEnd type="none" w="med" len="med"/>
-                    </a:lnT>
-                    <a:lnB w="2540" cap="flat" cmpd="sng" algn="ctr">
-                      <a:solidFill>
-                        <a:srgbClr val="EEEEEE"/>
-                      </a:solidFill>
-                      <a:prstDash val="solid"/>
-                      <a:round/>
-                      <a:headEnd type="none" w="med" len="med"/>
-                      <a:tailEnd type="none" w="med" len="med"/>
-                    </a:lnB>
-                  </a:tcPr>
-                </a:tc>
-                <a:tc>
-                  <a:txBody>
-                    <a:bodyPr/>
-                    <a:lstStyle/>
-                    <a:p>
-                      <a:pPr algn="ctr" indent="0" marL="0">
-                        <a:buNone/>
-                      </a:pPr>
-                      <a:r>
-                        <a:rPr lang="en-US" sz="500" dirty="0">
-                          <a:solidFill>
-                            <a:srgbClr val="000000"/>
-                          </a:solidFill>
-                          <a:latin typeface="Calibri" pitchFamily="34" charset="0"/>
-                          <a:ea typeface="Calibri" pitchFamily="34" charset="-122"/>
-                          <a:cs typeface="Calibri" pitchFamily="34" charset="-120"/>
-                        </a:rPr>
-                        <a:t>0.19%</a:t>
-                      </a:r>
-                      <a:endParaRPr lang="en-US" sz="500" dirty="0">
-                        <a:latin typeface="Calibri" charset="0"/>
-                        <a:ea typeface="Calibri" charset="0"/>
-                        <a:cs typeface="Calibri" charset="0"/>
-                      </a:endParaRPr>
-                    </a:p>
-                  </a:txBody>
-                  <a:tcPr marL="91440" marR="91440" marT="45720" marB="45720">
-                    <a:lnL w="2540" cap="flat" cmpd="sng" algn="ctr">
-                      <a:solidFill>
-                        <a:srgbClr val="EEEEEE"/>
-                      </a:solidFill>
-                      <a:prstDash val="solid"/>
-                      <a:round/>
-                      <a:headEnd type="none" w="med" len="med"/>
-                      <a:tailEnd type="none" w="med" len="med"/>
-                    </a:lnL>
-                    <a:lnR w="2540" cap="flat" cmpd="sng" algn="ctr">
-                      <a:solidFill>
-                        <a:srgbClr val="EEEEEE"/>
-                      </a:solidFill>
-                      <a:prstDash val="solid"/>
-                      <a:round/>
-                      <a:headEnd type="none" w="med" len="med"/>
-                      <a:tailEnd type="none" w="med" len="med"/>
-                    </a:lnR>
-                    <a:lnT w="2540" cap="flat" cmpd="sng" algn="ctr">
-                      <a:solidFill>
-                        <a:srgbClr val="EEEEEE"/>
-                      </a:solidFill>
-                      <a:prstDash val="solid"/>
-                      <a:round/>
-                      <a:headEnd type="none" w="med" len="med"/>
-                      <a:tailEnd type="none" w="med" len="med"/>
-                    </a:lnT>
-                    <a:lnB w="2540" cap="flat" cmpd="sng" algn="ctr">
-                      <a:solidFill>
-                        <a:srgbClr val="EEEEEE"/>
-                      </a:solidFill>
-                      <a:prstDash val="solid"/>
-                      <a:round/>
-                      <a:headEnd type="none" w="med" len="med"/>
-                      <a:tailEnd type="none" w="med" len="med"/>
-                    </a:lnB>
-                  </a:tcPr>
-                </a:tc>
-                <a:tc>
-                  <a:txBody>
-                    <a:bodyPr/>
-                    <a:lstStyle/>
-                    <a:p>
-                      <a:pPr algn="ctr" indent="0" marL="0">
-                        <a:buNone/>
-                      </a:pPr>
-                      <a:r>
-                        <a:rPr lang="en-US" sz="500" dirty="0">
-                          <a:solidFill>
-                            <a:srgbClr val="000000"/>
-                          </a:solidFill>
-                          <a:latin typeface="Calibri" pitchFamily="34" charset="0"/>
-                          <a:ea typeface="Calibri" pitchFamily="34" charset="-122"/>
-                          <a:cs typeface="Calibri" pitchFamily="34" charset="-120"/>
-                        </a:rPr>
-                        <a:t>0.28%</a:t>
-                      </a:r>
-                      <a:endParaRPr lang="en-US" sz="500" dirty="0">
-                        <a:latin typeface="Calibri" charset="0"/>
-                        <a:ea typeface="Calibri" charset="0"/>
-                        <a:cs typeface="Calibri" charset="0"/>
-                      </a:endParaRPr>
-                    </a:p>
-                  </a:txBody>
-                  <a:tcPr marL="91440" marR="91440" marT="45720" marB="45720">
-                    <a:lnL w="2540" cap="flat" cmpd="sng" algn="ctr">
-                      <a:solidFill>
-                        <a:srgbClr val="EEEEEE"/>
-                      </a:solidFill>
-                      <a:prstDash val="solid"/>
-                      <a:round/>
-                      <a:headEnd type="none" w="med" len="med"/>
-                      <a:tailEnd type="none" w="med" len="med"/>
-                    </a:lnL>
-                    <a:lnR w="2540" cap="flat" cmpd="sng" algn="ctr">
-                      <a:solidFill>
-                        <a:srgbClr val="EEEEEE"/>
-                      </a:solidFill>
-                      <a:prstDash val="solid"/>
-                      <a:round/>
-                      <a:headEnd type="none" w="med" len="med"/>
-                      <a:tailEnd type="none" w="med" len="med"/>
-                    </a:lnR>
-                    <a:lnT w="2540" cap="flat" cmpd="sng" algn="ctr">
-                      <a:solidFill>
-                        <a:srgbClr val="EEEEEE"/>
-                      </a:solidFill>
-                      <a:prstDash val="solid"/>
-                      <a:round/>
-                      <a:headEnd type="none" w="med" len="med"/>
-                      <a:tailEnd type="none" w="med" len="med"/>
-                    </a:lnT>
-                    <a:lnB w="2540" cap="flat" cmpd="sng" algn="ctr">
-                      <a:solidFill>
-                        <a:srgbClr val="EEEEEE"/>
-                      </a:solidFill>
-                      <a:prstDash val="solid"/>
-                      <a:round/>
-                      <a:headEnd type="none" w="med" len="med"/>
-                      <a:tailEnd type="none" w="med" len="med"/>
-                    </a:lnB>
-                  </a:tcPr>
-                </a:tc>
-                <a:tc>
-                  <a:txBody>
-                    <a:bodyPr/>
-                    <a:lstStyle/>
-                    <a:p>
-                      <a:pPr algn="ctr" indent="0" marL="0">
-                        <a:buNone/>
-                      </a:pPr>
-                      <a:r>
-                        <a:rPr lang="en-US" sz="500" b="1" dirty="0">
-                          <a:solidFill>
-                            <a:srgbClr val="000000"/>
-                          </a:solidFill>
-                          <a:latin typeface="Calibri" pitchFamily="34" charset="0"/>
-                          <a:ea typeface="Calibri" pitchFamily="34" charset="-122"/>
-                          <a:cs typeface="Calibri" pitchFamily="34" charset="-120"/>
-                        </a:rPr>
-                        <a:t>1.91%</a:t>
+                        <a:t>1.93%</a:t>
                       </a:r>
                       <a:endParaRPr lang="en-US" sz="500" dirty="0">
                         <a:latin typeface="Calibri" charset="0"/>
@@ -9046,6 +9996,60 @@
                       <a:pPr algn="ctr" indent="0" marL="0">
                         <a:buNone/>
                       </a:pPr>
+                      <a:endParaRPr lang="en-US" sz="500" dirty="0">
+                        <a:latin typeface="Calibri" charset="0"/>
+                        <a:ea typeface="Calibri" charset="0"/>
+                        <a:cs typeface="Calibri" charset="0"/>
+                      </a:endParaRPr>
+                    </a:p>
+                  </a:txBody>
+                  <a:tcPr marL="91440" marR="91440" marT="45720" marB="45720">
+                    <a:lnL w="2540" cap="flat" cmpd="sng" algn="ctr">
+                      <a:solidFill>
+                        <a:srgbClr val="EEEEEE"/>
+                      </a:solidFill>
+                      <a:prstDash val="solid"/>
+                      <a:round/>
+                      <a:headEnd type="none" w="med" len="med"/>
+                      <a:tailEnd type="none" w="med" len="med"/>
+                    </a:lnL>
+                    <a:lnR w="2540" cap="flat" cmpd="sng" algn="ctr">
+                      <a:solidFill>
+                        <a:srgbClr val="EEEEEE"/>
+                      </a:solidFill>
+                      <a:prstDash val="solid"/>
+                      <a:round/>
+                      <a:headEnd type="none" w="med" len="med"/>
+                      <a:tailEnd type="none" w="med" len="med"/>
+                    </a:lnR>
+                    <a:lnT w="2540" cap="flat" cmpd="sng" algn="ctr">
+                      <a:solidFill>
+                        <a:srgbClr val="EEEEEE"/>
+                      </a:solidFill>
+                      <a:prstDash val="solid"/>
+                      <a:round/>
+                      <a:headEnd type="none" w="med" len="med"/>
+                      <a:tailEnd type="none" w="med" len="med"/>
+                    </a:lnT>
+                    <a:lnB w="2540" cap="flat" cmpd="sng" algn="ctr">
+                      <a:solidFill>
+                        <a:srgbClr val="EEEEEE"/>
+                      </a:solidFill>
+                      <a:prstDash val="solid"/>
+                      <a:round/>
+                      <a:headEnd type="none" w="med" len="med"/>
+                      <a:tailEnd type="none" w="med" len="med"/>
+                    </a:lnB>
+                  </a:tcPr>
+                </a:tc>
+                <a:tc>
+                  <a:txBody>
+                    <a:bodyPr/>
+                    <a:lstStyle/>
+                    <a:p>
+                      <a:pPr algn="ctr" indent="0" marL="0">
+                        <a:buNone/>
+                      </a:pPr>
                       <a:r>
                         <a:rPr lang="en-US" sz="500" dirty="0">
                           <a:solidFill>
@@ -9055,7 +10059,7 @@
                           <a:ea typeface="Calibri" pitchFamily="34" charset="-122"/>
                           <a:cs typeface="Calibri" pitchFamily="34" charset="-120"/>
                         </a:rPr>
-                        <a:t>0.35%</a:t>
+                        <a:t>0.34%</a:t>
                       </a:r>
                       <a:endParaRPr lang="en-US" sz="500" dirty="0">
                         <a:latin typeface="Calibri" charset="0"/>
@@ -9120,7 +10124,7 @@
                           <a:ea typeface="Calibri" pitchFamily="34" charset="-122"/>
                           <a:cs typeface="Calibri" pitchFamily="34" charset="-120"/>
                         </a:rPr>
-                        <a:t>0.46%</a:t>
+                        <a:t>0.43%</a:t>
                       </a:r>
                       <a:endParaRPr lang="en-US" sz="500" dirty="0">
                         <a:latin typeface="Calibri" charset="0"/>
@@ -9185,7 +10189,7 @@
                           <a:ea typeface="Calibri" pitchFamily="34" charset="-122"/>
                           <a:cs typeface="Calibri" pitchFamily="34" charset="-120"/>
                         </a:rPr>
-                        <a:t>0.47%</a:t>
+                        <a:t>0.48%</a:t>
                       </a:r>
                       <a:endParaRPr lang="en-US" sz="500" dirty="0">
                         <a:latin typeface="Calibri" charset="0"/>
@@ -9250,7 +10254,7 @@
                           <a:ea typeface="Calibri" pitchFamily="34" charset="-122"/>
                           <a:cs typeface="Calibri" pitchFamily="34" charset="-120"/>
                         </a:rPr>
-                        <a:t>0.58%</a:t>
+                        <a:t>0.71%</a:t>
                       </a:r>
                       <a:endParaRPr lang="en-US" sz="500" dirty="0">
                         <a:latin typeface="Calibri" charset="0"/>
@@ -9315,7 +10319,7 @@
                           <a:ea typeface="Calibri" pitchFamily="34" charset="-122"/>
                           <a:cs typeface="Calibri" pitchFamily="34" charset="-120"/>
                         </a:rPr>
-                        <a:t>0.67%</a:t>
+                        <a:t>0.74%</a:t>
                       </a:r>
                       <a:endParaRPr lang="en-US" sz="500" dirty="0">
                         <a:latin typeface="Calibri" charset="0"/>
@@ -9380,7 +10384,7 @@
                           <a:ea typeface="Calibri" pitchFamily="34" charset="-122"/>
                           <a:cs typeface="Calibri" pitchFamily="34" charset="-120"/>
                         </a:rPr>
-                        <a:t>0.73%</a:t>
+                        <a:t>0.76%</a:t>
                       </a:r>
                       <a:endParaRPr lang="en-US" sz="500" dirty="0">
                         <a:latin typeface="Calibri" charset="0"/>
@@ -9445,7 +10449,7 @@
                           <a:ea typeface="Calibri" pitchFamily="34" charset="-122"/>
                           <a:cs typeface="Calibri" pitchFamily="34" charset="-120"/>
                         </a:rPr>
-                        <a:t>0.79%</a:t>
+                        <a:t>0.90%</a:t>
                       </a:r>
                       <a:endParaRPr lang="en-US" sz="500" dirty="0">
                         <a:latin typeface="Calibri" charset="0"/>
@@ -9510,7 +10514,7 @@
                           <a:ea typeface="Calibri" pitchFamily="34" charset="-122"/>
                           <a:cs typeface="Calibri" pitchFamily="34" charset="-120"/>
                         </a:rPr>
-                        <a:t>0.81%</a:t>
+                        <a:t>0.88%</a:t>
                       </a:r>
                       <a:endParaRPr lang="en-US" sz="500" dirty="0">
                         <a:latin typeface="Calibri" charset="0"/>
@@ -9575,7 +10579,7 @@
                           <a:ea typeface="Calibri" pitchFamily="34" charset="-122"/>
                           <a:cs typeface="Calibri" pitchFamily="34" charset="-120"/>
                         </a:rPr>
-                        <a:t>0.88%</a:t>
+                        <a:t>0.86%</a:t>
                       </a:r>
                       <a:endParaRPr lang="en-US" sz="500" dirty="0">
                         <a:latin typeface="Calibri" charset="0"/>
@@ -9640,7 +10644,7 @@
                           <a:ea typeface="Calibri" pitchFamily="34" charset="-122"/>
                           <a:cs typeface="Calibri" pitchFamily="34" charset="-120"/>
                         </a:rPr>
-                        <a:t>0.92%</a:t>
+                        <a:t>1.04%</a:t>
                       </a:r>
                       <a:endParaRPr lang="en-US" sz="500" dirty="0">
                         <a:latin typeface="Calibri" charset="0"/>
@@ -9762,7 +10766,7 @@
                         <a:buNone/>
                       </a:pPr>
                       <a:r>
-                        <a:rPr lang="en-US" sz="500" dirty="0">
+                        <a:rPr lang="en-US" sz="500" b="1" dirty="0">
                           <a:solidFill>
                             <a:srgbClr val="777777"/>
                           </a:solidFill>
@@ -9770,72 +10774,7 @@
                           <a:ea typeface="Calibri" pitchFamily="34" charset="-122"/>
                           <a:cs typeface="Calibri" pitchFamily="34" charset="-120"/>
                         </a:rPr>
-                        <a:t>0.94%</a:t>
-                      </a:r>
-                      <a:endParaRPr lang="en-US" sz="500" dirty="0">
-                        <a:latin typeface="Calibri" charset="0"/>
-                        <a:ea typeface="Calibri" charset="0"/>
-                        <a:cs typeface="Calibri" charset="0"/>
-                      </a:endParaRPr>
-                    </a:p>
-                  </a:txBody>
-                  <a:tcPr marL="91440" marR="91440" marT="45720" marB="45720">
-                    <a:lnL w="2540" cap="flat" cmpd="sng" algn="ctr">
-                      <a:solidFill>
-                        <a:srgbClr val="EEEEEE"/>
-                      </a:solidFill>
-                      <a:prstDash val="solid"/>
-                      <a:round/>
-                      <a:headEnd type="none" w="med" len="med"/>
-                      <a:tailEnd type="none" w="med" len="med"/>
-                    </a:lnL>
-                    <a:lnR w="2540" cap="flat" cmpd="sng" algn="ctr">
-                      <a:solidFill>
-                        <a:srgbClr val="EEEEEE"/>
-                      </a:solidFill>
-                      <a:prstDash val="solid"/>
-                      <a:round/>
-                      <a:headEnd type="none" w="med" len="med"/>
-                      <a:tailEnd type="none" w="med" len="med"/>
-                    </a:lnR>
-                    <a:lnT w="2540" cap="flat" cmpd="sng" algn="ctr">
-                      <a:solidFill>
-                        <a:srgbClr val="EEEEEE"/>
-                      </a:solidFill>
-                      <a:prstDash val="solid"/>
-                      <a:round/>
-                      <a:headEnd type="none" w="med" len="med"/>
-                      <a:tailEnd type="none" w="med" len="med"/>
-                    </a:lnT>
-                    <a:lnB w="2540" cap="flat" cmpd="sng" algn="ctr">
-                      <a:solidFill>
-                        <a:srgbClr val="EEEEEE"/>
-                      </a:solidFill>
-                      <a:prstDash val="solid"/>
-                      <a:round/>
-                      <a:headEnd type="none" w="med" len="med"/>
-                      <a:tailEnd type="none" w="med" len="med"/>
-                    </a:lnB>
-                  </a:tcPr>
-                </a:tc>
-                <a:tc>
-                  <a:txBody>
-                    <a:bodyPr/>
-                    <a:lstStyle/>
-                    <a:p>
-                      <a:pPr algn="ctr" indent="0" marL="0">
-                        <a:buNone/>
-                      </a:pPr>
-                      <a:r>
-                        <a:rPr lang="en-US" sz="500" b="1" dirty="0">
-                          <a:solidFill>
-                            <a:srgbClr val="777777"/>
-                          </a:solidFill>
-                          <a:latin typeface="Calibri" pitchFamily="34" charset="0"/>
-                          <a:ea typeface="Calibri" pitchFamily="34" charset="-122"/>
-                          <a:cs typeface="Calibri" pitchFamily="34" charset="-120"/>
-                        </a:rPr>
-                        <a:t>8.88%</a:t>
+                        <a:t>8.97%</a:t>
                       </a:r>
                       <a:endParaRPr lang="en-US" sz="500" dirty="0">
                         <a:latin typeface="Calibri" charset="0"/>
@@ -10012,6 +10951,60 @@
                       <a:pPr algn="ctr" indent="0" marL="0">
                         <a:buNone/>
                       </a:pPr>
+                      <a:endParaRPr lang="en-US" sz="500" dirty="0">
+                        <a:latin typeface="Calibri" charset="0"/>
+                        <a:ea typeface="Calibri" charset="0"/>
+                        <a:cs typeface="Calibri" charset="0"/>
+                      </a:endParaRPr>
+                    </a:p>
+                  </a:txBody>
+                  <a:tcPr marL="91440" marR="91440" marT="45720" marB="45720">
+                    <a:lnL w="2540" cap="flat" cmpd="sng" algn="ctr">
+                      <a:solidFill>
+                        <a:srgbClr val="EEEEEE"/>
+                      </a:solidFill>
+                      <a:prstDash val="solid"/>
+                      <a:round/>
+                      <a:headEnd type="none" w="med" len="med"/>
+                      <a:tailEnd type="none" w="med" len="med"/>
+                    </a:lnL>
+                    <a:lnR w="2540" cap="flat" cmpd="sng" algn="ctr">
+                      <a:solidFill>
+                        <a:srgbClr val="EEEEEE"/>
+                      </a:solidFill>
+                      <a:prstDash val="solid"/>
+                      <a:round/>
+                      <a:headEnd type="none" w="med" len="med"/>
+                      <a:tailEnd type="none" w="med" len="med"/>
+                    </a:lnR>
+                    <a:lnT w="2540" cap="flat" cmpd="sng" algn="ctr">
+                      <a:solidFill>
+                        <a:srgbClr val="EEEEEE"/>
+                      </a:solidFill>
+                      <a:prstDash val="solid"/>
+                      <a:round/>
+                      <a:headEnd type="none" w="med" len="med"/>
+                      <a:tailEnd type="none" w="med" len="med"/>
+                    </a:lnT>
+                    <a:lnB w="2540" cap="flat" cmpd="sng" algn="ctr">
+                      <a:solidFill>
+                        <a:srgbClr val="EEEEEE"/>
+                      </a:solidFill>
+                      <a:prstDash val="solid"/>
+                      <a:round/>
+                      <a:headEnd type="none" w="med" len="med"/>
+                      <a:tailEnd type="none" w="med" len="med"/>
+                    </a:lnB>
+                  </a:tcPr>
+                </a:tc>
+                <a:tc>
+                  <a:txBody>
+                    <a:bodyPr/>
+                    <a:lstStyle/>
+                    <a:p>
+                      <a:pPr algn="ctr" indent="0" marL="0">
+                        <a:buNone/>
+                      </a:pPr>
                       <a:r>
                         <a:rPr lang="en-US" sz="500" dirty="0">
                           <a:solidFill>
@@ -10021,7 +11014,7 @@
                           <a:ea typeface="Calibri" pitchFamily="34" charset="-122"/>
                           <a:cs typeface="Calibri" pitchFamily="34" charset="-120"/>
                         </a:rPr>
-                        <a:t>0.00%</a:t>
+                        <a:t>0.26%</a:t>
                       </a:r>
                       <a:endParaRPr lang="en-US" sz="500" dirty="0">
                         <a:latin typeface="Calibri" charset="0"/>
@@ -10086,7 +11079,7 @@
                           <a:ea typeface="Calibri" pitchFamily="34" charset="-122"/>
                           <a:cs typeface="Calibri" pitchFamily="34" charset="-120"/>
                         </a:rPr>
-                        <a:t>0.26%</a:t>
+                        <a:t>0.33%</a:t>
                       </a:r>
                       <a:endParaRPr lang="en-US" sz="500" dirty="0">
                         <a:latin typeface="Calibri" charset="0"/>
@@ -10151,7 +11144,7 @@
                           <a:ea typeface="Calibri" pitchFamily="34" charset="-122"/>
                           <a:cs typeface="Calibri" pitchFamily="34" charset="-120"/>
                         </a:rPr>
-                        <a:t>0.33%</a:t>
+                        <a:t>0.38%</a:t>
                       </a:r>
                       <a:endParaRPr lang="en-US" sz="500" dirty="0">
                         <a:latin typeface="Calibri" charset="0"/>
@@ -10216,7 +11209,7 @@
                           <a:ea typeface="Calibri" pitchFamily="34" charset="-122"/>
                           <a:cs typeface="Calibri" pitchFamily="34" charset="-120"/>
                         </a:rPr>
-                        <a:t>0.38%</a:t>
+                        <a:t>0.55%</a:t>
                       </a:r>
                       <a:endParaRPr lang="en-US" sz="500" dirty="0">
                         <a:latin typeface="Calibri" charset="0"/>
@@ -10281,7 +11274,7 @@
                           <a:ea typeface="Calibri" pitchFamily="34" charset="-122"/>
                           <a:cs typeface="Calibri" pitchFamily="34" charset="-120"/>
                         </a:rPr>
-                        <a:t>0.55%</a:t>
+                        <a:t>0.59%</a:t>
                       </a:r>
                       <a:endParaRPr lang="en-US" sz="500" dirty="0">
                         <a:latin typeface="Calibri" charset="0"/>
@@ -10346,7 +11339,7 @@
                           <a:ea typeface="Calibri" pitchFamily="34" charset="-122"/>
                           <a:cs typeface="Calibri" pitchFamily="34" charset="-120"/>
                         </a:rPr>
-                        <a:t>0.59%</a:t>
+                        <a:t>0.65%</a:t>
                       </a:r>
                       <a:endParaRPr lang="en-US" sz="500" dirty="0">
                         <a:latin typeface="Calibri" charset="0"/>
@@ -10411,7 +11404,7 @@
                           <a:ea typeface="Calibri" pitchFamily="34" charset="-122"/>
                           <a:cs typeface="Calibri" pitchFamily="34" charset="-120"/>
                         </a:rPr>
-                        <a:t>0.65%</a:t>
+                        <a:t>0.70%</a:t>
                       </a:r>
                       <a:endParaRPr lang="en-US" sz="500" dirty="0">
                         <a:latin typeface="Calibri" charset="0"/>
@@ -10476,7 +11469,7 @@
                           <a:ea typeface="Calibri" pitchFamily="34" charset="-122"/>
                           <a:cs typeface="Calibri" pitchFamily="34" charset="-120"/>
                         </a:rPr>
-                        <a:t>0.70%</a:t>
+                        <a:t>0.73%</a:t>
                       </a:r>
                       <a:endParaRPr lang="en-US" sz="500" dirty="0">
                         <a:latin typeface="Calibri" charset="0"/>
@@ -10541,7 +11534,7 @@
                           <a:ea typeface="Calibri" pitchFamily="34" charset="-122"/>
                           <a:cs typeface="Calibri" pitchFamily="34" charset="-120"/>
                         </a:rPr>
-                        <a:t>0.73%</a:t>
+                        <a:t>0.72%</a:t>
                       </a:r>
                       <a:endParaRPr lang="en-US" sz="500" dirty="0">
                         <a:latin typeface="Calibri" charset="0"/>
@@ -10606,7 +11599,7 @@
                           <a:ea typeface="Calibri" pitchFamily="34" charset="-122"/>
                           <a:cs typeface="Calibri" pitchFamily="34" charset="-120"/>
                         </a:rPr>
-                        <a:t>0.72%</a:t>
+                        <a:t>0.87%</a:t>
                       </a:r>
                       <a:endParaRPr lang="en-US" sz="500" dirty="0">
                         <a:latin typeface="Calibri" charset="0"/>
@@ -10671,64 +11664,64 @@
                           <a:ea typeface="Calibri" pitchFamily="34" charset="-122"/>
                           <a:cs typeface="Calibri" pitchFamily="34" charset="-120"/>
                         </a:rPr>
-                        <a:t>0.87%</a:t>
-                      </a:r>
-                      <a:endParaRPr lang="en-US" sz="500" dirty="0">
-                        <a:latin typeface="Calibri" charset="0"/>
-                        <a:ea typeface="Calibri" charset="0"/>
-                        <a:cs typeface="Calibri" charset="0"/>
-                      </a:endParaRPr>
-                    </a:p>
-                  </a:txBody>
-                  <a:tcPr marL="91440" marR="91440" marT="45720" marB="45720">
-                    <a:lnL w="2540" cap="flat" cmpd="sng" algn="ctr">
-                      <a:solidFill>
-                        <a:srgbClr val="EEEEEE"/>
-                      </a:solidFill>
-                      <a:prstDash val="solid"/>
-                      <a:round/>
-                      <a:headEnd type="none" w="med" len="med"/>
-                      <a:tailEnd type="none" w="med" len="med"/>
-                    </a:lnL>
-                    <a:lnR w="2540" cap="flat" cmpd="sng" algn="ctr">
-                      <a:solidFill>
-                        <a:srgbClr val="EEEEEE"/>
-                      </a:solidFill>
-                      <a:prstDash val="solid"/>
-                      <a:round/>
-                      <a:headEnd type="none" w="med" len="med"/>
-                      <a:tailEnd type="none" w="med" len="med"/>
-                    </a:lnR>
-                    <a:lnT w="2540" cap="flat" cmpd="sng" algn="ctr">
-                      <a:solidFill>
-                        <a:srgbClr val="EEEEEE"/>
-                      </a:solidFill>
-                      <a:prstDash val="solid"/>
-                      <a:round/>
-                      <a:headEnd type="none" w="med" len="med"/>
-                      <a:tailEnd type="none" w="med" len="med"/>
-                    </a:lnT>
-                    <a:lnB w="2540" cap="flat" cmpd="sng" algn="ctr">
-                      <a:solidFill>
-                        <a:srgbClr val="EEEEEE"/>
-                      </a:solidFill>
-                      <a:prstDash val="solid"/>
-                      <a:round/>
-                      <a:headEnd type="none" w="med" len="med"/>
-                      <a:tailEnd type="none" w="med" len="med"/>
-                    </a:lnB>
-                  </a:tcPr>
-                </a:tc>
-                <a:tc>
-                  <a:txBody>
-                    <a:bodyPr/>
-                    <a:lstStyle/>
-                    <a:p>
-                      <a:pPr algn="ctr" indent="0" marL="0">
-                        <a:buNone/>
-                      </a:pPr>
-                      <a:r>
-                        <a:rPr lang="en-US" sz="500" dirty="0">
+                        <a:t>0.79%</a:t>
+                      </a:r>
+                      <a:endParaRPr lang="en-US" sz="500" dirty="0">
+                        <a:latin typeface="Calibri" charset="0"/>
+                        <a:ea typeface="Calibri" charset="0"/>
+                        <a:cs typeface="Calibri" charset="0"/>
+                      </a:endParaRPr>
+                    </a:p>
+                  </a:txBody>
+                  <a:tcPr marL="91440" marR="91440" marT="45720" marB="45720">
+                    <a:lnL w="2540" cap="flat" cmpd="sng" algn="ctr">
+                      <a:solidFill>
+                        <a:srgbClr val="EEEEEE"/>
+                      </a:solidFill>
+                      <a:prstDash val="solid"/>
+                      <a:round/>
+                      <a:headEnd type="none" w="med" len="med"/>
+                      <a:tailEnd type="none" w="med" len="med"/>
+                    </a:lnL>
+                    <a:lnR w="2540" cap="flat" cmpd="sng" algn="ctr">
+                      <a:solidFill>
+                        <a:srgbClr val="EEEEEE"/>
+                      </a:solidFill>
+                      <a:prstDash val="solid"/>
+                      <a:round/>
+                      <a:headEnd type="none" w="med" len="med"/>
+                      <a:tailEnd type="none" w="med" len="med"/>
+                    </a:lnR>
+                    <a:lnT w="2540" cap="flat" cmpd="sng" algn="ctr">
+                      <a:solidFill>
+                        <a:srgbClr val="EEEEEE"/>
+                      </a:solidFill>
+                      <a:prstDash val="solid"/>
+                      <a:round/>
+                      <a:headEnd type="none" w="med" len="med"/>
+                      <a:tailEnd type="none" w="med" len="med"/>
+                    </a:lnT>
+                    <a:lnB w="2540" cap="flat" cmpd="sng" algn="ctr">
+                      <a:solidFill>
+                        <a:srgbClr val="EEEEEE"/>
+                      </a:solidFill>
+                      <a:prstDash val="solid"/>
+                      <a:round/>
+                      <a:headEnd type="none" w="med" len="med"/>
+                      <a:tailEnd type="none" w="med" len="med"/>
+                    </a:lnB>
+                  </a:tcPr>
+                </a:tc>
+                <a:tc>
+                  <a:txBody>
+                    <a:bodyPr/>
+                    <a:lstStyle/>
+                    <a:p>
+                      <a:pPr algn="ctr" indent="0" marL="0">
+                        <a:buNone/>
+                      </a:pPr>
+                      <a:r>
+                        <a:rPr lang="en-US" sz="500" b="1" dirty="0">
                           <a:solidFill>
                             <a:srgbClr val="999999"/>
                           </a:solidFill>
@@ -10736,72 +11729,7 @@
                           <a:ea typeface="Calibri" pitchFamily="34" charset="-122"/>
                           <a:cs typeface="Calibri" pitchFamily="34" charset="-120"/>
                         </a:rPr>
-                        <a:t>8.43%</a:t>
-                      </a:r>
-                      <a:endParaRPr lang="en-US" sz="500" dirty="0">
-                        <a:latin typeface="Calibri" charset="0"/>
-                        <a:ea typeface="Calibri" charset="0"/>
-                        <a:cs typeface="Calibri" charset="0"/>
-                      </a:endParaRPr>
-                    </a:p>
-                  </a:txBody>
-                  <a:tcPr marL="91440" marR="91440" marT="45720" marB="45720">
-                    <a:lnL w="2540" cap="flat" cmpd="sng" algn="ctr">
-                      <a:solidFill>
-                        <a:srgbClr val="EEEEEE"/>
-                      </a:solidFill>
-                      <a:prstDash val="solid"/>
-                      <a:round/>
-                      <a:headEnd type="none" w="med" len="med"/>
-                      <a:tailEnd type="none" w="med" len="med"/>
-                    </a:lnL>
-                    <a:lnR w="2540" cap="flat" cmpd="sng" algn="ctr">
-                      <a:solidFill>
-                        <a:srgbClr val="EEEEEE"/>
-                      </a:solidFill>
-                      <a:prstDash val="solid"/>
-                      <a:round/>
-                      <a:headEnd type="none" w="med" len="med"/>
-                      <a:tailEnd type="none" w="med" len="med"/>
-                    </a:lnR>
-                    <a:lnT w="2540" cap="flat" cmpd="sng" algn="ctr">
-                      <a:solidFill>
-                        <a:srgbClr val="EEEEEE"/>
-                      </a:solidFill>
-                      <a:prstDash val="solid"/>
-                      <a:round/>
-                      <a:headEnd type="none" w="med" len="med"/>
-                      <a:tailEnd type="none" w="med" len="med"/>
-                    </a:lnT>
-                    <a:lnB w="2540" cap="flat" cmpd="sng" algn="ctr">
-                      <a:solidFill>
-                        <a:srgbClr val="EEEEEE"/>
-                      </a:solidFill>
-                      <a:prstDash val="solid"/>
-                      <a:round/>
-                      <a:headEnd type="none" w="med" len="med"/>
-                      <a:tailEnd type="none" w="med" len="med"/>
-                    </a:lnB>
-                  </a:tcPr>
-                </a:tc>
-                <a:tc>
-                  <a:txBody>
-                    <a:bodyPr/>
-                    <a:lstStyle/>
-                    <a:p>
-                      <a:pPr algn="ctr" indent="0" marL="0">
-                        <a:buNone/>
-                      </a:pPr>
-                      <a:r>
-                        <a:rPr lang="en-US" sz="500" b="1" dirty="0">
-                          <a:solidFill>
-                            <a:srgbClr val="999999"/>
-                          </a:solidFill>
-                          <a:latin typeface="Calibri" pitchFamily="34" charset="0"/>
-                          <a:ea typeface="Calibri" pitchFamily="34" charset="-122"/>
-                          <a:cs typeface="Calibri" pitchFamily="34" charset="-120"/>
-                        </a:rPr>
-                        <a:t>14.88%</a:t>
+                        <a:t>7.27%</a:t>
                       </a:r>
                       <a:endParaRPr lang="en-US" sz="500" dirty="0">
                         <a:latin typeface="Calibri" charset="0"/>
@@ -10914,6 +11842,125 @@
                         <a:buNone/>
                       </a:pPr>
                       <a:r>
+                        <a:rPr lang="en-US" sz="400" dirty="0">
+                          <a:solidFill>
+                            <a:srgbClr val="000000"/>
+                          </a:solidFill>
+                          <a:latin typeface="Calibri" pitchFamily="34" charset="0"/>
+                          <a:ea typeface="Calibri" pitchFamily="34" charset="-122"/>
+                          <a:cs typeface="Calibri" pitchFamily="34" charset="-120"/>
+                        </a:rPr>
+                        <a:t>FIP LIQUIDEZ EFECTIVO</a:t>
+                      </a:r>
+                      <a:endParaRPr lang="en-US" sz="400" dirty="0">
+                        <a:latin typeface="Calibri" charset="0"/>
+                        <a:ea typeface="Calibri" charset="0"/>
+                        <a:cs typeface="Calibri" charset="0"/>
+                      </a:endParaRPr>
+                    </a:p>
+                  </a:txBody>
+                  <a:tcPr marL="91440" marR="91440" marT="45720" marB="45720">
+                    <a:lnL w="2540" cap="flat" cmpd="sng" algn="ctr">
+                      <a:solidFill>
+                        <a:srgbClr val="EEEEEE"/>
+                      </a:solidFill>
+                      <a:prstDash val="solid"/>
+                      <a:round/>
+                      <a:headEnd type="none" w="med" len="med"/>
+                      <a:tailEnd type="none" w="med" len="med"/>
+                    </a:lnL>
+                    <a:lnR w="2540" cap="flat" cmpd="sng" algn="ctr">
+                      <a:solidFill>
+                        <a:srgbClr val="EEEEEE"/>
+                      </a:solidFill>
+                      <a:prstDash val="solid"/>
+                      <a:round/>
+                      <a:headEnd type="none" w="med" len="med"/>
+                      <a:tailEnd type="none" w="med" len="med"/>
+                    </a:lnR>
+                    <a:lnT w="2540" cap="flat" cmpd="sng" algn="ctr">
+                      <a:solidFill>
+                        <a:srgbClr val="EEEEEE"/>
+                      </a:solidFill>
+                      <a:prstDash val="solid"/>
+                      <a:round/>
+                      <a:headEnd type="none" w="med" len="med"/>
+                      <a:tailEnd type="none" w="med" len="med"/>
+                    </a:lnT>
+                    <a:lnB w="2540" cap="flat" cmpd="sng" algn="ctr">
+                      <a:solidFill>
+                        <a:srgbClr val="EEEEEE"/>
+                      </a:solidFill>
+                      <a:prstDash val="solid"/>
+                      <a:round/>
+                      <a:headEnd type="none" w="med" len="med"/>
+                      <a:tailEnd type="none" w="med" len="med"/>
+                    </a:lnB>
+                  </a:tcPr>
+                </a:tc>
+                <a:tc>
+                  <a:txBody>
+                    <a:bodyPr/>
+                    <a:lstStyle/>
+                    <a:p>
+                      <a:pPr algn="ctr" indent="0" marL="0">
+                        <a:buNone/>
+                      </a:pPr>
+                      <a:endParaRPr lang="en-US" sz="500" dirty="0">
+                        <a:latin typeface="Calibri" charset="0"/>
+                        <a:ea typeface="Calibri" charset="0"/>
+                        <a:cs typeface="Calibri" charset="0"/>
+                      </a:endParaRPr>
+                    </a:p>
+                  </a:txBody>
+                  <a:tcPr marL="91440" marR="91440" marT="45720" marB="45720">
+                    <a:lnL w="2540" cap="flat" cmpd="sng" algn="ctr">
+                      <a:solidFill>
+                        <a:srgbClr val="EEEEEE"/>
+                      </a:solidFill>
+                      <a:prstDash val="solid"/>
+                      <a:round/>
+                      <a:headEnd type="none" w="med" len="med"/>
+                      <a:tailEnd type="none" w="med" len="med"/>
+                    </a:lnL>
+                    <a:lnR w="2540" cap="flat" cmpd="sng" algn="ctr">
+                      <a:solidFill>
+                        <a:srgbClr val="EEEEEE"/>
+                      </a:solidFill>
+                      <a:prstDash val="solid"/>
+                      <a:round/>
+                      <a:headEnd type="none" w="med" len="med"/>
+                      <a:tailEnd type="none" w="med" len="med"/>
+                    </a:lnR>
+                    <a:lnT w="2540" cap="flat" cmpd="sng" algn="ctr">
+                      <a:solidFill>
+                        <a:srgbClr val="EEEEEE"/>
+                      </a:solidFill>
+                      <a:prstDash val="solid"/>
+                      <a:round/>
+                      <a:headEnd type="none" w="med" len="med"/>
+                      <a:tailEnd type="none" w="med" len="med"/>
+                    </a:lnT>
+                    <a:lnB w="2540" cap="flat" cmpd="sng" algn="ctr">
+                      <a:solidFill>
+                        <a:srgbClr val="EEEEEE"/>
+                      </a:solidFill>
+                      <a:prstDash val="solid"/>
+                      <a:round/>
+                      <a:headEnd type="none" w="med" len="med"/>
+                      <a:tailEnd type="none" w="med" len="med"/>
+                    </a:lnB>
+                  </a:tcPr>
+                </a:tc>
+                <a:tc>
+                  <a:txBody>
+                    <a:bodyPr/>
+                    <a:lstStyle/>
+                    <a:p>
+                      <a:pPr algn="ctr" indent="0" marL="0">
+                        <a:buNone/>
+                      </a:pPr>
+                      <a:r>
                         <a:rPr lang="en-US" sz="500" dirty="0">
                           <a:solidFill>
                             <a:srgbClr val="000000"/>
@@ -10922,62 +11969,8 @@
                           <a:ea typeface="Calibri" pitchFamily="34" charset="-122"/>
                           <a:cs typeface="Calibri" pitchFamily="34" charset="-120"/>
                         </a:rPr>
-                        <a:t>FIP LIQUIDEZ EFECTIVO</a:t>
-                      </a:r>
-                      <a:endParaRPr lang="en-US" sz="500" dirty="0">
-                        <a:latin typeface="Calibri" charset="0"/>
-                        <a:ea typeface="Calibri" charset="0"/>
-                        <a:cs typeface="Calibri" charset="0"/>
-                      </a:endParaRPr>
-                    </a:p>
-                  </a:txBody>
-                  <a:tcPr marL="91440" marR="91440" marT="45720" marB="45720">
-                    <a:lnL w="2540" cap="flat" cmpd="sng" algn="ctr">
-                      <a:solidFill>
-                        <a:srgbClr val="EEEEEE"/>
-                      </a:solidFill>
-                      <a:prstDash val="solid"/>
-                      <a:round/>
-                      <a:headEnd type="none" w="med" len="med"/>
-                      <a:tailEnd type="none" w="med" len="med"/>
-                    </a:lnL>
-                    <a:lnR w="2540" cap="flat" cmpd="sng" algn="ctr">
-                      <a:solidFill>
-                        <a:srgbClr val="EEEEEE"/>
-                      </a:solidFill>
-                      <a:prstDash val="solid"/>
-                      <a:round/>
-                      <a:headEnd type="none" w="med" len="med"/>
-                      <a:tailEnd type="none" w="med" len="med"/>
-                    </a:lnR>
-                    <a:lnT w="2540" cap="flat" cmpd="sng" algn="ctr">
-                      <a:solidFill>
-                        <a:srgbClr val="EEEEEE"/>
-                      </a:solidFill>
-                      <a:prstDash val="solid"/>
-                      <a:round/>
-                      <a:headEnd type="none" w="med" len="med"/>
-                      <a:tailEnd type="none" w="med" len="med"/>
-                    </a:lnT>
-                    <a:lnB w="2540" cap="flat" cmpd="sng" algn="ctr">
-                      <a:solidFill>
-                        <a:srgbClr val="EEEEEE"/>
-                      </a:solidFill>
-                      <a:prstDash val="solid"/>
-                      <a:round/>
-                      <a:headEnd type="none" w="med" len="med"/>
-                      <a:tailEnd type="none" w="med" len="med"/>
-                    </a:lnB>
-                  </a:tcPr>
-                </a:tc>
-                <a:tc>
-                  <a:txBody>
-                    <a:bodyPr/>
-                    <a:lstStyle/>
-                    <a:p>
-                      <a:pPr algn="ctr" indent="0" marL="0">
-                        <a:buNone/>
-                      </a:pPr>
+                        <a:t>0.37%</a:t>
+                      </a:r>
                       <a:endParaRPr lang="en-US" sz="500" dirty="0">
                         <a:latin typeface="Calibri" charset="0"/>
                         <a:ea typeface="Calibri" charset="0"/>
@@ -11041,7 +12034,7 @@
                           <a:ea typeface="Calibri" pitchFamily="34" charset="-122"/>
                           <a:cs typeface="Calibri" pitchFamily="34" charset="-120"/>
                         </a:rPr>
-                        <a:t>0.37%</a:t>
+                        <a:t>0.43%</a:t>
                       </a:r>
                       <a:endParaRPr lang="en-US" sz="500" dirty="0">
                         <a:latin typeface="Calibri" charset="0"/>
@@ -11106,7 +12099,7 @@
                           <a:ea typeface="Calibri" pitchFamily="34" charset="-122"/>
                           <a:cs typeface="Calibri" pitchFamily="34" charset="-120"/>
                         </a:rPr>
-                        <a:t>0.43%</a:t>
+                        <a:t>0.48%</a:t>
                       </a:r>
                       <a:endParaRPr lang="en-US" sz="500" dirty="0">
                         <a:latin typeface="Calibri" charset="0"/>
@@ -11171,7 +12164,7 @@
                           <a:ea typeface="Calibri" pitchFamily="34" charset="-122"/>
                           <a:cs typeface="Calibri" pitchFamily="34" charset="-120"/>
                         </a:rPr>
-                        <a:t>0.48%</a:t>
+                        <a:t>0.84%</a:t>
                       </a:r>
                       <a:endParaRPr lang="en-US" sz="500" dirty="0">
                         <a:latin typeface="Calibri" charset="0"/>
@@ -11236,7 +12229,7 @@
                           <a:ea typeface="Calibri" pitchFamily="34" charset="-122"/>
                           <a:cs typeface="Calibri" pitchFamily="34" charset="-120"/>
                         </a:rPr>
-                        <a:t>0.84%</a:t>
+                        <a:t>0.98%</a:t>
                       </a:r>
                       <a:endParaRPr lang="en-US" sz="500" dirty="0">
                         <a:latin typeface="Calibri" charset="0"/>
@@ -11301,7 +12294,7 @@
                           <a:ea typeface="Calibri" pitchFamily="34" charset="-122"/>
                           <a:cs typeface="Calibri" pitchFamily="34" charset="-120"/>
                         </a:rPr>
-                        <a:t>0.98%</a:t>
+                        <a:t>0.68%</a:t>
                       </a:r>
                       <a:endParaRPr lang="en-US" sz="500" dirty="0">
                         <a:latin typeface="Calibri" charset="0"/>
@@ -11366,7 +12359,7 @@
                           <a:ea typeface="Calibri" pitchFamily="34" charset="-122"/>
                           <a:cs typeface="Calibri" pitchFamily="34" charset="-120"/>
                         </a:rPr>
-                        <a:t>0.68%</a:t>
+                        <a:t>0.96%</a:t>
                       </a:r>
                       <a:endParaRPr lang="en-US" sz="500" dirty="0">
                         <a:latin typeface="Calibri" charset="0"/>
@@ -11431,7 +12424,7 @@
                           <a:ea typeface="Calibri" pitchFamily="34" charset="-122"/>
                           <a:cs typeface="Calibri" pitchFamily="34" charset="-120"/>
                         </a:rPr>
-                        <a:t>0.96%</a:t>
+                        <a:t>0.93%</a:t>
                       </a:r>
                       <a:endParaRPr lang="en-US" sz="500" dirty="0">
                         <a:latin typeface="Calibri" charset="0"/>
@@ -11496,7 +12489,7 @@
                           <a:ea typeface="Calibri" pitchFamily="34" charset="-122"/>
                           <a:cs typeface="Calibri" pitchFamily="34" charset="-120"/>
                         </a:rPr>
-                        <a:t>0.93%</a:t>
+                        <a:t>0.92%</a:t>
                       </a:r>
                       <a:endParaRPr lang="en-US" sz="500" dirty="0">
                         <a:latin typeface="Calibri" charset="0"/>
@@ -11561,7 +12554,7 @@
                           <a:ea typeface="Calibri" pitchFamily="34" charset="-122"/>
                           <a:cs typeface="Calibri" pitchFamily="34" charset="-120"/>
                         </a:rPr>
-                        <a:t>0.92%</a:t>
+                        <a:t>1.14%</a:t>
                       </a:r>
                       <a:endParaRPr lang="en-US" sz="500" dirty="0">
                         <a:latin typeface="Calibri" charset="0"/>
@@ -11626,64 +12619,64 @@
                           <a:ea typeface="Calibri" pitchFamily="34" charset="-122"/>
                           <a:cs typeface="Calibri" pitchFamily="34" charset="-120"/>
                         </a:rPr>
-                        <a:t>1.14%</a:t>
-                      </a:r>
-                      <a:endParaRPr lang="en-US" sz="500" dirty="0">
-                        <a:latin typeface="Calibri" charset="0"/>
-                        <a:ea typeface="Calibri" charset="0"/>
-                        <a:cs typeface="Calibri" charset="0"/>
-                      </a:endParaRPr>
-                    </a:p>
-                  </a:txBody>
-                  <a:tcPr marL="91440" marR="91440" marT="45720" marB="45720">
-                    <a:lnL w="2540" cap="flat" cmpd="sng" algn="ctr">
-                      <a:solidFill>
-                        <a:srgbClr val="EEEEEE"/>
-                      </a:solidFill>
-                      <a:prstDash val="solid"/>
-                      <a:round/>
-                      <a:headEnd type="none" w="med" len="med"/>
-                      <a:tailEnd type="none" w="med" len="med"/>
-                    </a:lnL>
-                    <a:lnR w="2540" cap="flat" cmpd="sng" algn="ctr">
-                      <a:solidFill>
-                        <a:srgbClr val="EEEEEE"/>
-                      </a:solidFill>
-                      <a:prstDash val="solid"/>
-                      <a:round/>
-                      <a:headEnd type="none" w="med" len="med"/>
-                      <a:tailEnd type="none" w="med" len="med"/>
-                    </a:lnR>
-                    <a:lnT w="2540" cap="flat" cmpd="sng" algn="ctr">
-                      <a:solidFill>
-                        <a:srgbClr val="EEEEEE"/>
-                      </a:solidFill>
-                      <a:prstDash val="solid"/>
-                      <a:round/>
-                      <a:headEnd type="none" w="med" len="med"/>
-                      <a:tailEnd type="none" w="med" len="med"/>
-                    </a:lnT>
-                    <a:lnB w="2540" cap="flat" cmpd="sng" algn="ctr">
-                      <a:solidFill>
-                        <a:srgbClr val="EEEEEE"/>
-                      </a:solidFill>
-                      <a:prstDash val="solid"/>
-                      <a:round/>
-                      <a:headEnd type="none" w="med" len="med"/>
-                      <a:tailEnd type="none" w="med" len="med"/>
-                    </a:lnB>
-                  </a:tcPr>
-                </a:tc>
-                <a:tc>
-                  <a:txBody>
-                    <a:bodyPr/>
-                    <a:lstStyle/>
-                    <a:p>
-                      <a:pPr algn="ctr" indent="0" marL="0">
-                        <a:buNone/>
-                      </a:pPr>
-                      <a:r>
-                        <a:rPr lang="en-US" sz="500" dirty="0">
+                        <a:t>1.04%</a:t>
+                      </a:r>
+                      <a:endParaRPr lang="en-US" sz="500" dirty="0">
+                        <a:latin typeface="Calibri" charset="0"/>
+                        <a:ea typeface="Calibri" charset="0"/>
+                        <a:cs typeface="Calibri" charset="0"/>
+                      </a:endParaRPr>
+                    </a:p>
+                  </a:txBody>
+                  <a:tcPr marL="91440" marR="91440" marT="45720" marB="45720">
+                    <a:lnL w="2540" cap="flat" cmpd="sng" algn="ctr">
+                      <a:solidFill>
+                        <a:srgbClr val="EEEEEE"/>
+                      </a:solidFill>
+                      <a:prstDash val="solid"/>
+                      <a:round/>
+                      <a:headEnd type="none" w="med" len="med"/>
+                      <a:tailEnd type="none" w="med" len="med"/>
+                    </a:lnL>
+                    <a:lnR w="2540" cap="flat" cmpd="sng" algn="ctr">
+                      <a:solidFill>
+                        <a:srgbClr val="EEEEEE"/>
+                      </a:solidFill>
+                      <a:prstDash val="solid"/>
+                      <a:round/>
+                      <a:headEnd type="none" w="med" len="med"/>
+                      <a:tailEnd type="none" w="med" len="med"/>
+                    </a:lnR>
+                    <a:lnT w="2540" cap="flat" cmpd="sng" algn="ctr">
+                      <a:solidFill>
+                        <a:srgbClr val="EEEEEE"/>
+                      </a:solidFill>
+                      <a:prstDash val="solid"/>
+                      <a:round/>
+                      <a:headEnd type="none" w="med" len="med"/>
+                      <a:tailEnd type="none" w="med" len="med"/>
+                    </a:lnT>
+                    <a:lnB w="2540" cap="flat" cmpd="sng" algn="ctr">
+                      <a:solidFill>
+                        <a:srgbClr val="EEEEEE"/>
+                      </a:solidFill>
+                      <a:prstDash val="solid"/>
+                      <a:round/>
+                      <a:headEnd type="none" w="med" len="med"/>
+                      <a:tailEnd type="none" w="med" len="med"/>
+                    </a:lnB>
+                  </a:tcPr>
+                </a:tc>
+                <a:tc>
+                  <a:txBody>
+                    <a:bodyPr/>
+                    <a:lstStyle/>
+                    <a:p>
+                      <a:pPr algn="ctr" indent="0" marL="0">
+                        <a:buNone/>
+                      </a:pPr>
+                      <a:r>
+                        <a:rPr lang="en-US" sz="500" b="1" dirty="0">
                           <a:solidFill>
                             <a:srgbClr val="000000"/>
                           </a:solidFill>
@@ -11691,72 +12684,7 @@
                           <a:ea typeface="Calibri" pitchFamily="34" charset="-122"/>
                           <a:cs typeface="Calibri" pitchFamily="34" charset="-120"/>
                         </a:rPr>
-                        <a:t>1.04%</a:t>
-                      </a:r>
-                      <a:endParaRPr lang="en-US" sz="500" dirty="0">
-                        <a:latin typeface="Calibri" charset="0"/>
-                        <a:ea typeface="Calibri" charset="0"/>
-                        <a:cs typeface="Calibri" charset="0"/>
-                      </a:endParaRPr>
-                    </a:p>
-                  </a:txBody>
-                  <a:tcPr marL="91440" marR="91440" marT="45720" marB="45720">
-                    <a:lnL w="2540" cap="flat" cmpd="sng" algn="ctr">
-                      <a:solidFill>
-                        <a:srgbClr val="EEEEEE"/>
-                      </a:solidFill>
-                      <a:prstDash val="solid"/>
-                      <a:round/>
-                      <a:headEnd type="none" w="med" len="med"/>
-                      <a:tailEnd type="none" w="med" len="med"/>
-                    </a:lnL>
-                    <a:lnR w="2540" cap="flat" cmpd="sng" algn="ctr">
-                      <a:solidFill>
-                        <a:srgbClr val="EEEEEE"/>
-                      </a:solidFill>
-                      <a:prstDash val="solid"/>
-                      <a:round/>
-                      <a:headEnd type="none" w="med" len="med"/>
-                      <a:tailEnd type="none" w="med" len="med"/>
-                    </a:lnR>
-                    <a:lnT w="2540" cap="flat" cmpd="sng" algn="ctr">
-                      <a:solidFill>
-                        <a:srgbClr val="EEEEEE"/>
-                      </a:solidFill>
-                      <a:prstDash val="solid"/>
-                      <a:round/>
-                      <a:headEnd type="none" w="med" len="med"/>
-                      <a:tailEnd type="none" w="med" len="med"/>
-                    </a:lnT>
-                    <a:lnB w="2540" cap="flat" cmpd="sng" algn="ctr">
-                      <a:solidFill>
-                        <a:srgbClr val="EEEEEE"/>
-                      </a:solidFill>
-                      <a:prstDash val="solid"/>
-                      <a:round/>
-                      <a:headEnd type="none" w="med" len="med"/>
-                      <a:tailEnd type="none" w="med" len="med"/>
-                    </a:lnB>
-                  </a:tcPr>
-                </a:tc>
-                <a:tc>
-                  <a:txBody>
-                    <a:bodyPr/>
-                    <a:lstStyle/>
-                    <a:p>
-                      <a:pPr algn="ctr" indent="0" marL="0">
-                        <a:buNone/>
-                      </a:pPr>
-                      <a:r>
-                        <a:rPr lang="en-US" sz="500" b="1" dirty="0">
-                          <a:solidFill>
-                            <a:srgbClr val="000000"/>
-                          </a:solidFill>
-                          <a:latin typeface="Calibri" pitchFamily="34" charset="0"/>
-                          <a:ea typeface="Calibri" pitchFamily="34" charset="-122"/>
-                          <a:cs typeface="Calibri" pitchFamily="34" charset="-120"/>
-                        </a:rPr>
-                        <a:t>9.13%</a:t>
+                        <a:t>9.83%</a:t>
                       </a:r>
                       <a:endParaRPr lang="en-US" sz="500" dirty="0">
                         <a:latin typeface="Calibri" charset="0"/>
@@ -11953,6 +12881,331 @@
                           <a:ea typeface="Calibri" pitchFamily="34" charset="-122"/>
                           <a:cs typeface="Calibri" pitchFamily="34" charset="-120"/>
                         </a:rPr>
+                        <a:t>1.00%</a:t>
+                      </a:r>
+                      <a:endParaRPr lang="en-US" sz="500" dirty="0">
+                        <a:latin typeface="Calibri" charset="0"/>
+                        <a:ea typeface="Calibri" charset="0"/>
+                        <a:cs typeface="Calibri" charset="0"/>
+                      </a:endParaRPr>
+                    </a:p>
+                  </a:txBody>
+                  <a:tcPr marL="91440" marR="91440" marT="45720" marB="45720">
+                    <a:lnL w="2540" cap="flat" cmpd="sng" algn="ctr">
+                      <a:solidFill>
+                        <a:srgbClr val="EEEEEE"/>
+                      </a:solidFill>
+                      <a:prstDash val="solid"/>
+                      <a:round/>
+                      <a:headEnd type="none" w="med" len="med"/>
+                      <a:tailEnd type="none" w="med" len="med"/>
+                    </a:lnL>
+                    <a:lnR w="2540" cap="flat" cmpd="sng" algn="ctr">
+                      <a:solidFill>
+                        <a:srgbClr val="EEEEEE"/>
+                      </a:solidFill>
+                      <a:prstDash val="solid"/>
+                      <a:round/>
+                      <a:headEnd type="none" w="med" len="med"/>
+                      <a:tailEnd type="none" w="med" len="med"/>
+                    </a:lnR>
+                    <a:lnT w="2540" cap="flat" cmpd="sng" algn="ctr">
+                      <a:solidFill>
+                        <a:srgbClr val="EEEEEE"/>
+                      </a:solidFill>
+                      <a:prstDash val="solid"/>
+                      <a:round/>
+                      <a:headEnd type="none" w="med" len="med"/>
+                      <a:tailEnd type="none" w="med" len="med"/>
+                    </a:lnT>
+                    <a:lnB w="2540" cap="flat" cmpd="sng" algn="ctr">
+                      <a:solidFill>
+                        <a:srgbClr val="EEEEEE"/>
+                      </a:solidFill>
+                      <a:prstDash val="solid"/>
+                      <a:round/>
+                      <a:headEnd type="none" w="med" len="med"/>
+                      <a:tailEnd type="none" w="med" len="med"/>
+                    </a:lnB>
+                  </a:tcPr>
+                </a:tc>
+                <a:tc>
+                  <a:txBody>
+                    <a:bodyPr/>
+                    <a:lstStyle/>
+                    <a:p>
+                      <a:pPr algn="ctr" indent="0" marL="0">
+                        <a:buNone/>
+                      </a:pPr>
+                      <a:r>
+                        <a:rPr lang="en-US" sz="500" dirty="0">
+                          <a:solidFill>
+                            <a:srgbClr val="777777"/>
+                          </a:solidFill>
+                          <a:latin typeface="Calibri" pitchFamily="34" charset="0"/>
+                          <a:ea typeface="Calibri" pitchFamily="34" charset="-122"/>
+                          <a:cs typeface="Calibri" pitchFamily="34" charset="-120"/>
+                        </a:rPr>
+                        <a:t>0.88%</a:t>
+                      </a:r>
+                      <a:endParaRPr lang="en-US" sz="500" dirty="0">
+                        <a:latin typeface="Calibri" charset="0"/>
+                        <a:ea typeface="Calibri" charset="0"/>
+                        <a:cs typeface="Calibri" charset="0"/>
+                      </a:endParaRPr>
+                    </a:p>
+                  </a:txBody>
+                  <a:tcPr marL="91440" marR="91440" marT="45720" marB="45720">
+                    <a:lnL w="2540" cap="flat" cmpd="sng" algn="ctr">
+                      <a:solidFill>
+                        <a:srgbClr val="EEEEEE"/>
+                      </a:solidFill>
+                      <a:prstDash val="solid"/>
+                      <a:round/>
+                      <a:headEnd type="none" w="med" len="med"/>
+                      <a:tailEnd type="none" w="med" len="med"/>
+                    </a:lnL>
+                    <a:lnR w="2540" cap="flat" cmpd="sng" algn="ctr">
+                      <a:solidFill>
+                        <a:srgbClr val="EEEEEE"/>
+                      </a:solidFill>
+                      <a:prstDash val="solid"/>
+                      <a:round/>
+                      <a:headEnd type="none" w="med" len="med"/>
+                      <a:tailEnd type="none" w="med" len="med"/>
+                    </a:lnR>
+                    <a:lnT w="2540" cap="flat" cmpd="sng" algn="ctr">
+                      <a:solidFill>
+                        <a:srgbClr val="EEEEEE"/>
+                      </a:solidFill>
+                      <a:prstDash val="solid"/>
+                      <a:round/>
+                      <a:headEnd type="none" w="med" len="med"/>
+                      <a:tailEnd type="none" w="med" len="med"/>
+                    </a:lnT>
+                    <a:lnB w="2540" cap="flat" cmpd="sng" algn="ctr">
+                      <a:solidFill>
+                        <a:srgbClr val="EEEEEE"/>
+                      </a:solidFill>
+                      <a:prstDash val="solid"/>
+                      <a:round/>
+                      <a:headEnd type="none" w="med" len="med"/>
+                      <a:tailEnd type="none" w="med" len="med"/>
+                    </a:lnB>
+                  </a:tcPr>
+                </a:tc>
+                <a:tc>
+                  <a:txBody>
+                    <a:bodyPr/>
+                    <a:lstStyle/>
+                    <a:p>
+                      <a:pPr algn="ctr" indent="0" marL="0">
+                        <a:buNone/>
+                      </a:pPr>
+                      <a:r>
+                        <a:rPr lang="en-US" sz="500" dirty="0">
+                          <a:solidFill>
+                            <a:srgbClr val="777777"/>
+                          </a:solidFill>
+                          <a:latin typeface="Calibri" pitchFamily="34" charset="0"/>
+                          <a:ea typeface="Calibri" pitchFamily="34" charset="-122"/>
+                          <a:cs typeface="Calibri" pitchFamily="34" charset="-120"/>
+                        </a:rPr>
+                        <a:t>0.97%</a:t>
+                      </a:r>
+                      <a:endParaRPr lang="en-US" sz="500" dirty="0">
+                        <a:latin typeface="Calibri" charset="0"/>
+                        <a:ea typeface="Calibri" charset="0"/>
+                        <a:cs typeface="Calibri" charset="0"/>
+                      </a:endParaRPr>
+                    </a:p>
+                  </a:txBody>
+                  <a:tcPr marL="91440" marR="91440" marT="45720" marB="45720">
+                    <a:lnL w="2540" cap="flat" cmpd="sng" algn="ctr">
+                      <a:solidFill>
+                        <a:srgbClr val="EEEEEE"/>
+                      </a:solidFill>
+                      <a:prstDash val="solid"/>
+                      <a:round/>
+                      <a:headEnd type="none" w="med" len="med"/>
+                      <a:tailEnd type="none" w="med" len="med"/>
+                    </a:lnL>
+                    <a:lnR w="2540" cap="flat" cmpd="sng" algn="ctr">
+                      <a:solidFill>
+                        <a:srgbClr val="EEEEEE"/>
+                      </a:solidFill>
+                      <a:prstDash val="solid"/>
+                      <a:round/>
+                      <a:headEnd type="none" w="med" len="med"/>
+                      <a:tailEnd type="none" w="med" len="med"/>
+                    </a:lnR>
+                    <a:lnT w="2540" cap="flat" cmpd="sng" algn="ctr">
+                      <a:solidFill>
+                        <a:srgbClr val="EEEEEE"/>
+                      </a:solidFill>
+                      <a:prstDash val="solid"/>
+                      <a:round/>
+                      <a:headEnd type="none" w="med" len="med"/>
+                      <a:tailEnd type="none" w="med" len="med"/>
+                    </a:lnT>
+                    <a:lnB w="2540" cap="flat" cmpd="sng" algn="ctr">
+                      <a:solidFill>
+                        <a:srgbClr val="EEEEEE"/>
+                      </a:solidFill>
+                      <a:prstDash val="solid"/>
+                      <a:round/>
+                      <a:headEnd type="none" w="med" len="med"/>
+                      <a:tailEnd type="none" w="med" len="med"/>
+                    </a:lnB>
+                  </a:tcPr>
+                </a:tc>
+                <a:tc>
+                  <a:txBody>
+                    <a:bodyPr/>
+                    <a:lstStyle/>
+                    <a:p>
+                      <a:pPr algn="ctr" indent="0" marL="0">
+                        <a:buNone/>
+                      </a:pPr>
+                      <a:r>
+                        <a:rPr lang="en-US" sz="500" dirty="0">
+                          <a:solidFill>
+                            <a:srgbClr val="777777"/>
+                          </a:solidFill>
+                          <a:latin typeface="Calibri" pitchFamily="34" charset="0"/>
+                          <a:ea typeface="Calibri" pitchFamily="34" charset="-122"/>
+                          <a:cs typeface="Calibri" pitchFamily="34" charset="-120"/>
+                        </a:rPr>
+                        <a:t>0.88%</a:t>
+                      </a:r>
+                      <a:endParaRPr lang="en-US" sz="500" dirty="0">
+                        <a:latin typeface="Calibri" charset="0"/>
+                        <a:ea typeface="Calibri" charset="0"/>
+                        <a:cs typeface="Calibri" charset="0"/>
+                      </a:endParaRPr>
+                    </a:p>
+                  </a:txBody>
+                  <a:tcPr marL="91440" marR="91440" marT="45720" marB="45720">
+                    <a:lnL w="2540" cap="flat" cmpd="sng" algn="ctr">
+                      <a:solidFill>
+                        <a:srgbClr val="EEEEEE"/>
+                      </a:solidFill>
+                      <a:prstDash val="solid"/>
+                      <a:round/>
+                      <a:headEnd type="none" w="med" len="med"/>
+                      <a:tailEnd type="none" w="med" len="med"/>
+                    </a:lnL>
+                    <a:lnR w="2540" cap="flat" cmpd="sng" algn="ctr">
+                      <a:solidFill>
+                        <a:srgbClr val="EEEEEE"/>
+                      </a:solidFill>
+                      <a:prstDash val="solid"/>
+                      <a:round/>
+                      <a:headEnd type="none" w="med" len="med"/>
+                      <a:tailEnd type="none" w="med" len="med"/>
+                    </a:lnR>
+                    <a:lnT w="2540" cap="flat" cmpd="sng" algn="ctr">
+                      <a:solidFill>
+                        <a:srgbClr val="EEEEEE"/>
+                      </a:solidFill>
+                      <a:prstDash val="solid"/>
+                      <a:round/>
+                      <a:headEnd type="none" w="med" len="med"/>
+                      <a:tailEnd type="none" w="med" len="med"/>
+                    </a:lnT>
+                    <a:lnB w="2540" cap="flat" cmpd="sng" algn="ctr">
+                      <a:solidFill>
+                        <a:srgbClr val="EEEEEE"/>
+                      </a:solidFill>
+                      <a:prstDash val="solid"/>
+                      <a:round/>
+                      <a:headEnd type="none" w="med" len="med"/>
+                      <a:tailEnd type="none" w="med" len="med"/>
+                    </a:lnB>
+                  </a:tcPr>
+                </a:tc>
+                <a:tc>
+                  <a:txBody>
+                    <a:bodyPr/>
+                    <a:lstStyle/>
+                    <a:p>
+                      <a:pPr algn="ctr" indent="0" marL="0">
+                        <a:buNone/>
+                      </a:pPr>
+                      <a:r>
+                        <a:rPr lang="en-US" sz="500" dirty="0">
+                          <a:solidFill>
+                            <a:srgbClr val="777777"/>
+                          </a:solidFill>
+                          <a:latin typeface="Calibri" pitchFamily="34" charset="0"/>
+                          <a:ea typeface="Calibri" pitchFamily="34" charset="-122"/>
+                          <a:cs typeface="Calibri" pitchFamily="34" charset="-120"/>
+                        </a:rPr>
+                        <a:t>1.04%</a:t>
+                      </a:r>
+                      <a:endParaRPr lang="en-US" sz="500" dirty="0">
+                        <a:latin typeface="Calibri" charset="0"/>
+                        <a:ea typeface="Calibri" charset="0"/>
+                        <a:cs typeface="Calibri" charset="0"/>
+                      </a:endParaRPr>
+                    </a:p>
+                  </a:txBody>
+                  <a:tcPr marL="91440" marR="91440" marT="45720" marB="45720">
+                    <a:lnL w="2540" cap="flat" cmpd="sng" algn="ctr">
+                      <a:solidFill>
+                        <a:srgbClr val="EEEEEE"/>
+                      </a:solidFill>
+                      <a:prstDash val="solid"/>
+                      <a:round/>
+                      <a:headEnd type="none" w="med" len="med"/>
+                      <a:tailEnd type="none" w="med" len="med"/>
+                    </a:lnL>
+                    <a:lnR w="2540" cap="flat" cmpd="sng" algn="ctr">
+                      <a:solidFill>
+                        <a:srgbClr val="EEEEEE"/>
+                      </a:solidFill>
+                      <a:prstDash val="solid"/>
+                      <a:round/>
+                      <a:headEnd type="none" w="med" len="med"/>
+                      <a:tailEnd type="none" w="med" len="med"/>
+                    </a:lnR>
+                    <a:lnT w="2540" cap="flat" cmpd="sng" algn="ctr">
+                      <a:solidFill>
+                        <a:srgbClr val="EEEEEE"/>
+                      </a:solidFill>
+                      <a:prstDash val="solid"/>
+                      <a:round/>
+                      <a:headEnd type="none" w="med" len="med"/>
+                      <a:tailEnd type="none" w="med" len="med"/>
+                    </a:lnT>
+                    <a:lnB w="2540" cap="flat" cmpd="sng" algn="ctr">
+                      <a:solidFill>
+                        <a:srgbClr val="EEEEEE"/>
+                      </a:solidFill>
+                      <a:prstDash val="solid"/>
+                      <a:round/>
+                      <a:headEnd type="none" w="med" len="med"/>
+                      <a:tailEnd type="none" w="med" len="med"/>
+                    </a:lnB>
+                  </a:tcPr>
+                </a:tc>
+                <a:tc>
+                  <a:txBody>
+                    <a:bodyPr/>
+                    <a:lstStyle/>
+                    <a:p>
+                      <a:pPr algn="ctr" indent="0" marL="0">
+                        <a:buNone/>
+                      </a:pPr>
+                      <a:r>
+                        <a:rPr lang="en-US" sz="500" dirty="0">
+                          <a:solidFill>
+                            <a:srgbClr val="777777"/>
+                          </a:solidFill>
+                          <a:latin typeface="Calibri" pitchFamily="34" charset="0"/>
+                          <a:ea typeface="Calibri" pitchFamily="34" charset="-122"/>
+                          <a:cs typeface="Calibri" pitchFamily="34" charset="-120"/>
+                        </a:rPr>
                         <a:t>0.94%</a:t>
                       </a:r>
                       <a:endParaRPr lang="en-US" sz="500" dirty="0">
@@ -12018,7 +13271,7 @@
                           <a:ea typeface="Calibri" pitchFamily="34" charset="-122"/>
                           <a:cs typeface="Calibri" pitchFamily="34" charset="-120"/>
                         </a:rPr>
-                        <a:t>0.94%</a:t>
+                        <a:t>0.97%</a:t>
                       </a:r>
                       <a:endParaRPr lang="en-US" sz="500" dirty="0">
                         <a:latin typeface="Calibri" charset="0"/>
@@ -12083,7 +13336,7 @@
                           <a:ea typeface="Calibri" pitchFamily="34" charset="-122"/>
                           <a:cs typeface="Calibri" pitchFamily="34" charset="-120"/>
                         </a:rPr>
-                        <a:t>0.94%</a:t>
+                        <a:t>0.89%</a:t>
                       </a:r>
                       <a:endParaRPr lang="en-US" sz="500" dirty="0">
                         <a:latin typeface="Calibri" charset="0"/>
@@ -12148,7 +13401,7 @@
                           <a:ea typeface="Calibri" pitchFamily="34" charset="-122"/>
                           <a:cs typeface="Calibri" pitchFamily="34" charset="-120"/>
                         </a:rPr>
-                        <a:t>0.94%</a:t>
+                        <a:t>0.78%</a:t>
                       </a:r>
                       <a:endParaRPr lang="en-US" sz="500" dirty="0">
                         <a:latin typeface="Calibri" charset="0"/>
@@ -12213,7 +13466,7 @@
                           <a:ea typeface="Calibri" pitchFamily="34" charset="-122"/>
                           <a:cs typeface="Calibri" pitchFamily="34" charset="-120"/>
                         </a:rPr>
-                        <a:t>0.94%</a:t>
+                        <a:t>0.85%</a:t>
                       </a:r>
                       <a:endParaRPr lang="en-US" sz="500" dirty="0">
                         <a:latin typeface="Calibri" charset="0"/>
@@ -12278,7 +13531,7 @@
                           <a:ea typeface="Calibri" pitchFamily="34" charset="-122"/>
                           <a:cs typeface="Calibri" pitchFamily="34" charset="-120"/>
                         </a:rPr>
-                        <a:t>0.94%</a:t>
+                        <a:t>0.75%</a:t>
                       </a:r>
                       <a:endParaRPr lang="en-US" sz="500" dirty="0">
                         <a:latin typeface="Calibri" charset="0"/>
@@ -12343,64 +13596,64 @@
                           <a:ea typeface="Calibri" pitchFamily="34" charset="-122"/>
                           <a:cs typeface="Calibri" pitchFamily="34" charset="-120"/>
                         </a:rPr>
-                        <a:t>0.93%</a:t>
-                      </a:r>
-                      <a:endParaRPr lang="en-US" sz="500" dirty="0">
-                        <a:latin typeface="Calibri" charset="0"/>
-                        <a:ea typeface="Calibri" charset="0"/>
-                        <a:cs typeface="Calibri" charset="0"/>
-                      </a:endParaRPr>
-                    </a:p>
-                  </a:txBody>
-                  <a:tcPr marL="91440" marR="91440" marT="45720" marB="45720">
-                    <a:lnL w="2540" cap="flat" cmpd="sng" algn="ctr">
-                      <a:solidFill>
-                        <a:srgbClr val="EEEEEE"/>
-                      </a:solidFill>
-                      <a:prstDash val="solid"/>
-                      <a:round/>
-                      <a:headEnd type="none" w="med" len="med"/>
-                      <a:tailEnd type="none" w="med" len="med"/>
-                    </a:lnL>
-                    <a:lnR w="2540" cap="flat" cmpd="sng" algn="ctr">
-                      <a:solidFill>
-                        <a:srgbClr val="EEEEEE"/>
-                      </a:solidFill>
-                      <a:prstDash val="solid"/>
-                      <a:round/>
-                      <a:headEnd type="none" w="med" len="med"/>
-                      <a:tailEnd type="none" w="med" len="med"/>
-                    </a:lnR>
-                    <a:lnT w="2540" cap="flat" cmpd="sng" algn="ctr">
-                      <a:solidFill>
-                        <a:srgbClr val="EEEEEE"/>
-                      </a:solidFill>
-                      <a:prstDash val="solid"/>
-                      <a:round/>
-                      <a:headEnd type="none" w="med" len="med"/>
-                      <a:tailEnd type="none" w="med" len="med"/>
-                    </a:lnT>
-                    <a:lnB w="2540" cap="flat" cmpd="sng" algn="ctr">
-                      <a:solidFill>
-                        <a:srgbClr val="EEEEEE"/>
-                      </a:solidFill>
-                      <a:prstDash val="solid"/>
-                      <a:round/>
-                      <a:headEnd type="none" w="med" len="med"/>
-                      <a:tailEnd type="none" w="med" len="med"/>
-                    </a:lnB>
-                  </a:tcPr>
-                </a:tc>
-                <a:tc>
-                  <a:txBody>
-                    <a:bodyPr/>
-                    <a:lstStyle/>
-                    <a:p>
-                      <a:pPr algn="ctr" indent="0" marL="0">
-                        <a:buNone/>
-                      </a:pPr>
-                      <a:r>
-                        <a:rPr lang="en-US" sz="500" dirty="0">
+                        <a:t>0.71%</a:t>
+                      </a:r>
+                      <a:endParaRPr lang="en-US" sz="500" dirty="0">
+                        <a:latin typeface="Calibri" charset="0"/>
+                        <a:ea typeface="Calibri" charset="0"/>
+                        <a:cs typeface="Calibri" charset="0"/>
+                      </a:endParaRPr>
+                    </a:p>
+                  </a:txBody>
+                  <a:tcPr marL="91440" marR="91440" marT="45720" marB="45720">
+                    <a:lnL w="2540" cap="flat" cmpd="sng" algn="ctr">
+                      <a:solidFill>
+                        <a:srgbClr val="EEEEEE"/>
+                      </a:solidFill>
+                      <a:prstDash val="solid"/>
+                      <a:round/>
+                      <a:headEnd type="none" w="med" len="med"/>
+                      <a:tailEnd type="none" w="med" len="med"/>
+                    </a:lnL>
+                    <a:lnR w="2540" cap="flat" cmpd="sng" algn="ctr">
+                      <a:solidFill>
+                        <a:srgbClr val="EEEEEE"/>
+                      </a:solidFill>
+                      <a:prstDash val="solid"/>
+                      <a:round/>
+                      <a:headEnd type="none" w="med" len="med"/>
+                      <a:tailEnd type="none" w="med" len="med"/>
+                    </a:lnR>
+                    <a:lnT w="2540" cap="flat" cmpd="sng" algn="ctr">
+                      <a:solidFill>
+                        <a:srgbClr val="EEEEEE"/>
+                      </a:solidFill>
+                      <a:prstDash val="solid"/>
+                      <a:round/>
+                      <a:headEnd type="none" w="med" len="med"/>
+                      <a:tailEnd type="none" w="med" len="med"/>
+                    </a:lnT>
+                    <a:lnB w="2540" cap="flat" cmpd="sng" algn="ctr">
+                      <a:solidFill>
+                        <a:srgbClr val="EEEEEE"/>
+                      </a:solidFill>
+                      <a:prstDash val="solid"/>
+                      <a:round/>
+                      <a:headEnd type="none" w="med" len="med"/>
+                      <a:tailEnd type="none" w="med" len="med"/>
+                    </a:lnB>
+                  </a:tcPr>
+                </a:tc>
+                <a:tc>
+                  <a:txBody>
+                    <a:bodyPr/>
+                    <a:lstStyle/>
+                    <a:p>
+                      <a:pPr algn="ctr" indent="0" marL="0">
+                        <a:buNone/>
+                      </a:pPr>
+                      <a:r>
+                        <a:rPr lang="en-US" sz="500" b="1" dirty="0">
                           <a:solidFill>
                             <a:srgbClr val="777777"/>
                           </a:solidFill>
@@ -12408,332 +13661,7 @@
                           <a:ea typeface="Calibri" pitchFamily="34" charset="-122"/>
                           <a:cs typeface="Calibri" pitchFamily="34" charset="-120"/>
                         </a:rPr>
-                        <a:t>0.85%</a:t>
-                      </a:r>
-                      <a:endParaRPr lang="en-US" sz="500" dirty="0">
-                        <a:latin typeface="Calibri" charset="0"/>
-                        <a:ea typeface="Calibri" charset="0"/>
-                        <a:cs typeface="Calibri" charset="0"/>
-                      </a:endParaRPr>
-                    </a:p>
-                  </a:txBody>
-                  <a:tcPr marL="91440" marR="91440" marT="45720" marB="45720">
-                    <a:lnL w="2540" cap="flat" cmpd="sng" algn="ctr">
-                      <a:solidFill>
-                        <a:srgbClr val="EEEEEE"/>
-                      </a:solidFill>
-                      <a:prstDash val="solid"/>
-                      <a:round/>
-                      <a:headEnd type="none" w="med" len="med"/>
-                      <a:tailEnd type="none" w="med" len="med"/>
-                    </a:lnL>
-                    <a:lnR w="2540" cap="flat" cmpd="sng" algn="ctr">
-                      <a:solidFill>
-                        <a:srgbClr val="EEEEEE"/>
-                      </a:solidFill>
-                      <a:prstDash val="solid"/>
-                      <a:round/>
-                      <a:headEnd type="none" w="med" len="med"/>
-                      <a:tailEnd type="none" w="med" len="med"/>
-                    </a:lnR>
-                    <a:lnT w="2540" cap="flat" cmpd="sng" algn="ctr">
-                      <a:solidFill>
-                        <a:srgbClr val="EEEEEE"/>
-                      </a:solidFill>
-                      <a:prstDash val="solid"/>
-                      <a:round/>
-                      <a:headEnd type="none" w="med" len="med"/>
-                      <a:tailEnd type="none" w="med" len="med"/>
-                    </a:lnT>
-                    <a:lnB w="2540" cap="flat" cmpd="sng" algn="ctr">
-                      <a:solidFill>
-                        <a:srgbClr val="EEEEEE"/>
-                      </a:solidFill>
-                      <a:prstDash val="solid"/>
-                      <a:round/>
-                      <a:headEnd type="none" w="med" len="med"/>
-                      <a:tailEnd type="none" w="med" len="med"/>
-                    </a:lnB>
-                  </a:tcPr>
-                </a:tc>
-                <a:tc>
-                  <a:txBody>
-                    <a:bodyPr/>
-                    <a:lstStyle/>
-                    <a:p>
-                      <a:pPr algn="ctr" indent="0" marL="0">
-                        <a:buNone/>
-                      </a:pPr>
-                      <a:r>
-                        <a:rPr lang="en-US" sz="500" dirty="0">
-                          <a:solidFill>
-                            <a:srgbClr val="777777"/>
-                          </a:solidFill>
-                          <a:latin typeface="Calibri" pitchFamily="34" charset="0"/>
-                          <a:ea typeface="Calibri" pitchFamily="34" charset="-122"/>
-                          <a:cs typeface="Calibri" pitchFamily="34" charset="-120"/>
-                        </a:rPr>
-                        <a:t>0.80%</a:t>
-                      </a:r>
-                      <a:endParaRPr lang="en-US" sz="500" dirty="0">
-                        <a:latin typeface="Calibri" charset="0"/>
-                        <a:ea typeface="Calibri" charset="0"/>
-                        <a:cs typeface="Calibri" charset="0"/>
-                      </a:endParaRPr>
-                    </a:p>
-                  </a:txBody>
-                  <a:tcPr marL="91440" marR="91440" marT="45720" marB="45720">
-                    <a:lnL w="2540" cap="flat" cmpd="sng" algn="ctr">
-                      <a:solidFill>
-                        <a:srgbClr val="EEEEEE"/>
-                      </a:solidFill>
-                      <a:prstDash val="solid"/>
-                      <a:round/>
-                      <a:headEnd type="none" w="med" len="med"/>
-                      <a:tailEnd type="none" w="med" len="med"/>
-                    </a:lnL>
-                    <a:lnR w="2540" cap="flat" cmpd="sng" algn="ctr">
-                      <a:solidFill>
-                        <a:srgbClr val="EEEEEE"/>
-                      </a:solidFill>
-                      <a:prstDash val="solid"/>
-                      <a:round/>
-                      <a:headEnd type="none" w="med" len="med"/>
-                      <a:tailEnd type="none" w="med" len="med"/>
-                    </a:lnR>
-                    <a:lnT w="2540" cap="flat" cmpd="sng" algn="ctr">
-                      <a:solidFill>
-                        <a:srgbClr val="EEEEEE"/>
-                      </a:solidFill>
-                      <a:prstDash val="solid"/>
-                      <a:round/>
-                      <a:headEnd type="none" w="med" len="med"/>
-                      <a:tailEnd type="none" w="med" len="med"/>
-                    </a:lnT>
-                    <a:lnB w="2540" cap="flat" cmpd="sng" algn="ctr">
-                      <a:solidFill>
-                        <a:srgbClr val="EEEEEE"/>
-                      </a:solidFill>
-                      <a:prstDash val="solid"/>
-                      <a:round/>
-                      <a:headEnd type="none" w="med" len="med"/>
-                      <a:tailEnd type="none" w="med" len="med"/>
-                    </a:lnB>
-                  </a:tcPr>
-                </a:tc>
-                <a:tc>
-                  <a:txBody>
-                    <a:bodyPr/>
-                    <a:lstStyle/>
-                    <a:p>
-                      <a:pPr algn="ctr" indent="0" marL="0">
-                        <a:buNone/>
-                      </a:pPr>
-                      <a:r>
-                        <a:rPr lang="en-US" sz="500" dirty="0">
-                          <a:solidFill>
-                            <a:srgbClr val="777777"/>
-                          </a:solidFill>
-                          <a:latin typeface="Calibri" pitchFamily="34" charset="0"/>
-                          <a:ea typeface="Calibri" pitchFamily="34" charset="-122"/>
-                          <a:cs typeface="Calibri" pitchFamily="34" charset="-120"/>
-                        </a:rPr>
-                        <a:t>0.79%</a:t>
-                      </a:r>
-                      <a:endParaRPr lang="en-US" sz="500" dirty="0">
-                        <a:latin typeface="Calibri" charset="0"/>
-                        <a:ea typeface="Calibri" charset="0"/>
-                        <a:cs typeface="Calibri" charset="0"/>
-                      </a:endParaRPr>
-                    </a:p>
-                  </a:txBody>
-                  <a:tcPr marL="91440" marR="91440" marT="45720" marB="45720">
-                    <a:lnL w="2540" cap="flat" cmpd="sng" algn="ctr">
-                      <a:solidFill>
-                        <a:srgbClr val="EEEEEE"/>
-                      </a:solidFill>
-                      <a:prstDash val="solid"/>
-                      <a:round/>
-                      <a:headEnd type="none" w="med" len="med"/>
-                      <a:tailEnd type="none" w="med" len="med"/>
-                    </a:lnL>
-                    <a:lnR w="2540" cap="flat" cmpd="sng" algn="ctr">
-                      <a:solidFill>
-                        <a:srgbClr val="EEEEEE"/>
-                      </a:solidFill>
-                      <a:prstDash val="solid"/>
-                      <a:round/>
-                      <a:headEnd type="none" w="med" len="med"/>
-                      <a:tailEnd type="none" w="med" len="med"/>
-                    </a:lnR>
-                    <a:lnT w="2540" cap="flat" cmpd="sng" algn="ctr">
-                      <a:solidFill>
-                        <a:srgbClr val="EEEEEE"/>
-                      </a:solidFill>
-                      <a:prstDash val="solid"/>
-                      <a:round/>
-                      <a:headEnd type="none" w="med" len="med"/>
-                      <a:tailEnd type="none" w="med" len="med"/>
-                    </a:lnT>
-                    <a:lnB w="2540" cap="flat" cmpd="sng" algn="ctr">
-                      <a:solidFill>
-                        <a:srgbClr val="EEEEEE"/>
-                      </a:solidFill>
-                      <a:prstDash val="solid"/>
-                      <a:round/>
-                      <a:headEnd type="none" w="med" len="med"/>
-                      <a:tailEnd type="none" w="med" len="med"/>
-                    </a:lnB>
-                  </a:tcPr>
-                </a:tc>
-                <a:tc>
-                  <a:txBody>
-                    <a:bodyPr/>
-                    <a:lstStyle/>
-                    <a:p>
-                      <a:pPr algn="ctr" indent="0" marL="0">
-                        <a:buNone/>
-                      </a:pPr>
-                      <a:r>
-                        <a:rPr lang="en-US" sz="500" dirty="0">
-                          <a:solidFill>
-                            <a:srgbClr val="777777"/>
-                          </a:solidFill>
-                          <a:latin typeface="Calibri" pitchFamily="34" charset="0"/>
-                          <a:ea typeface="Calibri" pitchFamily="34" charset="-122"/>
-                          <a:cs typeface="Calibri" pitchFamily="34" charset="-120"/>
-                        </a:rPr>
-                        <a:t>0.75%</a:t>
-                      </a:r>
-                      <a:endParaRPr lang="en-US" sz="500" dirty="0">
-                        <a:latin typeface="Calibri" charset="0"/>
-                        <a:ea typeface="Calibri" charset="0"/>
-                        <a:cs typeface="Calibri" charset="0"/>
-                      </a:endParaRPr>
-                    </a:p>
-                  </a:txBody>
-                  <a:tcPr marL="91440" marR="91440" marT="45720" marB="45720">
-                    <a:lnL w="2540" cap="flat" cmpd="sng" algn="ctr">
-                      <a:solidFill>
-                        <a:srgbClr val="EEEEEE"/>
-                      </a:solidFill>
-                      <a:prstDash val="solid"/>
-                      <a:round/>
-                      <a:headEnd type="none" w="med" len="med"/>
-                      <a:tailEnd type="none" w="med" len="med"/>
-                    </a:lnL>
-                    <a:lnR w="2540" cap="flat" cmpd="sng" algn="ctr">
-                      <a:solidFill>
-                        <a:srgbClr val="EEEEEE"/>
-                      </a:solidFill>
-                      <a:prstDash val="solid"/>
-                      <a:round/>
-                      <a:headEnd type="none" w="med" len="med"/>
-                      <a:tailEnd type="none" w="med" len="med"/>
-                    </a:lnR>
-                    <a:lnT w="2540" cap="flat" cmpd="sng" algn="ctr">
-                      <a:solidFill>
-                        <a:srgbClr val="EEEEEE"/>
-                      </a:solidFill>
-                      <a:prstDash val="solid"/>
-                      <a:round/>
-                      <a:headEnd type="none" w="med" len="med"/>
-                      <a:tailEnd type="none" w="med" len="med"/>
-                    </a:lnT>
-                    <a:lnB w="2540" cap="flat" cmpd="sng" algn="ctr">
-                      <a:solidFill>
-                        <a:srgbClr val="EEEEEE"/>
-                      </a:solidFill>
-                      <a:prstDash val="solid"/>
-                      <a:round/>
-                      <a:headEnd type="none" w="med" len="med"/>
-                      <a:tailEnd type="none" w="med" len="med"/>
-                    </a:lnB>
-                  </a:tcPr>
-                </a:tc>
-                <a:tc>
-                  <a:txBody>
-                    <a:bodyPr/>
-                    <a:lstStyle/>
-                    <a:p>
-                      <a:pPr algn="ctr" indent="0" marL="0">
-                        <a:buNone/>
-                      </a:pPr>
-                      <a:r>
-                        <a:rPr lang="en-US" sz="500" dirty="0">
-                          <a:solidFill>
-                            <a:srgbClr val="777777"/>
-                          </a:solidFill>
-                          <a:latin typeface="Calibri" pitchFamily="34" charset="0"/>
-                          <a:ea typeface="Calibri" pitchFamily="34" charset="-122"/>
-                          <a:cs typeface="Calibri" pitchFamily="34" charset="-120"/>
-                        </a:rPr>
-                        <a:t>0.73%</a:t>
-                      </a:r>
-                      <a:endParaRPr lang="en-US" sz="500" dirty="0">
-                        <a:latin typeface="Calibri" charset="0"/>
-                        <a:ea typeface="Calibri" charset="0"/>
-                        <a:cs typeface="Calibri" charset="0"/>
-                      </a:endParaRPr>
-                    </a:p>
-                  </a:txBody>
-                  <a:tcPr marL="91440" marR="91440" marT="45720" marB="45720">
-                    <a:lnL w="2540" cap="flat" cmpd="sng" algn="ctr">
-                      <a:solidFill>
-                        <a:srgbClr val="EEEEEE"/>
-                      </a:solidFill>
-                      <a:prstDash val="solid"/>
-                      <a:round/>
-                      <a:headEnd type="none" w="med" len="med"/>
-                      <a:tailEnd type="none" w="med" len="med"/>
-                    </a:lnL>
-                    <a:lnR w="2540" cap="flat" cmpd="sng" algn="ctr">
-                      <a:solidFill>
-                        <a:srgbClr val="EEEEEE"/>
-                      </a:solidFill>
-                      <a:prstDash val="solid"/>
-                      <a:round/>
-                      <a:headEnd type="none" w="med" len="med"/>
-                      <a:tailEnd type="none" w="med" len="med"/>
-                    </a:lnR>
-                    <a:lnT w="2540" cap="flat" cmpd="sng" algn="ctr">
-                      <a:solidFill>
-                        <a:srgbClr val="EEEEEE"/>
-                      </a:solidFill>
-                      <a:prstDash val="solid"/>
-                      <a:round/>
-                      <a:headEnd type="none" w="med" len="med"/>
-                      <a:tailEnd type="none" w="med" len="med"/>
-                    </a:lnT>
-                    <a:lnB w="2540" cap="flat" cmpd="sng" algn="ctr">
-                      <a:solidFill>
-                        <a:srgbClr val="EEEEEE"/>
-                      </a:solidFill>
-                      <a:prstDash val="solid"/>
-                      <a:round/>
-                      <a:headEnd type="none" w="med" len="med"/>
-                      <a:tailEnd type="none" w="med" len="med"/>
-                    </a:lnB>
-                  </a:tcPr>
-                </a:tc>
-                <a:tc>
-                  <a:txBody>
-                    <a:bodyPr/>
-                    <a:lstStyle/>
-                    <a:p>
-                      <a:pPr algn="ctr" indent="0" marL="0">
-                        <a:buNone/>
-                      </a:pPr>
-                      <a:r>
-                        <a:rPr lang="en-US" sz="500" b="1" dirty="0">
-                          <a:solidFill>
-                            <a:srgbClr val="777777"/>
-                          </a:solidFill>
-                          <a:latin typeface="Calibri" pitchFamily="34" charset="0"/>
-                          <a:ea typeface="Calibri" pitchFamily="34" charset="-122"/>
-                          <a:cs typeface="Calibri" pitchFamily="34" charset="-120"/>
-                        </a:rPr>
-                        <a:t>11.00%</a:t>
+                        <a:t>11.19%</a:t>
                       </a:r>
                       <a:endParaRPr lang="en-US" sz="500" dirty="0">
                         <a:latin typeface="Calibri" charset="0"/>
@@ -12919,7 +13847,7 @@
                           <a:ea typeface="Calibri" pitchFamily="34" charset="-122"/>
                           <a:cs typeface="Calibri" pitchFamily="34" charset="-120"/>
                         </a:rPr>
-                        <a:t>0.00%</a:t>
+                        <a:t>0.84%</a:t>
                       </a:r>
                       <a:endParaRPr lang="en-US" sz="500" dirty="0">
                         <a:latin typeface="Calibri" charset="0"/>
@@ -13634,7 +14562,7 @@
                           <a:ea typeface="Calibri" pitchFamily="34" charset="-122"/>
                           <a:cs typeface="Calibri" pitchFamily="34" charset="-120"/>
                         </a:rPr>
-                        <a:t>7.49%</a:t>
+                        <a:t>0.61%</a:t>
                       </a:r>
                       <a:endParaRPr lang="en-US" sz="500" dirty="0">
                         <a:latin typeface="Calibri" charset="0"/>
@@ -13699,7 +14627,7 @@
                           <a:ea typeface="Calibri" pitchFamily="34" charset="-122"/>
                           <a:cs typeface="Calibri" pitchFamily="34" charset="-120"/>
                         </a:rPr>
-                        <a:t>15.86%</a:t>
+                        <a:t>9.36%</a:t>
                       </a:r>
                       <a:endParaRPr lang="en-US" sz="500" dirty="0">
                         <a:latin typeface="Calibri" charset="0"/>
@@ -13812,7 +14740,7 @@
                         <a:buNone/>
                       </a:pPr>
                       <a:r>
-                        <a:rPr lang="en-US" sz="500" dirty="0">
+                        <a:rPr lang="en-US" sz="400" dirty="0">
                           <a:solidFill>
                             <a:srgbClr val="000000"/>
                           </a:solidFill>
@@ -13822,7 +14750,7 @@
                         </a:rPr>
                         <a:t>FIP LIQUIDEZ EFECTIVO</a:t>
                       </a:r>
-                      <a:endParaRPr lang="en-US" sz="500" dirty="0">
+                      <a:endParaRPr lang="en-US" sz="400" dirty="0">
                         <a:latin typeface="Calibri" charset="0"/>
                         <a:ea typeface="Calibri" charset="0"/>
                         <a:cs typeface="Calibri" charset="0"/>
@@ -14862,7 +15790,7 @@
                           <a:ea typeface="Calibri" pitchFamily="34" charset="-122"/>
                           <a:cs typeface="Calibri" pitchFamily="34" charset="-120"/>
                         </a:rPr>
-                        <a:t>0.69%</a:t>
+                        <a:t>0.74%</a:t>
                       </a:r>
                       <a:endParaRPr lang="en-US" sz="500" dirty="0">
                         <a:latin typeface="Calibri" charset="0"/>
@@ -14927,7 +15855,7 @@
                           <a:ea typeface="Calibri" pitchFamily="34" charset="-122"/>
                           <a:cs typeface="Calibri" pitchFamily="34" charset="-120"/>
                         </a:rPr>
-                        <a:t>0.60%</a:t>
+                        <a:t>0.61%</a:t>
                       </a:r>
                       <a:endParaRPr lang="en-US" sz="500" dirty="0">
                         <a:latin typeface="Calibri" charset="0"/>
@@ -14992,7 +15920,7 @@
                           <a:ea typeface="Calibri" pitchFamily="34" charset="-122"/>
                           <a:cs typeface="Calibri" pitchFamily="34" charset="-120"/>
                         </a:rPr>
-                        <a:t>0.60%</a:t>
+                        <a:t>0.56%</a:t>
                       </a:r>
                       <a:endParaRPr lang="en-US" sz="500" dirty="0">
                         <a:latin typeface="Calibri" charset="0"/>
@@ -15057,6 +15985,71 @@
                           <a:ea typeface="Calibri" pitchFamily="34" charset="-122"/>
                           <a:cs typeface="Calibri" pitchFamily="34" charset="-120"/>
                         </a:rPr>
+                        <a:t>0.61%</a:t>
+                      </a:r>
+                      <a:endParaRPr lang="en-US" sz="500" dirty="0">
+                        <a:latin typeface="Calibri" charset="0"/>
+                        <a:ea typeface="Calibri" charset="0"/>
+                        <a:cs typeface="Calibri" charset="0"/>
+                      </a:endParaRPr>
+                    </a:p>
+                  </a:txBody>
+                  <a:tcPr marL="91440" marR="91440" marT="45720" marB="45720">
+                    <a:lnL w="2540" cap="flat" cmpd="sng" algn="ctr">
+                      <a:solidFill>
+                        <a:srgbClr val="EEEEEE"/>
+                      </a:solidFill>
+                      <a:prstDash val="solid"/>
+                      <a:round/>
+                      <a:headEnd type="none" w="med" len="med"/>
+                      <a:tailEnd type="none" w="med" len="med"/>
+                    </a:lnL>
+                    <a:lnR w="2540" cap="flat" cmpd="sng" algn="ctr">
+                      <a:solidFill>
+                        <a:srgbClr val="EEEEEE"/>
+                      </a:solidFill>
+                      <a:prstDash val="solid"/>
+                      <a:round/>
+                      <a:headEnd type="none" w="med" len="med"/>
+                      <a:tailEnd type="none" w="med" len="med"/>
+                    </a:lnR>
+                    <a:lnT w="2540" cap="flat" cmpd="sng" algn="ctr">
+                      <a:solidFill>
+                        <a:srgbClr val="EEEEEE"/>
+                      </a:solidFill>
+                      <a:prstDash val="solid"/>
+                      <a:round/>
+                      <a:headEnd type="none" w="med" len="med"/>
+                      <a:tailEnd type="none" w="med" len="med"/>
+                    </a:lnT>
+                    <a:lnB w="2540" cap="flat" cmpd="sng" algn="ctr">
+                      <a:solidFill>
+                        <a:srgbClr val="EEEEEE"/>
+                      </a:solidFill>
+                      <a:prstDash val="solid"/>
+                      <a:round/>
+                      <a:headEnd type="none" w="med" len="med"/>
+                      <a:tailEnd type="none" w="med" len="med"/>
+                    </a:lnB>
+                  </a:tcPr>
+                </a:tc>
+                <a:tc>
+                  <a:txBody>
+                    <a:bodyPr/>
+                    <a:lstStyle/>
+                    <a:p>
+                      <a:pPr algn="ctr" indent="0" marL="0">
+                        <a:buNone/>
+                      </a:pPr>
+                      <a:r>
+                        <a:rPr lang="en-US" sz="500" dirty="0">
+                          <a:solidFill>
+                            <a:srgbClr val="777777"/>
+                          </a:solidFill>
+                          <a:latin typeface="Calibri" pitchFamily="34" charset="0"/>
+                          <a:ea typeface="Calibri" pitchFamily="34" charset="-122"/>
+                          <a:cs typeface="Calibri" pitchFamily="34" charset="-120"/>
+                        </a:rPr>
                         <a:t>0.55%</a:t>
                       </a:r>
                       <a:endParaRPr lang="en-US" sz="500" dirty="0">
@@ -15122,6 +16115,71 @@
                           <a:ea typeface="Calibri" pitchFamily="34" charset="-122"/>
                           <a:cs typeface="Calibri" pitchFamily="34" charset="-120"/>
                         </a:rPr>
+                        <a:t>0.46%</a:t>
+                      </a:r>
+                      <a:endParaRPr lang="en-US" sz="500" dirty="0">
+                        <a:latin typeface="Calibri" charset="0"/>
+                        <a:ea typeface="Calibri" charset="0"/>
+                        <a:cs typeface="Calibri" charset="0"/>
+                      </a:endParaRPr>
+                    </a:p>
+                  </a:txBody>
+                  <a:tcPr marL="91440" marR="91440" marT="45720" marB="45720">
+                    <a:lnL w="2540" cap="flat" cmpd="sng" algn="ctr">
+                      <a:solidFill>
+                        <a:srgbClr val="EEEEEE"/>
+                      </a:solidFill>
+                      <a:prstDash val="solid"/>
+                      <a:round/>
+                      <a:headEnd type="none" w="med" len="med"/>
+                      <a:tailEnd type="none" w="med" len="med"/>
+                    </a:lnL>
+                    <a:lnR w="2540" cap="flat" cmpd="sng" algn="ctr">
+                      <a:solidFill>
+                        <a:srgbClr val="EEEEEE"/>
+                      </a:solidFill>
+                      <a:prstDash val="solid"/>
+                      <a:round/>
+                      <a:headEnd type="none" w="med" len="med"/>
+                      <a:tailEnd type="none" w="med" len="med"/>
+                    </a:lnR>
+                    <a:lnT w="2540" cap="flat" cmpd="sng" algn="ctr">
+                      <a:solidFill>
+                        <a:srgbClr val="EEEEEE"/>
+                      </a:solidFill>
+                      <a:prstDash val="solid"/>
+                      <a:round/>
+                      <a:headEnd type="none" w="med" len="med"/>
+                      <a:tailEnd type="none" w="med" len="med"/>
+                    </a:lnT>
+                    <a:lnB w="2540" cap="flat" cmpd="sng" algn="ctr">
+                      <a:solidFill>
+                        <a:srgbClr val="EEEEEE"/>
+                      </a:solidFill>
+                      <a:prstDash val="solid"/>
+                      <a:round/>
+                      <a:headEnd type="none" w="med" len="med"/>
+                      <a:tailEnd type="none" w="med" len="med"/>
+                    </a:lnB>
+                  </a:tcPr>
+                </a:tc>
+                <a:tc>
+                  <a:txBody>
+                    <a:bodyPr/>
+                    <a:lstStyle/>
+                    <a:p>
+                      <a:pPr algn="ctr" indent="0" marL="0">
+                        <a:buNone/>
+                      </a:pPr>
+                      <a:r>
+                        <a:rPr lang="en-US" sz="500" dirty="0">
+                          <a:solidFill>
+                            <a:srgbClr val="777777"/>
+                          </a:solidFill>
+                          <a:latin typeface="Calibri" pitchFamily="34" charset="0"/>
+                          <a:ea typeface="Calibri" pitchFamily="34" charset="-122"/>
+                          <a:cs typeface="Calibri" pitchFamily="34" charset="-120"/>
+                        </a:rPr>
                         <a:t>0.53%</a:t>
                       </a:r>
                       <a:endParaRPr lang="en-US" sz="500" dirty="0">
@@ -15187,7 +16245,7 @@
                           <a:ea typeface="Calibri" pitchFamily="34" charset="-122"/>
                           <a:cs typeface="Calibri" pitchFamily="34" charset="-120"/>
                         </a:rPr>
-                        <a:t>0.49%</a:t>
+                        <a:t>0.48%</a:t>
                       </a:r>
                       <a:endParaRPr lang="en-US" sz="500" dirty="0">
                         <a:latin typeface="Calibri" charset="0"/>
@@ -15317,7 +16375,7 @@
                           <a:ea typeface="Calibri" pitchFamily="34" charset="-122"/>
                           <a:cs typeface="Calibri" pitchFamily="34" charset="-120"/>
                         </a:rPr>
-                        <a:t>0.48%</a:t>
+                        <a:t>0.45%</a:t>
                       </a:r>
                       <a:endParaRPr lang="en-US" sz="500" dirty="0">
                         <a:latin typeface="Calibri" charset="0"/>
@@ -15382,7 +16440,7 @@
                           <a:ea typeface="Calibri" pitchFamily="34" charset="-122"/>
                           <a:cs typeface="Calibri" pitchFamily="34" charset="-120"/>
                         </a:rPr>
-                        <a:t>0.46%</a:t>
+                        <a:t>0.44%</a:t>
                       </a:r>
                       <a:endParaRPr lang="en-US" sz="500" dirty="0">
                         <a:latin typeface="Calibri" charset="0"/>
@@ -15447,64 +16505,64 @@
                           <a:ea typeface="Calibri" pitchFamily="34" charset="-122"/>
                           <a:cs typeface="Calibri" pitchFamily="34" charset="-120"/>
                         </a:rPr>
-                        <a:t>0.45%</a:t>
-                      </a:r>
-                      <a:endParaRPr lang="en-US" sz="500" dirty="0">
-                        <a:latin typeface="Calibri" charset="0"/>
-                        <a:ea typeface="Calibri" charset="0"/>
-                        <a:cs typeface="Calibri" charset="0"/>
-                      </a:endParaRPr>
-                    </a:p>
-                  </a:txBody>
-                  <a:tcPr marL="91440" marR="91440" marT="45720" marB="45720">
-                    <a:lnL w="2540" cap="flat" cmpd="sng" algn="ctr">
-                      <a:solidFill>
-                        <a:srgbClr val="EEEEEE"/>
-                      </a:solidFill>
-                      <a:prstDash val="solid"/>
-                      <a:round/>
-                      <a:headEnd type="none" w="med" len="med"/>
-                      <a:tailEnd type="none" w="med" len="med"/>
-                    </a:lnL>
-                    <a:lnR w="2540" cap="flat" cmpd="sng" algn="ctr">
-                      <a:solidFill>
-                        <a:srgbClr val="EEEEEE"/>
-                      </a:solidFill>
-                      <a:prstDash val="solid"/>
-                      <a:round/>
-                      <a:headEnd type="none" w="med" len="med"/>
-                      <a:tailEnd type="none" w="med" len="med"/>
-                    </a:lnR>
-                    <a:lnT w="2540" cap="flat" cmpd="sng" algn="ctr">
-                      <a:solidFill>
-                        <a:srgbClr val="EEEEEE"/>
-                      </a:solidFill>
-                      <a:prstDash val="solid"/>
-                      <a:round/>
-                      <a:headEnd type="none" w="med" len="med"/>
-                      <a:tailEnd type="none" w="med" len="med"/>
-                    </a:lnT>
-                    <a:lnB w="2540" cap="flat" cmpd="sng" algn="ctr">
-                      <a:solidFill>
-                        <a:srgbClr val="EEEEEE"/>
-                      </a:solidFill>
-                      <a:prstDash val="solid"/>
-                      <a:round/>
-                      <a:headEnd type="none" w="med" len="med"/>
-                      <a:tailEnd type="none" w="med" len="med"/>
-                    </a:lnB>
-                  </a:tcPr>
-                </a:tc>
-                <a:tc>
-                  <a:txBody>
-                    <a:bodyPr/>
-                    <a:lstStyle/>
-                    <a:p>
-                      <a:pPr algn="ctr" indent="0" marL="0">
-                        <a:buNone/>
-                      </a:pPr>
-                      <a:r>
-                        <a:rPr lang="en-US" sz="500" dirty="0">
+                        <a:t>0.44%</a:t>
+                      </a:r>
+                      <a:endParaRPr lang="en-US" sz="500" dirty="0">
+                        <a:latin typeface="Calibri" charset="0"/>
+                        <a:ea typeface="Calibri" charset="0"/>
+                        <a:cs typeface="Calibri" charset="0"/>
+                      </a:endParaRPr>
+                    </a:p>
+                  </a:txBody>
+                  <a:tcPr marL="91440" marR="91440" marT="45720" marB="45720">
+                    <a:lnL w="2540" cap="flat" cmpd="sng" algn="ctr">
+                      <a:solidFill>
+                        <a:srgbClr val="EEEEEE"/>
+                      </a:solidFill>
+                      <a:prstDash val="solid"/>
+                      <a:round/>
+                      <a:headEnd type="none" w="med" len="med"/>
+                      <a:tailEnd type="none" w="med" len="med"/>
+                    </a:lnL>
+                    <a:lnR w="2540" cap="flat" cmpd="sng" algn="ctr">
+                      <a:solidFill>
+                        <a:srgbClr val="EEEEEE"/>
+                      </a:solidFill>
+                      <a:prstDash val="solid"/>
+                      <a:round/>
+                      <a:headEnd type="none" w="med" len="med"/>
+                      <a:tailEnd type="none" w="med" len="med"/>
+                    </a:lnR>
+                    <a:lnT w="2540" cap="flat" cmpd="sng" algn="ctr">
+                      <a:solidFill>
+                        <a:srgbClr val="EEEEEE"/>
+                      </a:solidFill>
+                      <a:prstDash val="solid"/>
+                      <a:round/>
+                      <a:headEnd type="none" w="med" len="med"/>
+                      <a:tailEnd type="none" w="med" len="med"/>
+                    </a:lnT>
+                    <a:lnB w="2540" cap="flat" cmpd="sng" algn="ctr">
+                      <a:solidFill>
+                        <a:srgbClr val="EEEEEE"/>
+                      </a:solidFill>
+                      <a:prstDash val="solid"/>
+                      <a:round/>
+                      <a:headEnd type="none" w="med" len="med"/>
+                      <a:tailEnd type="none" w="med" len="med"/>
+                    </a:lnB>
+                  </a:tcPr>
+                </a:tc>
+                <a:tc>
+                  <a:txBody>
+                    <a:bodyPr/>
+                    <a:lstStyle/>
+                    <a:p>
+                      <a:pPr algn="ctr" indent="0" marL="0">
+                        <a:buNone/>
+                      </a:pPr>
+                      <a:r>
+                        <a:rPr lang="en-US" sz="500" b="1" dirty="0">
                           <a:solidFill>
                             <a:srgbClr val="777777"/>
                           </a:solidFill>
@@ -15512,137 +16570,7 @@
                           <a:ea typeface="Calibri" pitchFamily="34" charset="-122"/>
                           <a:cs typeface="Calibri" pitchFamily="34" charset="-120"/>
                         </a:rPr>
-                        <a:t>0.44%</a:t>
-                      </a:r>
-                      <a:endParaRPr lang="en-US" sz="500" dirty="0">
-                        <a:latin typeface="Calibri" charset="0"/>
-                        <a:ea typeface="Calibri" charset="0"/>
-                        <a:cs typeface="Calibri" charset="0"/>
-                      </a:endParaRPr>
-                    </a:p>
-                  </a:txBody>
-                  <a:tcPr marL="91440" marR="91440" marT="45720" marB="45720">
-                    <a:lnL w="2540" cap="flat" cmpd="sng" algn="ctr">
-                      <a:solidFill>
-                        <a:srgbClr val="EEEEEE"/>
-                      </a:solidFill>
-                      <a:prstDash val="solid"/>
-                      <a:round/>
-                      <a:headEnd type="none" w="med" len="med"/>
-                      <a:tailEnd type="none" w="med" len="med"/>
-                    </a:lnL>
-                    <a:lnR w="2540" cap="flat" cmpd="sng" algn="ctr">
-                      <a:solidFill>
-                        <a:srgbClr val="EEEEEE"/>
-                      </a:solidFill>
-                      <a:prstDash val="solid"/>
-                      <a:round/>
-                      <a:headEnd type="none" w="med" len="med"/>
-                      <a:tailEnd type="none" w="med" len="med"/>
-                    </a:lnR>
-                    <a:lnT w="2540" cap="flat" cmpd="sng" algn="ctr">
-                      <a:solidFill>
-                        <a:srgbClr val="EEEEEE"/>
-                      </a:solidFill>
-                      <a:prstDash val="solid"/>
-                      <a:round/>
-                      <a:headEnd type="none" w="med" len="med"/>
-                      <a:tailEnd type="none" w="med" len="med"/>
-                    </a:lnT>
-                    <a:lnB w="2540" cap="flat" cmpd="sng" algn="ctr">
-                      <a:solidFill>
-                        <a:srgbClr val="EEEEEE"/>
-                      </a:solidFill>
-                      <a:prstDash val="solid"/>
-                      <a:round/>
-                      <a:headEnd type="none" w="med" len="med"/>
-                      <a:tailEnd type="none" w="med" len="med"/>
-                    </a:lnB>
-                  </a:tcPr>
-                </a:tc>
-                <a:tc>
-                  <a:txBody>
-                    <a:bodyPr/>
-                    <a:lstStyle/>
-                    <a:p>
-                      <a:pPr algn="ctr" indent="0" marL="0">
-                        <a:buNone/>
-                      </a:pPr>
-                      <a:r>
-                        <a:rPr lang="en-US" sz="500" dirty="0">
-                          <a:solidFill>
-                            <a:srgbClr val="777777"/>
-                          </a:solidFill>
-                          <a:latin typeface="Calibri" pitchFamily="34" charset="0"/>
-                          <a:ea typeface="Calibri" pitchFamily="34" charset="-122"/>
-                          <a:cs typeface="Calibri" pitchFamily="34" charset="-120"/>
-                        </a:rPr>
-                        <a:t>0.43%</a:t>
-                      </a:r>
-                      <a:endParaRPr lang="en-US" sz="500" dirty="0">
-                        <a:latin typeface="Calibri" charset="0"/>
-                        <a:ea typeface="Calibri" charset="0"/>
-                        <a:cs typeface="Calibri" charset="0"/>
-                      </a:endParaRPr>
-                    </a:p>
-                  </a:txBody>
-                  <a:tcPr marL="91440" marR="91440" marT="45720" marB="45720">
-                    <a:lnL w="2540" cap="flat" cmpd="sng" algn="ctr">
-                      <a:solidFill>
-                        <a:srgbClr val="EEEEEE"/>
-                      </a:solidFill>
-                      <a:prstDash val="solid"/>
-                      <a:round/>
-                      <a:headEnd type="none" w="med" len="med"/>
-                      <a:tailEnd type="none" w="med" len="med"/>
-                    </a:lnL>
-                    <a:lnR w="2540" cap="flat" cmpd="sng" algn="ctr">
-                      <a:solidFill>
-                        <a:srgbClr val="EEEEEE"/>
-                      </a:solidFill>
-                      <a:prstDash val="solid"/>
-                      <a:round/>
-                      <a:headEnd type="none" w="med" len="med"/>
-                      <a:tailEnd type="none" w="med" len="med"/>
-                    </a:lnR>
-                    <a:lnT w="2540" cap="flat" cmpd="sng" algn="ctr">
-                      <a:solidFill>
-                        <a:srgbClr val="EEEEEE"/>
-                      </a:solidFill>
-                      <a:prstDash val="solid"/>
-                      <a:round/>
-                      <a:headEnd type="none" w="med" len="med"/>
-                      <a:tailEnd type="none" w="med" len="med"/>
-                    </a:lnT>
-                    <a:lnB w="2540" cap="flat" cmpd="sng" algn="ctr">
-                      <a:solidFill>
-                        <a:srgbClr val="EEEEEE"/>
-                      </a:solidFill>
-                      <a:prstDash val="solid"/>
-                      <a:round/>
-                      <a:headEnd type="none" w="med" len="med"/>
-                      <a:tailEnd type="none" w="med" len="med"/>
-                    </a:lnB>
-                  </a:tcPr>
-                </a:tc>
-                <a:tc>
-                  <a:txBody>
-                    <a:bodyPr/>
-                    <a:lstStyle/>
-                    <a:p>
-                      <a:pPr algn="ctr" indent="0" marL="0">
-                        <a:buNone/>
-                      </a:pPr>
-                      <a:r>
-                        <a:rPr lang="en-US" sz="500" b="1" dirty="0">
-                          <a:solidFill>
-                            <a:srgbClr val="777777"/>
-                          </a:solidFill>
-                          <a:latin typeface="Calibri" pitchFamily="34" charset="0"/>
-                          <a:ea typeface="Calibri" pitchFamily="34" charset="-122"/>
-                          <a:cs typeface="Calibri" pitchFamily="34" charset="-120"/>
-                        </a:rPr>
-                        <a:t>6.38%</a:t>
+                        <a:t>6.54%</a:t>
                       </a:r>
                       <a:endParaRPr lang="en-US" sz="500" dirty="0">
                         <a:latin typeface="Calibri" charset="0"/>
@@ -15828,7 +16756,7 @@
                           <a:ea typeface="Calibri" pitchFamily="34" charset="-122"/>
                           <a:cs typeface="Calibri" pitchFamily="34" charset="-120"/>
                         </a:rPr>
-                        <a:t>0.00%</a:t>
+                        <a:t>0.59%</a:t>
                       </a:r>
                       <a:endParaRPr lang="en-US" sz="500" dirty="0">
                         <a:latin typeface="Calibri" charset="0"/>
@@ -16543,7 +17471,7 @@
                           <a:ea typeface="Calibri" pitchFamily="34" charset="-122"/>
                           <a:cs typeface="Calibri" pitchFamily="34" charset="-120"/>
                         </a:rPr>
-                        <a:t>-2.99%</a:t>
+                        <a:t>0.32%</a:t>
                       </a:r>
                       <a:endParaRPr lang="en-US" sz="500" dirty="0">
                         <a:latin typeface="Calibri" charset="0"/>
@@ -16608,7 +17536,7 @@
                           <a:ea typeface="Calibri" pitchFamily="34" charset="-122"/>
                           <a:cs typeface="Calibri" pitchFamily="34" charset="-120"/>
                         </a:rPr>
-                        <a:t>0.90%</a:t>
+                        <a:t>4.95%</a:t>
                       </a:r>
                       <a:endParaRPr lang="en-US" sz="500" dirty="0">
                         <a:latin typeface="Calibri" charset="0"/>
@@ -16721,7 +17649,7 @@
                         <a:buNone/>
                       </a:pPr>
                       <a:r>
-                        <a:rPr lang="en-US" sz="500" dirty="0">
+                        <a:rPr lang="en-US" sz="400" dirty="0">
                           <a:solidFill>
                             <a:srgbClr val="000000"/>
                           </a:solidFill>
@@ -16731,7 +17659,7 @@
                         </a:rPr>
                         <a:t>FIP LIQUIDEZ EFECTIVO</a:t>
                       </a:r>
-                      <a:endParaRPr lang="en-US" sz="500" dirty="0">
+                      <a:endParaRPr lang="en-US" sz="400" dirty="0">
                         <a:latin typeface="Calibri" charset="0"/>
                         <a:ea typeface="Calibri" charset="0"/>
                         <a:cs typeface="Calibri" charset="0"/>
@@ -17771,6 +18699,201 @@
                           <a:ea typeface="Calibri" pitchFamily="34" charset="-122"/>
                           <a:cs typeface="Calibri" pitchFamily="34" charset="-120"/>
                         </a:rPr>
+                        <a:t>0.45%</a:t>
+                      </a:r>
+                      <a:endParaRPr lang="en-US" sz="500" dirty="0">
+                        <a:latin typeface="Calibri" charset="0"/>
+                        <a:ea typeface="Calibri" charset="0"/>
+                        <a:cs typeface="Calibri" charset="0"/>
+                      </a:endParaRPr>
+                    </a:p>
+                  </a:txBody>
+                  <a:tcPr marL="91440" marR="91440" marT="45720" marB="45720">
+                    <a:lnL w="2540" cap="flat" cmpd="sng" algn="ctr">
+                      <a:solidFill>
+                        <a:srgbClr val="EEEEEE"/>
+                      </a:solidFill>
+                      <a:prstDash val="solid"/>
+                      <a:round/>
+                      <a:headEnd type="none" w="med" len="med"/>
+                      <a:tailEnd type="none" w="med" len="med"/>
+                    </a:lnL>
+                    <a:lnR w="2540" cap="flat" cmpd="sng" algn="ctr">
+                      <a:solidFill>
+                        <a:srgbClr val="EEEEEE"/>
+                      </a:solidFill>
+                      <a:prstDash val="solid"/>
+                      <a:round/>
+                      <a:headEnd type="none" w="med" len="med"/>
+                      <a:tailEnd type="none" w="med" len="med"/>
+                    </a:lnR>
+                    <a:lnT w="2540" cap="flat" cmpd="sng" algn="ctr">
+                      <a:solidFill>
+                        <a:srgbClr val="EEEEEE"/>
+                      </a:solidFill>
+                      <a:prstDash val="solid"/>
+                      <a:round/>
+                      <a:headEnd type="none" w="med" len="med"/>
+                      <a:tailEnd type="none" w="med" len="med"/>
+                    </a:lnT>
+                    <a:lnB w="2540" cap="flat" cmpd="sng" algn="ctr">
+                      <a:solidFill>
+                        <a:srgbClr val="EEEEEE"/>
+                      </a:solidFill>
+                      <a:prstDash val="solid"/>
+                      <a:round/>
+                      <a:headEnd type="none" w="med" len="med"/>
+                      <a:tailEnd type="none" w="med" len="med"/>
+                    </a:lnB>
+                  </a:tcPr>
+                </a:tc>
+                <a:tc>
+                  <a:txBody>
+                    <a:bodyPr/>
+                    <a:lstStyle/>
+                    <a:p>
+                      <a:pPr algn="ctr" indent="0" marL="0">
+                        <a:buNone/>
+                      </a:pPr>
+                      <a:r>
+                        <a:rPr lang="en-US" sz="500" dirty="0">
+                          <a:solidFill>
+                            <a:srgbClr val="777777"/>
+                          </a:solidFill>
+                          <a:latin typeface="Calibri" pitchFamily="34" charset="0"/>
+                          <a:ea typeface="Calibri" pitchFamily="34" charset="-122"/>
+                          <a:cs typeface="Calibri" pitchFamily="34" charset="-120"/>
+                        </a:rPr>
+                        <a:t>0.39%</a:t>
+                      </a:r>
+                      <a:endParaRPr lang="en-US" sz="500" dirty="0">
+                        <a:latin typeface="Calibri" charset="0"/>
+                        <a:ea typeface="Calibri" charset="0"/>
+                        <a:cs typeface="Calibri" charset="0"/>
+                      </a:endParaRPr>
+                    </a:p>
+                  </a:txBody>
+                  <a:tcPr marL="91440" marR="91440" marT="45720" marB="45720">
+                    <a:lnL w="2540" cap="flat" cmpd="sng" algn="ctr">
+                      <a:solidFill>
+                        <a:srgbClr val="EEEEEE"/>
+                      </a:solidFill>
+                      <a:prstDash val="solid"/>
+                      <a:round/>
+                      <a:headEnd type="none" w="med" len="med"/>
+                      <a:tailEnd type="none" w="med" len="med"/>
+                    </a:lnL>
+                    <a:lnR w="2540" cap="flat" cmpd="sng" algn="ctr">
+                      <a:solidFill>
+                        <a:srgbClr val="EEEEEE"/>
+                      </a:solidFill>
+                      <a:prstDash val="solid"/>
+                      <a:round/>
+                      <a:headEnd type="none" w="med" len="med"/>
+                      <a:tailEnd type="none" w="med" len="med"/>
+                    </a:lnR>
+                    <a:lnT w="2540" cap="flat" cmpd="sng" algn="ctr">
+                      <a:solidFill>
+                        <a:srgbClr val="EEEEEE"/>
+                      </a:solidFill>
+                      <a:prstDash val="solid"/>
+                      <a:round/>
+                      <a:headEnd type="none" w="med" len="med"/>
+                      <a:tailEnd type="none" w="med" len="med"/>
+                    </a:lnT>
+                    <a:lnB w="2540" cap="flat" cmpd="sng" algn="ctr">
+                      <a:solidFill>
+                        <a:srgbClr val="EEEEEE"/>
+                      </a:solidFill>
+                      <a:prstDash val="solid"/>
+                      <a:round/>
+                      <a:headEnd type="none" w="med" len="med"/>
+                      <a:tailEnd type="none" w="med" len="med"/>
+                    </a:lnB>
+                  </a:tcPr>
+                </a:tc>
+                <a:tc>
+                  <a:txBody>
+                    <a:bodyPr/>
+                    <a:lstStyle/>
+                    <a:p>
+                      <a:pPr algn="ctr" indent="0" marL="0">
+                        <a:buNone/>
+                      </a:pPr>
+                      <a:r>
+                        <a:rPr lang="en-US" sz="500" dirty="0">
+                          <a:solidFill>
+                            <a:srgbClr val="777777"/>
+                          </a:solidFill>
+                          <a:latin typeface="Calibri" pitchFamily="34" charset="0"/>
+                          <a:ea typeface="Calibri" pitchFamily="34" charset="-122"/>
+                          <a:cs typeface="Calibri" pitchFamily="34" charset="-120"/>
+                        </a:rPr>
+                        <a:t>0.43%</a:t>
+                      </a:r>
+                      <a:endParaRPr lang="en-US" sz="500" dirty="0">
+                        <a:latin typeface="Calibri" charset="0"/>
+                        <a:ea typeface="Calibri" charset="0"/>
+                        <a:cs typeface="Calibri" charset="0"/>
+                      </a:endParaRPr>
+                    </a:p>
+                  </a:txBody>
+                  <a:tcPr marL="91440" marR="91440" marT="45720" marB="45720">
+                    <a:lnL w="2540" cap="flat" cmpd="sng" algn="ctr">
+                      <a:solidFill>
+                        <a:srgbClr val="EEEEEE"/>
+                      </a:solidFill>
+                      <a:prstDash val="solid"/>
+                      <a:round/>
+                      <a:headEnd type="none" w="med" len="med"/>
+                      <a:tailEnd type="none" w="med" len="med"/>
+                    </a:lnL>
+                    <a:lnR w="2540" cap="flat" cmpd="sng" algn="ctr">
+                      <a:solidFill>
+                        <a:srgbClr val="EEEEEE"/>
+                      </a:solidFill>
+                      <a:prstDash val="solid"/>
+                      <a:round/>
+                      <a:headEnd type="none" w="med" len="med"/>
+                      <a:tailEnd type="none" w="med" len="med"/>
+                    </a:lnR>
+                    <a:lnT w="2540" cap="flat" cmpd="sng" algn="ctr">
+                      <a:solidFill>
+                        <a:srgbClr val="EEEEEE"/>
+                      </a:solidFill>
+                      <a:prstDash val="solid"/>
+                      <a:round/>
+                      <a:headEnd type="none" w="med" len="med"/>
+                      <a:tailEnd type="none" w="med" len="med"/>
+                    </a:lnT>
+                    <a:lnB w="2540" cap="flat" cmpd="sng" algn="ctr">
+                      <a:solidFill>
+                        <a:srgbClr val="EEEEEE"/>
+                      </a:solidFill>
+                      <a:prstDash val="solid"/>
+                      <a:round/>
+                      <a:headEnd type="none" w="med" len="med"/>
+                      <a:tailEnd type="none" w="med" len="med"/>
+                    </a:lnB>
+                  </a:tcPr>
+                </a:tc>
+                <a:tc>
+                  <a:txBody>
+                    <a:bodyPr/>
+                    <a:lstStyle/>
+                    <a:p>
+                      <a:pPr algn="ctr" indent="0" marL="0">
+                        <a:buNone/>
+                      </a:pPr>
+                      <a:r>
+                        <a:rPr lang="en-US" sz="500" dirty="0">
+                          <a:solidFill>
+                            <a:srgbClr val="777777"/>
+                          </a:solidFill>
+                          <a:latin typeface="Calibri" pitchFamily="34" charset="0"/>
+                          <a:ea typeface="Calibri" pitchFamily="34" charset="-122"/>
+                          <a:cs typeface="Calibri" pitchFamily="34" charset="-120"/>
+                        </a:rPr>
                         <a:t>0.42%</a:t>
                       </a:r>
                       <a:endParaRPr lang="en-US" sz="500" dirty="0">
@@ -17901,6 +19024,201 @@
                           <a:ea typeface="Calibri" pitchFamily="34" charset="-122"/>
                           <a:cs typeface="Calibri" pitchFamily="34" charset="-120"/>
                         </a:rPr>
+                        <a:t>0.43%</a:t>
+                      </a:r>
+                      <a:endParaRPr lang="en-US" sz="500" dirty="0">
+                        <a:latin typeface="Calibri" charset="0"/>
+                        <a:ea typeface="Calibri" charset="0"/>
+                        <a:cs typeface="Calibri" charset="0"/>
+                      </a:endParaRPr>
+                    </a:p>
+                  </a:txBody>
+                  <a:tcPr marL="91440" marR="91440" marT="45720" marB="45720">
+                    <a:lnL w="2540" cap="flat" cmpd="sng" algn="ctr">
+                      <a:solidFill>
+                        <a:srgbClr val="EEEEEE"/>
+                      </a:solidFill>
+                      <a:prstDash val="solid"/>
+                      <a:round/>
+                      <a:headEnd type="none" w="med" len="med"/>
+                      <a:tailEnd type="none" w="med" len="med"/>
+                    </a:lnL>
+                    <a:lnR w="2540" cap="flat" cmpd="sng" algn="ctr">
+                      <a:solidFill>
+                        <a:srgbClr val="EEEEEE"/>
+                      </a:solidFill>
+                      <a:prstDash val="solid"/>
+                      <a:round/>
+                      <a:headEnd type="none" w="med" len="med"/>
+                      <a:tailEnd type="none" w="med" len="med"/>
+                    </a:lnR>
+                    <a:lnT w="2540" cap="flat" cmpd="sng" algn="ctr">
+                      <a:solidFill>
+                        <a:srgbClr val="EEEEEE"/>
+                      </a:solidFill>
+                      <a:prstDash val="solid"/>
+                      <a:round/>
+                      <a:headEnd type="none" w="med" len="med"/>
+                      <a:tailEnd type="none" w="med" len="med"/>
+                    </a:lnT>
+                    <a:lnB w="2540" cap="flat" cmpd="sng" algn="ctr">
+                      <a:solidFill>
+                        <a:srgbClr val="EEEEEE"/>
+                      </a:solidFill>
+                      <a:prstDash val="solid"/>
+                      <a:round/>
+                      <a:headEnd type="none" w="med" len="med"/>
+                      <a:tailEnd type="none" w="med" len="med"/>
+                    </a:lnB>
+                  </a:tcPr>
+                </a:tc>
+                <a:tc>
+                  <a:txBody>
+                    <a:bodyPr/>
+                    <a:lstStyle/>
+                    <a:p>
+                      <a:pPr algn="ctr" indent="0" marL="0">
+                        <a:buNone/>
+                      </a:pPr>
+                      <a:r>
+                        <a:rPr lang="en-US" sz="500" dirty="0">
+                          <a:solidFill>
+                            <a:srgbClr val="777777"/>
+                          </a:solidFill>
+                          <a:latin typeface="Calibri" pitchFamily="34" charset="0"/>
+                          <a:ea typeface="Calibri" pitchFamily="34" charset="-122"/>
+                          <a:cs typeface="Calibri" pitchFamily="34" charset="-120"/>
+                        </a:rPr>
+                        <a:t>0.43%</a:t>
+                      </a:r>
+                      <a:endParaRPr lang="en-US" sz="500" dirty="0">
+                        <a:latin typeface="Calibri" charset="0"/>
+                        <a:ea typeface="Calibri" charset="0"/>
+                        <a:cs typeface="Calibri" charset="0"/>
+                      </a:endParaRPr>
+                    </a:p>
+                  </a:txBody>
+                  <a:tcPr marL="91440" marR="91440" marT="45720" marB="45720">
+                    <a:lnL w="2540" cap="flat" cmpd="sng" algn="ctr">
+                      <a:solidFill>
+                        <a:srgbClr val="EEEEEE"/>
+                      </a:solidFill>
+                      <a:prstDash val="solid"/>
+                      <a:round/>
+                      <a:headEnd type="none" w="med" len="med"/>
+                      <a:tailEnd type="none" w="med" len="med"/>
+                    </a:lnL>
+                    <a:lnR w="2540" cap="flat" cmpd="sng" algn="ctr">
+                      <a:solidFill>
+                        <a:srgbClr val="EEEEEE"/>
+                      </a:solidFill>
+                      <a:prstDash val="solid"/>
+                      <a:round/>
+                      <a:headEnd type="none" w="med" len="med"/>
+                      <a:tailEnd type="none" w="med" len="med"/>
+                    </a:lnR>
+                    <a:lnT w="2540" cap="flat" cmpd="sng" algn="ctr">
+                      <a:solidFill>
+                        <a:srgbClr val="EEEEEE"/>
+                      </a:solidFill>
+                      <a:prstDash val="solid"/>
+                      <a:round/>
+                      <a:headEnd type="none" w="med" len="med"/>
+                      <a:tailEnd type="none" w="med" len="med"/>
+                    </a:lnT>
+                    <a:lnB w="2540" cap="flat" cmpd="sng" algn="ctr">
+                      <a:solidFill>
+                        <a:srgbClr val="EEEEEE"/>
+                      </a:solidFill>
+                      <a:prstDash val="solid"/>
+                      <a:round/>
+                      <a:headEnd type="none" w="med" len="med"/>
+                      <a:tailEnd type="none" w="med" len="med"/>
+                    </a:lnB>
+                  </a:tcPr>
+                </a:tc>
+                <a:tc>
+                  <a:txBody>
+                    <a:bodyPr/>
+                    <a:lstStyle/>
+                    <a:p>
+                      <a:pPr algn="ctr" indent="0" marL="0">
+                        <a:buNone/>
+                      </a:pPr>
+                      <a:r>
+                        <a:rPr lang="en-US" sz="500" dirty="0">
+                          <a:solidFill>
+                            <a:srgbClr val="777777"/>
+                          </a:solidFill>
+                          <a:latin typeface="Calibri" pitchFamily="34" charset="0"/>
+                          <a:ea typeface="Calibri" pitchFamily="34" charset="-122"/>
+                          <a:cs typeface="Calibri" pitchFamily="34" charset="-120"/>
+                        </a:rPr>
+                        <a:t>0.38%</a:t>
+                      </a:r>
+                      <a:endParaRPr lang="en-US" sz="500" dirty="0">
+                        <a:latin typeface="Calibri" charset="0"/>
+                        <a:ea typeface="Calibri" charset="0"/>
+                        <a:cs typeface="Calibri" charset="0"/>
+                      </a:endParaRPr>
+                    </a:p>
+                  </a:txBody>
+                  <a:tcPr marL="91440" marR="91440" marT="45720" marB="45720">
+                    <a:lnL w="2540" cap="flat" cmpd="sng" algn="ctr">
+                      <a:solidFill>
+                        <a:srgbClr val="EEEEEE"/>
+                      </a:solidFill>
+                      <a:prstDash val="solid"/>
+                      <a:round/>
+                      <a:headEnd type="none" w="med" len="med"/>
+                      <a:tailEnd type="none" w="med" len="med"/>
+                    </a:lnL>
+                    <a:lnR w="2540" cap="flat" cmpd="sng" algn="ctr">
+                      <a:solidFill>
+                        <a:srgbClr val="EEEEEE"/>
+                      </a:solidFill>
+                      <a:prstDash val="solid"/>
+                      <a:round/>
+                      <a:headEnd type="none" w="med" len="med"/>
+                      <a:tailEnd type="none" w="med" len="med"/>
+                    </a:lnR>
+                    <a:lnT w="2540" cap="flat" cmpd="sng" algn="ctr">
+                      <a:solidFill>
+                        <a:srgbClr val="EEEEEE"/>
+                      </a:solidFill>
+                      <a:prstDash val="solid"/>
+                      <a:round/>
+                      <a:headEnd type="none" w="med" len="med"/>
+                      <a:tailEnd type="none" w="med" len="med"/>
+                    </a:lnT>
+                    <a:lnB w="2540" cap="flat" cmpd="sng" algn="ctr">
+                      <a:solidFill>
+                        <a:srgbClr val="EEEEEE"/>
+                      </a:solidFill>
+                      <a:prstDash val="solid"/>
+                      <a:round/>
+                      <a:headEnd type="none" w="med" len="med"/>
+                      <a:tailEnd type="none" w="med" len="med"/>
+                    </a:lnB>
+                  </a:tcPr>
+                </a:tc>
+                <a:tc>
+                  <a:txBody>
+                    <a:bodyPr/>
+                    <a:lstStyle/>
+                    <a:p>
+                      <a:pPr algn="ctr" indent="0" marL="0">
+                        <a:buNone/>
+                      </a:pPr>
+                      <a:r>
+                        <a:rPr lang="en-US" sz="500" dirty="0">
+                          <a:solidFill>
+                            <a:srgbClr val="777777"/>
+                          </a:solidFill>
+                          <a:latin typeface="Calibri" pitchFamily="34" charset="0"/>
+                          <a:ea typeface="Calibri" pitchFamily="34" charset="-122"/>
+                          <a:cs typeface="Calibri" pitchFamily="34" charset="-120"/>
+                        </a:rPr>
                         <a:t>0.42%</a:t>
                       </a:r>
                       <a:endParaRPr lang="en-US" sz="500" dirty="0">
@@ -17966,7 +19284,7 @@
                           <a:ea typeface="Calibri" pitchFamily="34" charset="-122"/>
                           <a:cs typeface="Calibri" pitchFamily="34" charset="-120"/>
                         </a:rPr>
-                        <a:t>0.42%</a:t>
+                        <a:t>0.40%</a:t>
                       </a:r>
                       <a:endParaRPr lang="en-US" sz="500" dirty="0">
                         <a:latin typeface="Calibri" charset="0"/>
@@ -18031,7 +19349,7 @@
                           <a:ea typeface="Calibri" pitchFamily="34" charset="-122"/>
                           <a:cs typeface="Calibri" pitchFamily="34" charset="-120"/>
                         </a:rPr>
-                        <a:t>0.42%</a:t>
+                        <a:t>0.38%</a:t>
                       </a:r>
                       <a:endParaRPr lang="en-US" sz="500" dirty="0">
                         <a:latin typeface="Calibri" charset="0"/>
@@ -18096,64 +19414,64 @@
                           <a:ea typeface="Calibri" pitchFamily="34" charset="-122"/>
                           <a:cs typeface="Calibri" pitchFamily="34" charset="-120"/>
                         </a:rPr>
-                        <a:t>0.42%</a:t>
-                      </a:r>
-                      <a:endParaRPr lang="en-US" sz="500" dirty="0">
-                        <a:latin typeface="Calibri" charset="0"/>
-                        <a:ea typeface="Calibri" charset="0"/>
-                        <a:cs typeface="Calibri" charset="0"/>
-                      </a:endParaRPr>
-                    </a:p>
-                  </a:txBody>
-                  <a:tcPr marL="91440" marR="91440" marT="45720" marB="45720">
-                    <a:lnL w="2540" cap="flat" cmpd="sng" algn="ctr">
-                      <a:solidFill>
-                        <a:srgbClr val="EEEEEE"/>
-                      </a:solidFill>
-                      <a:prstDash val="solid"/>
-                      <a:round/>
-                      <a:headEnd type="none" w="med" len="med"/>
-                      <a:tailEnd type="none" w="med" len="med"/>
-                    </a:lnL>
-                    <a:lnR w="2540" cap="flat" cmpd="sng" algn="ctr">
-                      <a:solidFill>
-                        <a:srgbClr val="EEEEEE"/>
-                      </a:solidFill>
-                      <a:prstDash val="solid"/>
-                      <a:round/>
-                      <a:headEnd type="none" w="med" len="med"/>
-                      <a:tailEnd type="none" w="med" len="med"/>
-                    </a:lnR>
-                    <a:lnT w="2540" cap="flat" cmpd="sng" algn="ctr">
-                      <a:solidFill>
-                        <a:srgbClr val="EEEEEE"/>
-                      </a:solidFill>
-                      <a:prstDash val="solid"/>
-                      <a:round/>
-                      <a:headEnd type="none" w="med" len="med"/>
-                      <a:tailEnd type="none" w="med" len="med"/>
-                    </a:lnT>
-                    <a:lnB w="2540" cap="flat" cmpd="sng" algn="ctr">
-                      <a:solidFill>
-                        <a:srgbClr val="EEEEEE"/>
-                      </a:solidFill>
-                      <a:prstDash val="solid"/>
-                      <a:round/>
-                      <a:headEnd type="none" w="med" len="med"/>
-                      <a:tailEnd type="none" w="med" len="med"/>
-                    </a:lnB>
-                  </a:tcPr>
-                </a:tc>
-                <a:tc>
-                  <a:txBody>
-                    <a:bodyPr/>
-                    <a:lstStyle/>
-                    <a:p>
-                      <a:pPr algn="ctr" indent="0" marL="0">
-                        <a:buNone/>
-                      </a:pPr>
-                      <a:r>
-                        <a:rPr lang="en-US" sz="500" dirty="0">
+                        <a:t>0.41%</a:t>
+                      </a:r>
+                      <a:endParaRPr lang="en-US" sz="500" dirty="0">
+                        <a:latin typeface="Calibri" charset="0"/>
+                        <a:ea typeface="Calibri" charset="0"/>
+                        <a:cs typeface="Calibri" charset="0"/>
+                      </a:endParaRPr>
+                    </a:p>
+                  </a:txBody>
+                  <a:tcPr marL="91440" marR="91440" marT="45720" marB="45720">
+                    <a:lnL w="2540" cap="flat" cmpd="sng" algn="ctr">
+                      <a:solidFill>
+                        <a:srgbClr val="EEEEEE"/>
+                      </a:solidFill>
+                      <a:prstDash val="solid"/>
+                      <a:round/>
+                      <a:headEnd type="none" w="med" len="med"/>
+                      <a:tailEnd type="none" w="med" len="med"/>
+                    </a:lnL>
+                    <a:lnR w="2540" cap="flat" cmpd="sng" algn="ctr">
+                      <a:solidFill>
+                        <a:srgbClr val="EEEEEE"/>
+                      </a:solidFill>
+                      <a:prstDash val="solid"/>
+                      <a:round/>
+                      <a:headEnd type="none" w="med" len="med"/>
+                      <a:tailEnd type="none" w="med" len="med"/>
+                    </a:lnR>
+                    <a:lnT w="2540" cap="flat" cmpd="sng" algn="ctr">
+                      <a:solidFill>
+                        <a:srgbClr val="EEEEEE"/>
+                      </a:solidFill>
+                      <a:prstDash val="solid"/>
+                      <a:round/>
+                      <a:headEnd type="none" w="med" len="med"/>
+                      <a:tailEnd type="none" w="med" len="med"/>
+                    </a:lnT>
+                    <a:lnB w="2540" cap="flat" cmpd="sng" algn="ctr">
+                      <a:solidFill>
+                        <a:srgbClr val="EEEEEE"/>
+                      </a:solidFill>
+                      <a:prstDash val="solid"/>
+                      <a:round/>
+                      <a:headEnd type="none" w="med" len="med"/>
+                      <a:tailEnd type="none" w="med" len="med"/>
+                    </a:lnB>
+                  </a:tcPr>
+                </a:tc>
+                <a:tc>
+                  <a:txBody>
+                    <a:bodyPr/>
+                    <a:lstStyle/>
+                    <a:p>
+                      <a:pPr algn="ctr" indent="0" marL="0">
+                        <a:buNone/>
+                      </a:pPr>
+                      <a:r>
+                        <a:rPr lang="en-US" sz="500" b="1" dirty="0">
                           <a:solidFill>
                             <a:srgbClr val="777777"/>
                           </a:solidFill>
@@ -18161,397 +19479,7 @@
                           <a:ea typeface="Calibri" pitchFamily="34" charset="-122"/>
                           <a:cs typeface="Calibri" pitchFamily="34" charset="-120"/>
                         </a:rPr>
-                        <a:t>0.41%</a:t>
-                      </a:r>
-                      <a:endParaRPr lang="en-US" sz="500" dirty="0">
-                        <a:latin typeface="Calibri" charset="0"/>
-                        <a:ea typeface="Calibri" charset="0"/>
-                        <a:cs typeface="Calibri" charset="0"/>
-                      </a:endParaRPr>
-                    </a:p>
-                  </a:txBody>
-                  <a:tcPr marL="91440" marR="91440" marT="45720" marB="45720">
-                    <a:lnL w="2540" cap="flat" cmpd="sng" algn="ctr">
-                      <a:solidFill>
-                        <a:srgbClr val="EEEEEE"/>
-                      </a:solidFill>
-                      <a:prstDash val="solid"/>
-                      <a:round/>
-                      <a:headEnd type="none" w="med" len="med"/>
-                      <a:tailEnd type="none" w="med" len="med"/>
-                    </a:lnL>
-                    <a:lnR w="2540" cap="flat" cmpd="sng" algn="ctr">
-                      <a:solidFill>
-                        <a:srgbClr val="EEEEEE"/>
-                      </a:solidFill>
-                      <a:prstDash val="solid"/>
-                      <a:round/>
-                      <a:headEnd type="none" w="med" len="med"/>
-                      <a:tailEnd type="none" w="med" len="med"/>
-                    </a:lnR>
-                    <a:lnT w="2540" cap="flat" cmpd="sng" algn="ctr">
-                      <a:solidFill>
-                        <a:srgbClr val="EEEEEE"/>
-                      </a:solidFill>
-                      <a:prstDash val="solid"/>
-                      <a:round/>
-                      <a:headEnd type="none" w="med" len="med"/>
-                      <a:tailEnd type="none" w="med" len="med"/>
-                    </a:lnT>
-                    <a:lnB w="2540" cap="flat" cmpd="sng" algn="ctr">
-                      <a:solidFill>
-                        <a:srgbClr val="EEEEEE"/>
-                      </a:solidFill>
-                      <a:prstDash val="solid"/>
-                      <a:round/>
-                      <a:headEnd type="none" w="med" len="med"/>
-                      <a:tailEnd type="none" w="med" len="med"/>
-                    </a:lnB>
-                  </a:tcPr>
-                </a:tc>
-                <a:tc>
-                  <a:txBody>
-                    <a:bodyPr/>
-                    <a:lstStyle/>
-                    <a:p>
-                      <a:pPr algn="ctr" indent="0" marL="0">
-                        <a:buNone/>
-                      </a:pPr>
-                      <a:r>
-                        <a:rPr lang="en-US" sz="500" dirty="0">
-                          <a:solidFill>
-                            <a:srgbClr val="777777"/>
-                          </a:solidFill>
-                          <a:latin typeface="Calibri" pitchFamily="34" charset="0"/>
-                          <a:ea typeface="Calibri" pitchFamily="34" charset="-122"/>
-                          <a:cs typeface="Calibri" pitchFamily="34" charset="-120"/>
-                        </a:rPr>
-                        <a:t>0.40%</a:t>
-                      </a:r>
-                      <a:endParaRPr lang="en-US" sz="500" dirty="0">
-                        <a:latin typeface="Calibri" charset="0"/>
-                        <a:ea typeface="Calibri" charset="0"/>
-                        <a:cs typeface="Calibri" charset="0"/>
-                      </a:endParaRPr>
-                    </a:p>
-                  </a:txBody>
-                  <a:tcPr marL="91440" marR="91440" marT="45720" marB="45720">
-                    <a:lnL w="2540" cap="flat" cmpd="sng" algn="ctr">
-                      <a:solidFill>
-                        <a:srgbClr val="EEEEEE"/>
-                      </a:solidFill>
-                      <a:prstDash val="solid"/>
-                      <a:round/>
-                      <a:headEnd type="none" w="med" len="med"/>
-                      <a:tailEnd type="none" w="med" len="med"/>
-                    </a:lnL>
-                    <a:lnR w="2540" cap="flat" cmpd="sng" algn="ctr">
-                      <a:solidFill>
-                        <a:srgbClr val="EEEEEE"/>
-                      </a:solidFill>
-                      <a:prstDash val="solid"/>
-                      <a:round/>
-                      <a:headEnd type="none" w="med" len="med"/>
-                      <a:tailEnd type="none" w="med" len="med"/>
-                    </a:lnR>
-                    <a:lnT w="2540" cap="flat" cmpd="sng" algn="ctr">
-                      <a:solidFill>
-                        <a:srgbClr val="EEEEEE"/>
-                      </a:solidFill>
-                      <a:prstDash val="solid"/>
-                      <a:round/>
-                      <a:headEnd type="none" w="med" len="med"/>
-                      <a:tailEnd type="none" w="med" len="med"/>
-                    </a:lnT>
-                    <a:lnB w="2540" cap="flat" cmpd="sng" algn="ctr">
-                      <a:solidFill>
-                        <a:srgbClr val="EEEEEE"/>
-                      </a:solidFill>
-                      <a:prstDash val="solid"/>
-                      <a:round/>
-                      <a:headEnd type="none" w="med" len="med"/>
-                      <a:tailEnd type="none" w="med" len="med"/>
-                    </a:lnB>
-                  </a:tcPr>
-                </a:tc>
-                <a:tc>
-                  <a:txBody>
-                    <a:bodyPr/>
-                    <a:lstStyle/>
-                    <a:p>
-                      <a:pPr algn="ctr" indent="0" marL="0">
-                        <a:buNone/>
-                      </a:pPr>
-                      <a:r>
-                        <a:rPr lang="en-US" sz="500" dirty="0">
-                          <a:solidFill>
-                            <a:srgbClr val="777777"/>
-                          </a:solidFill>
-                          <a:latin typeface="Calibri" pitchFamily="34" charset="0"/>
-                          <a:ea typeface="Calibri" pitchFamily="34" charset="-122"/>
-                          <a:cs typeface="Calibri" pitchFamily="34" charset="-120"/>
-                        </a:rPr>
-                        <a:t>0.40%</a:t>
-                      </a:r>
-                      <a:endParaRPr lang="en-US" sz="500" dirty="0">
-                        <a:latin typeface="Calibri" charset="0"/>
-                        <a:ea typeface="Calibri" charset="0"/>
-                        <a:cs typeface="Calibri" charset="0"/>
-                      </a:endParaRPr>
-                    </a:p>
-                  </a:txBody>
-                  <a:tcPr marL="91440" marR="91440" marT="45720" marB="45720">
-                    <a:lnL w="2540" cap="flat" cmpd="sng" algn="ctr">
-                      <a:solidFill>
-                        <a:srgbClr val="EEEEEE"/>
-                      </a:solidFill>
-                      <a:prstDash val="solid"/>
-                      <a:round/>
-                      <a:headEnd type="none" w="med" len="med"/>
-                      <a:tailEnd type="none" w="med" len="med"/>
-                    </a:lnL>
-                    <a:lnR w="2540" cap="flat" cmpd="sng" algn="ctr">
-                      <a:solidFill>
-                        <a:srgbClr val="EEEEEE"/>
-                      </a:solidFill>
-                      <a:prstDash val="solid"/>
-                      <a:round/>
-                      <a:headEnd type="none" w="med" len="med"/>
-                      <a:tailEnd type="none" w="med" len="med"/>
-                    </a:lnR>
-                    <a:lnT w="2540" cap="flat" cmpd="sng" algn="ctr">
-                      <a:solidFill>
-                        <a:srgbClr val="EEEEEE"/>
-                      </a:solidFill>
-                      <a:prstDash val="solid"/>
-                      <a:round/>
-                      <a:headEnd type="none" w="med" len="med"/>
-                      <a:tailEnd type="none" w="med" len="med"/>
-                    </a:lnT>
-                    <a:lnB w="2540" cap="flat" cmpd="sng" algn="ctr">
-                      <a:solidFill>
-                        <a:srgbClr val="EEEEEE"/>
-                      </a:solidFill>
-                      <a:prstDash val="solid"/>
-                      <a:round/>
-                      <a:headEnd type="none" w="med" len="med"/>
-                      <a:tailEnd type="none" w="med" len="med"/>
-                    </a:lnB>
-                  </a:tcPr>
-                </a:tc>
-                <a:tc>
-                  <a:txBody>
-                    <a:bodyPr/>
-                    <a:lstStyle/>
-                    <a:p>
-                      <a:pPr algn="ctr" indent="0" marL="0">
-                        <a:buNone/>
-                      </a:pPr>
-                      <a:r>
-                        <a:rPr lang="en-US" sz="500" dirty="0">
-                          <a:solidFill>
-                            <a:srgbClr val="777777"/>
-                          </a:solidFill>
-                          <a:latin typeface="Calibri" pitchFamily="34" charset="0"/>
-                          <a:ea typeface="Calibri" pitchFamily="34" charset="-122"/>
-                          <a:cs typeface="Calibri" pitchFamily="34" charset="-120"/>
-                        </a:rPr>
-                        <a:t>0.40%</a:t>
-                      </a:r>
-                      <a:endParaRPr lang="en-US" sz="500" dirty="0">
-                        <a:latin typeface="Calibri" charset="0"/>
-                        <a:ea typeface="Calibri" charset="0"/>
-                        <a:cs typeface="Calibri" charset="0"/>
-                      </a:endParaRPr>
-                    </a:p>
-                  </a:txBody>
-                  <a:tcPr marL="91440" marR="91440" marT="45720" marB="45720">
-                    <a:lnL w="2540" cap="flat" cmpd="sng" algn="ctr">
-                      <a:solidFill>
-                        <a:srgbClr val="EEEEEE"/>
-                      </a:solidFill>
-                      <a:prstDash val="solid"/>
-                      <a:round/>
-                      <a:headEnd type="none" w="med" len="med"/>
-                      <a:tailEnd type="none" w="med" len="med"/>
-                    </a:lnL>
-                    <a:lnR w="2540" cap="flat" cmpd="sng" algn="ctr">
-                      <a:solidFill>
-                        <a:srgbClr val="EEEEEE"/>
-                      </a:solidFill>
-                      <a:prstDash val="solid"/>
-                      <a:round/>
-                      <a:headEnd type="none" w="med" len="med"/>
-                      <a:tailEnd type="none" w="med" len="med"/>
-                    </a:lnR>
-                    <a:lnT w="2540" cap="flat" cmpd="sng" algn="ctr">
-                      <a:solidFill>
-                        <a:srgbClr val="EEEEEE"/>
-                      </a:solidFill>
-                      <a:prstDash val="solid"/>
-                      <a:round/>
-                      <a:headEnd type="none" w="med" len="med"/>
-                      <a:tailEnd type="none" w="med" len="med"/>
-                    </a:lnT>
-                    <a:lnB w="2540" cap="flat" cmpd="sng" algn="ctr">
-                      <a:solidFill>
-                        <a:srgbClr val="EEEEEE"/>
-                      </a:solidFill>
-                      <a:prstDash val="solid"/>
-                      <a:round/>
-                      <a:headEnd type="none" w="med" len="med"/>
-                      <a:tailEnd type="none" w="med" len="med"/>
-                    </a:lnB>
-                  </a:tcPr>
-                </a:tc>
-                <a:tc>
-                  <a:txBody>
-                    <a:bodyPr/>
-                    <a:lstStyle/>
-                    <a:p>
-                      <a:pPr algn="ctr" indent="0" marL="0">
-                        <a:buNone/>
-                      </a:pPr>
-                      <a:r>
-                        <a:rPr lang="en-US" sz="500" dirty="0">
-                          <a:solidFill>
-                            <a:srgbClr val="777777"/>
-                          </a:solidFill>
-                          <a:latin typeface="Calibri" pitchFamily="34" charset="0"/>
-                          <a:ea typeface="Calibri" pitchFamily="34" charset="-122"/>
-                          <a:cs typeface="Calibri" pitchFamily="34" charset="-120"/>
-                        </a:rPr>
-                        <a:t>0.40%</a:t>
-                      </a:r>
-                      <a:endParaRPr lang="en-US" sz="500" dirty="0">
-                        <a:latin typeface="Calibri" charset="0"/>
-                        <a:ea typeface="Calibri" charset="0"/>
-                        <a:cs typeface="Calibri" charset="0"/>
-                      </a:endParaRPr>
-                    </a:p>
-                  </a:txBody>
-                  <a:tcPr marL="91440" marR="91440" marT="45720" marB="45720">
-                    <a:lnL w="2540" cap="flat" cmpd="sng" algn="ctr">
-                      <a:solidFill>
-                        <a:srgbClr val="EEEEEE"/>
-                      </a:solidFill>
-                      <a:prstDash val="solid"/>
-                      <a:round/>
-                      <a:headEnd type="none" w="med" len="med"/>
-                      <a:tailEnd type="none" w="med" len="med"/>
-                    </a:lnL>
-                    <a:lnR w="2540" cap="flat" cmpd="sng" algn="ctr">
-                      <a:solidFill>
-                        <a:srgbClr val="EEEEEE"/>
-                      </a:solidFill>
-                      <a:prstDash val="solid"/>
-                      <a:round/>
-                      <a:headEnd type="none" w="med" len="med"/>
-                      <a:tailEnd type="none" w="med" len="med"/>
-                    </a:lnR>
-                    <a:lnT w="2540" cap="flat" cmpd="sng" algn="ctr">
-                      <a:solidFill>
-                        <a:srgbClr val="EEEEEE"/>
-                      </a:solidFill>
-                      <a:prstDash val="solid"/>
-                      <a:round/>
-                      <a:headEnd type="none" w="med" len="med"/>
-                      <a:tailEnd type="none" w="med" len="med"/>
-                    </a:lnT>
-                    <a:lnB w="2540" cap="flat" cmpd="sng" algn="ctr">
-                      <a:solidFill>
-                        <a:srgbClr val="EEEEEE"/>
-                      </a:solidFill>
-                      <a:prstDash val="solid"/>
-                      <a:round/>
-                      <a:headEnd type="none" w="med" len="med"/>
-                      <a:tailEnd type="none" w="med" len="med"/>
-                    </a:lnB>
-                  </a:tcPr>
-                </a:tc>
-                <a:tc>
-                  <a:txBody>
-                    <a:bodyPr/>
-                    <a:lstStyle/>
-                    <a:p>
-                      <a:pPr algn="ctr" indent="0" marL="0">
-                        <a:buNone/>
-                      </a:pPr>
-                      <a:r>
-                        <a:rPr lang="en-US" sz="500" dirty="0">
-                          <a:solidFill>
-                            <a:srgbClr val="777777"/>
-                          </a:solidFill>
-                          <a:latin typeface="Calibri" pitchFamily="34" charset="0"/>
-                          <a:ea typeface="Calibri" pitchFamily="34" charset="-122"/>
-                          <a:cs typeface="Calibri" pitchFamily="34" charset="-120"/>
-                        </a:rPr>
-                        <a:t>0.39%</a:t>
-                      </a:r>
-                      <a:endParaRPr lang="en-US" sz="500" dirty="0">
-                        <a:latin typeface="Calibri" charset="0"/>
-                        <a:ea typeface="Calibri" charset="0"/>
-                        <a:cs typeface="Calibri" charset="0"/>
-                      </a:endParaRPr>
-                    </a:p>
-                  </a:txBody>
-                  <a:tcPr marL="91440" marR="91440" marT="45720" marB="45720">
-                    <a:lnL w="2540" cap="flat" cmpd="sng" algn="ctr">
-                      <a:solidFill>
-                        <a:srgbClr val="EEEEEE"/>
-                      </a:solidFill>
-                      <a:prstDash val="solid"/>
-                      <a:round/>
-                      <a:headEnd type="none" w="med" len="med"/>
-                      <a:tailEnd type="none" w="med" len="med"/>
-                    </a:lnL>
-                    <a:lnR w="2540" cap="flat" cmpd="sng" algn="ctr">
-                      <a:solidFill>
-                        <a:srgbClr val="EEEEEE"/>
-                      </a:solidFill>
-                      <a:prstDash val="solid"/>
-                      <a:round/>
-                      <a:headEnd type="none" w="med" len="med"/>
-                      <a:tailEnd type="none" w="med" len="med"/>
-                    </a:lnR>
-                    <a:lnT w="2540" cap="flat" cmpd="sng" algn="ctr">
-                      <a:solidFill>
-                        <a:srgbClr val="EEEEEE"/>
-                      </a:solidFill>
-                      <a:prstDash val="solid"/>
-                      <a:round/>
-                      <a:headEnd type="none" w="med" len="med"/>
-                      <a:tailEnd type="none" w="med" len="med"/>
-                    </a:lnT>
-                    <a:lnB w="2540" cap="flat" cmpd="sng" algn="ctr">
-                      <a:solidFill>
-                        <a:srgbClr val="EEEEEE"/>
-                      </a:solidFill>
-                      <a:prstDash val="solid"/>
-                      <a:round/>
-                      <a:headEnd type="none" w="med" len="med"/>
-                      <a:tailEnd type="none" w="med" len="med"/>
-                    </a:lnB>
-                  </a:tcPr>
-                </a:tc>
-                <a:tc>
-                  <a:txBody>
-                    <a:bodyPr/>
-                    <a:lstStyle/>
-                    <a:p>
-                      <a:pPr algn="ctr" indent="0" marL="0">
-                        <a:buNone/>
-                      </a:pPr>
-                      <a:r>
-                        <a:rPr lang="en-US" sz="500" b="1" dirty="0">
-                          <a:solidFill>
-                            <a:srgbClr val="777777"/>
-                          </a:solidFill>
-                          <a:latin typeface="Calibri" pitchFamily="34" charset="0"/>
-                          <a:ea typeface="Calibri" pitchFamily="34" charset="-122"/>
-                          <a:cs typeface="Calibri" pitchFamily="34" charset="-120"/>
-                        </a:rPr>
-                        <a:t>4.99%</a:t>
+                        <a:t>4.61%</a:t>
                       </a:r>
                       <a:endParaRPr lang="en-US" sz="500" dirty="0">
                         <a:latin typeface="Calibri" charset="0"/>
@@ -18737,7 +19665,7 @@
                           <a:ea typeface="Calibri" pitchFamily="34" charset="-122"/>
                           <a:cs typeface="Calibri" pitchFamily="34" charset="-120"/>
                         </a:rPr>
-                        <a:t>0.00%</a:t>
+                        <a:t>0.30%</a:t>
                       </a:r>
                       <a:endParaRPr lang="en-US" sz="500" dirty="0">
                         <a:latin typeface="Calibri" charset="0"/>
@@ -19452,7 +20380,7 @@
                           <a:ea typeface="Calibri" pitchFamily="34" charset="-122"/>
                           <a:cs typeface="Calibri" pitchFamily="34" charset="-120"/>
                         </a:rPr>
-                        <a:t>0.56%</a:t>
+                        <a:t>0.28%</a:t>
                       </a:r>
                       <a:endParaRPr lang="en-US" sz="500" dirty="0">
                         <a:latin typeface="Calibri" charset="0"/>
@@ -19517,7 +20445,7 @@
                           <a:ea typeface="Calibri" pitchFamily="34" charset="-122"/>
                           <a:cs typeface="Calibri" pitchFamily="34" charset="-120"/>
                         </a:rPr>
-                        <a:t>3.54%</a:t>
+                        <a:t>3.26%</a:t>
                       </a:r>
                       <a:endParaRPr lang="en-US" sz="500" dirty="0">
                         <a:latin typeface="Calibri" charset="0"/>
@@ -19630,6 +20558,71 @@
                         <a:buNone/>
                       </a:pPr>
                       <a:r>
+                        <a:rPr lang="en-US" sz="400" dirty="0">
+                          <a:solidFill>
+                            <a:srgbClr val="000000"/>
+                          </a:solidFill>
+                          <a:latin typeface="Calibri" pitchFamily="34" charset="0"/>
+                          <a:ea typeface="Calibri" pitchFamily="34" charset="-122"/>
+                          <a:cs typeface="Calibri" pitchFamily="34" charset="-120"/>
+                        </a:rPr>
+                        <a:t>FIP LIQUIDEZ EFECTIVO</a:t>
+                      </a:r>
+                      <a:endParaRPr lang="en-US" sz="400" dirty="0">
+                        <a:latin typeface="Calibri" charset="0"/>
+                        <a:ea typeface="Calibri" charset="0"/>
+                        <a:cs typeface="Calibri" charset="0"/>
+                      </a:endParaRPr>
+                    </a:p>
+                  </a:txBody>
+                  <a:tcPr marL="91440" marR="91440" marT="45720" marB="45720">
+                    <a:lnL w="2540" cap="flat" cmpd="sng" algn="ctr">
+                      <a:solidFill>
+                        <a:srgbClr val="EEEEEE"/>
+                      </a:solidFill>
+                      <a:prstDash val="solid"/>
+                      <a:round/>
+                      <a:headEnd type="none" w="med" len="med"/>
+                      <a:tailEnd type="none" w="med" len="med"/>
+                    </a:lnL>
+                    <a:lnR w="2540" cap="flat" cmpd="sng" algn="ctr">
+                      <a:solidFill>
+                        <a:srgbClr val="EEEEEE"/>
+                      </a:solidFill>
+                      <a:prstDash val="solid"/>
+                      <a:round/>
+                      <a:headEnd type="none" w="med" len="med"/>
+                      <a:tailEnd type="none" w="med" len="med"/>
+                    </a:lnR>
+                    <a:lnT w="2540" cap="flat" cmpd="sng" algn="ctr">
+                      <a:solidFill>
+                        <a:srgbClr val="EEEEEE"/>
+                      </a:solidFill>
+                      <a:prstDash val="solid"/>
+                      <a:round/>
+                      <a:headEnd type="none" w="med" len="med"/>
+                      <a:tailEnd type="none" w="med" len="med"/>
+                    </a:lnT>
+                    <a:lnB w="2540" cap="flat" cmpd="sng" algn="ctr">
+                      <a:solidFill>
+                        <a:srgbClr val="EEEEEE"/>
+                      </a:solidFill>
+                      <a:prstDash val="solid"/>
+                      <a:round/>
+                      <a:headEnd type="none" w="med" len="med"/>
+                      <a:tailEnd type="none" w="med" len="med"/>
+                    </a:lnB>
+                  </a:tcPr>
+                </a:tc>
+                <a:tc>
+                  <a:txBody>
+                    <a:bodyPr/>
+                    <a:lstStyle/>
+                    <a:p>
+                      <a:pPr algn="ctr" indent="0" marL="0">
+                        <a:buNone/>
+                      </a:pPr>
+                      <a:r>
                         <a:rPr lang="en-US" sz="500" dirty="0">
                           <a:solidFill>
                             <a:srgbClr val="000000"/>
@@ -19638,7 +20631,7 @@
                           <a:ea typeface="Calibri" pitchFamily="34" charset="-122"/>
                           <a:cs typeface="Calibri" pitchFamily="34" charset="-120"/>
                         </a:rPr>
-                        <a:t>FIP LIQUIDEZ EFECTIVO</a:t>
+                        <a:t>0.39%</a:t>
                       </a:r>
                       <a:endParaRPr lang="en-US" sz="500" dirty="0">
                         <a:latin typeface="Calibri" charset="0"/>
@@ -19703,7 +20696,7 @@
                           <a:ea typeface="Calibri" pitchFamily="34" charset="-122"/>
                           <a:cs typeface="Calibri" pitchFamily="34" charset="-120"/>
                         </a:rPr>
-                        <a:t>0.39%</a:t>
+                        <a:t>0.40%</a:t>
                       </a:r>
                       <a:endParaRPr lang="en-US" sz="500" dirty="0">
                         <a:latin typeface="Calibri" charset="0"/>
@@ -19768,7 +20761,7 @@
                           <a:ea typeface="Calibri" pitchFamily="34" charset="-122"/>
                           <a:cs typeface="Calibri" pitchFamily="34" charset="-120"/>
                         </a:rPr>
-                        <a:t>0.40%</a:t>
+                        <a:t>0.43%</a:t>
                       </a:r>
                       <a:endParaRPr lang="en-US" sz="500" dirty="0">
                         <a:latin typeface="Calibri" charset="0"/>
@@ -19833,7 +20826,7 @@
                           <a:ea typeface="Calibri" pitchFamily="34" charset="-122"/>
                           <a:cs typeface="Calibri" pitchFamily="34" charset="-120"/>
                         </a:rPr>
-                        <a:t>0.43%</a:t>
+                        <a:t>0.51%</a:t>
                       </a:r>
                       <a:endParaRPr lang="en-US" sz="500" dirty="0">
                         <a:latin typeface="Calibri" charset="0"/>
@@ -19898,7 +20891,7 @@
                           <a:ea typeface="Calibri" pitchFamily="34" charset="-122"/>
                           <a:cs typeface="Calibri" pitchFamily="34" charset="-120"/>
                         </a:rPr>
-                        <a:t>0.51%</a:t>
+                        <a:t>0.53%</a:t>
                       </a:r>
                       <a:endParaRPr lang="en-US" sz="500" dirty="0">
                         <a:latin typeface="Calibri" charset="0"/>
@@ -19963,6 +20956,396 @@
                           <a:ea typeface="Calibri" pitchFamily="34" charset="-122"/>
                           <a:cs typeface="Calibri" pitchFamily="34" charset="-120"/>
                         </a:rPr>
+                        <a:t>0.48%</a:t>
+                      </a:r>
+                      <a:endParaRPr lang="en-US" sz="500" dirty="0">
+                        <a:latin typeface="Calibri" charset="0"/>
+                        <a:ea typeface="Calibri" charset="0"/>
+                        <a:cs typeface="Calibri" charset="0"/>
+                      </a:endParaRPr>
+                    </a:p>
+                  </a:txBody>
+                  <a:tcPr marL="91440" marR="91440" marT="45720" marB="45720">
+                    <a:lnL w="2540" cap="flat" cmpd="sng" algn="ctr">
+                      <a:solidFill>
+                        <a:srgbClr val="EEEEEE"/>
+                      </a:solidFill>
+                      <a:prstDash val="solid"/>
+                      <a:round/>
+                      <a:headEnd type="none" w="med" len="med"/>
+                      <a:tailEnd type="none" w="med" len="med"/>
+                    </a:lnL>
+                    <a:lnR w="2540" cap="flat" cmpd="sng" algn="ctr">
+                      <a:solidFill>
+                        <a:srgbClr val="EEEEEE"/>
+                      </a:solidFill>
+                      <a:prstDash val="solid"/>
+                      <a:round/>
+                      <a:headEnd type="none" w="med" len="med"/>
+                      <a:tailEnd type="none" w="med" len="med"/>
+                    </a:lnR>
+                    <a:lnT w="2540" cap="flat" cmpd="sng" algn="ctr">
+                      <a:solidFill>
+                        <a:srgbClr val="EEEEEE"/>
+                      </a:solidFill>
+                      <a:prstDash val="solid"/>
+                      <a:round/>
+                      <a:headEnd type="none" w="med" len="med"/>
+                      <a:tailEnd type="none" w="med" len="med"/>
+                    </a:lnT>
+                    <a:lnB w="2540" cap="flat" cmpd="sng" algn="ctr">
+                      <a:solidFill>
+                        <a:srgbClr val="EEEEEE"/>
+                      </a:solidFill>
+                      <a:prstDash val="solid"/>
+                      <a:round/>
+                      <a:headEnd type="none" w="med" len="med"/>
+                      <a:tailEnd type="none" w="med" len="med"/>
+                    </a:lnB>
+                  </a:tcPr>
+                </a:tc>
+                <a:tc>
+                  <a:txBody>
+                    <a:bodyPr/>
+                    <a:lstStyle/>
+                    <a:p>
+                      <a:pPr algn="ctr" indent="0" marL="0">
+                        <a:buNone/>
+                      </a:pPr>
+                      <a:r>
+                        <a:rPr lang="en-US" sz="500" dirty="0">
+                          <a:solidFill>
+                            <a:srgbClr val="000000"/>
+                          </a:solidFill>
+                          <a:latin typeface="Calibri" pitchFamily="34" charset="0"/>
+                          <a:ea typeface="Calibri" pitchFamily="34" charset="-122"/>
+                          <a:cs typeface="Calibri" pitchFamily="34" charset="-120"/>
+                        </a:rPr>
+                        <a:t>0.47%</a:t>
+                      </a:r>
+                      <a:endParaRPr lang="en-US" sz="500" dirty="0">
+                        <a:latin typeface="Calibri" charset="0"/>
+                        <a:ea typeface="Calibri" charset="0"/>
+                        <a:cs typeface="Calibri" charset="0"/>
+                      </a:endParaRPr>
+                    </a:p>
+                  </a:txBody>
+                  <a:tcPr marL="91440" marR="91440" marT="45720" marB="45720">
+                    <a:lnL w="2540" cap="flat" cmpd="sng" algn="ctr">
+                      <a:solidFill>
+                        <a:srgbClr val="EEEEEE"/>
+                      </a:solidFill>
+                      <a:prstDash val="solid"/>
+                      <a:round/>
+                      <a:headEnd type="none" w="med" len="med"/>
+                      <a:tailEnd type="none" w="med" len="med"/>
+                    </a:lnL>
+                    <a:lnR w="2540" cap="flat" cmpd="sng" algn="ctr">
+                      <a:solidFill>
+                        <a:srgbClr val="EEEEEE"/>
+                      </a:solidFill>
+                      <a:prstDash val="solid"/>
+                      <a:round/>
+                      <a:headEnd type="none" w="med" len="med"/>
+                      <a:tailEnd type="none" w="med" len="med"/>
+                    </a:lnR>
+                    <a:lnT w="2540" cap="flat" cmpd="sng" algn="ctr">
+                      <a:solidFill>
+                        <a:srgbClr val="EEEEEE"/>
+                      </a:solidFill>
+                      <a:prstDash val="solid"/>
+                      <a:round/>
+                      <a:headEnd type="none" w="med" len="med"/>
+                      <a:tailEnd type="none" w="med" len="med"/>
+                    </a:lnT>
+                    <a:lnB w="2540" cap="flat" cmpd="sng" algn="ctr">
+                      <a:solidFill>
+                        <a:srgbClr val="EEEEEE"/>
+                      </a:solidFill>
+                      <a:prstDash val="solid"/>
+                      <a:round/>
+                      <a:headEnd type="none" w="med" len="med"/>
+                      <a:tailEnd type="none" w="med" len="med"/>
+                    </a:lnB>
+                  </a:tcPr>
+                </a:tc>
+                <a:tc>
+                  <a:txBody>
+                    <a:bodyPr/>
+                    <a:lstStyle/>
+                    <a:p>
+                      <a:pPr algn="ctr" indent="0" marL="0">
+                        <a:buNone/>
+                      </a:pPr>
+                      <a:r>
+                        <a:rPr lang="en-US" sz="500" dirty="0">
+                          <a:solidFill>
+                            <a:srgbClr val="000000"/>
+                          </a:solidFill>
+                          <a:latin typeface="Calibri" pitchFamily="34" charset="0"/>
+                          <a:ea typeface="Calibri" pitchFamily="34" charset="-122"/>
+                          <a:cs typeface="Calibri" pitchFamily="34" charset="-120"/>
+                        </a:rPr>
+                        <a:t>0.50%</a:t>
+                      </a:r>
+                      <a:endParaRPr lang="en-US" sz="500" dirty="0">
+                        <a:latin typeface="Calibri" charset="0"/>
+                        <a:ea typeface="Calibri" charset="0"/>
+                        <a:cs typeface="Calibri" charset="0"/>
+                      </a:endParaRPr>
+                    </a:p>
+                  </a:txBody>
+                  <a:tcPr marL="91440" marR="91440" marT="45720" marB="45720">
+                    <a:lnL w="2540" cap="flat" cmpd="sng" algn="ctr">
+                      <a:solidFill>
+                        <a:srgbClr val="EEEEEE"/>
+                      </a:solidFill>
+                      <a:prstDash val="solid"/>
+                      <a:round/>
+                      <a:headEnd type="none" w="med" len="med"/>
+                      <a:tailEnd type="none" w="med" len="med"/>
+                    </a:lnL>
+                    <a:lnR w="2540" cap="flat" cmpd="sng" algn="ctr">
+                      <a:solidFill>
+                        <a:srgbClr val="EEEEEE"/>
+                      </a:solidFill>
+                      <a:prstDash val="solid"/>
+                      <a:round/>
+                      <a:headEnd type="none" w="med" len="med"/>
+                      <a:tailEnd type="none" w="med" len="med"/>
+                    </a:lnR>
+                    <a:lnT w="2540" cap="flat" cmpd="sng" algn="ctr">
+                      <a:solidFill>
+                        <a:srgbClr val="EEEEEE"/>
+                      </a:solidFill>
+                      <a:prstDash val="solid"/>
+                      <a:round/>
+                      <a:headEnd type="none" w="med" len="med"/>
+                      <a:tailEnd type="none" w="med" len="med"/>
+                    </a:lnT>
+                    <a:lnB w="2540" cap="flat" cmpd="sng" algn="ctr">
+                      <a:solidFill>
+                        <a:srgbClr val="EEEEEE"/>
+                      </a:solidFill>
+                      <a:prstDash val="solid"/>
+                      <a:round/>
+                      <a:headEnd type="none" w="med" len="med"/>
+                      <a:tailEnd type="none" w="med" len="med"/>
+                    </a:lnB>
+                  </a:tcPr>
+                </a:tc>
+                <a:tc>
+                  <a:txBody>
+                    <a:bodyPr/>
+                    <a:lstStyle/>
+                    <a:p>
+                      <a:pPr algn="ctr" indent="0" marL="0">
+                        <a:buNone/>
+                      </a:pPr>
+                      <a:r>
+                        <a:rPr lang="en-US" sz="500" dirty="0">
+                          <a:solidFill>
+                            <a:srgbClr val="000000"/>
+                          </a:solidFill>
+                          <a:latin typeface="Calibri" pitchFamily="34" charset="0"/>
+                          <a:ea typeface="Calibri" pitchFamily="34" charset="-122"/>
+                          <a:cs typeface="Calibri" pitchFamily="34" charset="-120"/>
+                        </a:rPr>
+                        <a:t>0.46%</a:t>
+                      </a:r>
+                      <a:endParaRPr lang="en-US" sz="500" dirty="0">
+                        <a:latin typeface="Calibri" charset="0"/>
+                        <a:ea typeface="Calibri" charset="0"/>
+                        <a:cs typeface="Calibri" charset="0"/>
+                      </a:endParaRPr>
+                    </a:p>
+                  </a:txBody>
+                  <a:tcPr marL="91440" marR="91440" marT="45720" marB="45720">
+                    <a:lnL w="2540" cap="flat" cmpd="sng" algn="ctr">
+                      <a:solidFill>
+                        <a:srgbClr val="EEEEEE"/>
+                      </a:solidFill>
+                      <a:prstDash val="solid"/>
+                      <a:round/>
+                      <a:headEnd type="none" w="med" len="med"/>
+                      <a:tailEnd type="none" w="med" len="med"/>
+                    </a:lnL>
+                    <a:lnR w="2540" cap="flat" cmpd="sng" algn="ctr">
+                      <a:solidFill>
+                        <a:srgbClr val="EEEEEE"/>
+                      </a:solidFill>
+                      <a:prstDash val="solid"/>
+                      <a:round/>
+                      <a:headEnd type="none" w="med" len="med"/>
+                      <a:tailEnd type="none" w="med" len="med"/>
+                    </a:lnR>
+                    <a:lnT w="2540" cap="flat" cmpd="sng" algn="ctr">
+                      <a:solidFill>
+                        <a:srgbClr val="EEEEEE"/>
+                      </a:solidFill>
+                      <a:prstDash val="solid"/>
+                      <a:round/>
+                      <a:headEnd type="none" w="med" len="med"/>
+                      <a:tailEnd type="none" w="med" len="med"/>
+                    </a:lnT>
+                    <a:lnB w="2540" cap="flat" cmpd="sng" algn="ctr">
+                      <a:solidFill>
+                        <a:srgbClr val="EEEEEE"/>
+                      </a:solidFill>
+                      <a:prstDash val="solid"/>
+                      <a:round/>
+                      <a:headEnd type="none" w="med" len="med"/>
+                      <a:tailEnd type="none" w="med" len="med"/>
+                    </a:lnB>
+                  </a:tcPr>
+                </a:tc>
+                <a:tc>
+                  <a:txBody>
+                    <a:bodyPr/>
+                    <a:lstStyle/>
+                    <a:p>
+                      <a:pPr algn="ctr" indent="0" marL="0">
+                        <a:buNone/>
+                      </a:pPr>
+                      <a:r>
+                        <a:rPr lang="en-US" sz="500" dirty="0">
+                          <a:solidFill>
+                            <a:srgbClr val="000000"/>
+                          </a:solidFill>
+                          <a:latin typeface="Calibri" pitchFamily="34" charset="0"/>
+                          <a:ea typeface="Calibri" pitchFamily="34" charset="-122"/>
+                          <a:cs typeface="Calibri" pitchFamily="34" charset="-120"/>
+                        </a:rPr>
+                        <a:t>0.56%</a:t>
+                      </a:r>
+                      <a:endParaRPr lang="en-US" sz="500" dirty="0">
+                        <a:latin typeface="Calibri" charset="0"/>
+                        <a:ea typeface="Calibri" charset="0"/>
+                        <a:cs typeface="Calibri" charset="0"/>
+                      </a:endParaRPr>
+                    </a:p>
+                  </a:txBody>
+                  <a:tcPr marL="91440" marR="91440" marT="45720" marB="45720">
+                    <a:lnL w="2540" cap="flat" cmpd="sng" algn="ctr">
+                      <a:solidFill>
+                        <a:srgbClr val="EEEEEE"/>
+                      </a:solidFill>
+                      <a:prstDash val="solid"/>
+                      <a:round/>
+                      <a:headEnd type="none" w="med" len="med"/>
+                      <a:tailEnd type="none" w="med" len="med"/>
+                    </a:lnL>
+                    <a:lnR w="2540" cap="flat" cmpd="sng" algn="ctr">
+                      <a:solidFill>
+                        <a:srgbClr val="EEEEEE"/>
+                      </a:solidFill>
+                      <a:prstDash val="solid"/>
+                      <a:round/>
+                      <a:headEnd type="none" w="med" len="med"/>
+                      <a:tailEnd type="none" w="med" len="med"/>
+                    </a:lnR>
+                    <a:lnT w="2540" cap="flat" cmpd="sng" algn="ctr">
+                      <a:solidFill>
+                        <a:srgbClr val="EEEEEE"/>
+                      </a:solidFill>
+                      <a:prstDash val="solid"/>
+                      <a:round/>
+                      <a:headEnd type="none" w="med" len="med"/>
+                      <a:tailEnd type="none" w="med" len="med"/>
+                    </a:lnT>
+                    <a:lnB w="2540" cap="flat" cmpd="sng" algn="ctr">
+                      <a:solidFill>
+                        <a:srgbClr val="EEEEEE"/>
+                      </a:solidFill>
+                      <a:prstDash val="solid"/>
+                      <a:round/>
+                      <a:headEnd type="none" w="med" len="med"/>
+                      <a:tailEnd type="none" w="med" len="med"/>
+                    </a:lnB>
+                  </a:tcPr>
+                </a:tc>
+                <a:tc>
+                  <a:txBody>
+                    <a:bodyPr/>
+                    <a:lstStyle/>
+                    <a:p>
+                      <a:pPr algn="ctr" indent="0" marL="0">
+                        <a:buNone/>
+                      </a:pPr>
+                      <a:r>
+                        <a:rPr lang="en-US" sz="500" dirty="0">
+                          <a:solidFill>
+                            <a:srgbClr val="000000"/>
+                          </a:solidFill>
+                          <a:latin typeface="Calibri" pitchFamily="34" charset="0"/>
+                          <a:ea typeface="Calibri" pitchFamily="34" charset="-122"/>
+                          <a:cs typeface="Calibri" pitchFamily="34" charset="-120"/>
+                        </a:rPr>
+                        <a:t>0.49%</a:t>
+                      </a:r>
+                      <a:endParaRPr lang="en-US" sz="500" dirty="0">
+                        <a:latin typeface="Calibri" charset="0"/>
+                        <a:ea typeface="Calibri" charset="0"/>
+                        <a:cs typeface="Calibri" charset="0"/>
+                      </a:endParaRPr>
+                    </a:p>
+                  </a:txBody>
+                  <a:tcPr marL="91440" marR="91440" marT="45720" marB="45720">
+                    <a:lnL w="2540" cap="flat" cmpd="sng" algn="ctr">
+                      <a:solidFill>
+                        <a:srgbClr val="EEEEEE"/>
+                      </a:solidFill>
+                      <a:prstDash val="solid"/>
+                      <a:round/>
+                      <a:headEnd type="none" w="med" len="med"/>
+                      <a:tailEnd type="none" w="med" len="med"/>
+                    </a:lnL>
+                    <a:lnR w="2540" cap="flat" cmpd="sng" algn="ctr">
+                      <a:solidFill>
+                        <a:srgbClr val="EEEEEE"/>
+                      </a:solidFill>
+                      <a:prstDash val="solid"/>
+                      <a:round/>
+                      <a:headEnd type="none" w="med" len="med"/>
+                      <a:tailEnd type="none" w="med" len="med"/>
+                    </a:lnR>
+                    <a:lnT w="2540" cap="flat" cmpd="sng" algn="ctr">
+                      <a:solidFill>
+                        <a:srgbClr val="EEEEEE"/>
+                      </a:solidFill>
+                      <a:prstDash val="solid"/>
+                      <a:round/>
+                      <a:headEnd type="none" w="med" len="med"/>
+                      <a:tailEnd type="none" w="med" len="med"/>
+                    </a:lnT>
+                    <a:lnB w="2540" cap="flat" cmpd="sng" algn="ctr">
+                      <a:solidFill>
+                        <a:srgbClr val="EEEEEE"/>
+                      </a:solidFill>
+                      <a:prstDash val="solid"/>
+                      <a:round/>
+                      <a:headEnd type="none" w="med" len="med"/>
+                      <a:tailEnd type="none" w="med" len="med"/>
+                    </a:lnB>
+                  </a:tcPr>
+                </a:tc>
+                <a:tc>
+                  <a:txBody>
+                    <a:bodyPr/>
+                    <a:lstStyle/>
+                    <a:p>
+                      <a:pPr algn="ctr" indent="0" marL="0">
+                        <a:buNone/>
+                      </a:pPr>
+                      <a:r>
+                        <a:rPr lang="en-US" sz="500" dirty="0">
+                          <a:solidFill>
+                            <a:srgbClr val="000000"/>
+                          </a:solidFill>
+                          <a:latin typeface="Calibri" pitchFamily="34" charset="0"/>
+                          <a:ea typeface="Calibri" pitchFamily="34" charset="-122"/>
+                          <a:cs typeface="Calibri" pitchFamily="34" charset="-120"/>
+                        </a:rPr>
                         <a:t>0.53%</a:t>
                       </a:r>
                       <a:endParaRPr lang="en-US" sz="500" dirty="0">
@@ -20020,7 +21403,7 @@
                         <a:buNone/>
                       </a:pPr>
                       <a:r>
-                        <a:rPr lang="en-US" sz="500" dirty="0">
+                        <a:rPr lang="en-US" sz="500" b="1" dirty="0">
                           <a:solidFill>
                             <a:srgbClr val="000000"/>
                           </a:solidFill>
@@ -20028,462 +21411,7 @@
                           <a:ea typeface="Calibri" pitchFamily="34" charset="-122"/>
                           <a:cs typeface="Calibri" pitchFamily="34" charset="-120"/>
                         </a:rPr>
-                        <a:t>0.48%</a:t>
-                      </a:r>
-                      <a:endParaRPr lang="en-US" sz="500" dirty="0">
-                        <a:latin typeface="Calibri" charset="0"/>
-                        <a:ea typeface="Calibri" charset="0"/>
-                        <a:cs typeface="Calibri" charset="0"/>
-                      </a:endParaRPr>
-                    </a:p>
-                  </a:txBody>
-                  <a:tcPr marL="91440" marR="91440" marT="45720" marB="45720">
-                    <a:lnL w="2540" cap="flat" cmpd="sng" algn="ctr">
-                      <a:solidFill>
-                        <a:srgbClr val="EEEEEE"/>
-                      </a:solidFill>
-                      <a:prstDash val="solid"/>
-                      <a:round/>
-                      <a:headEnd type="none" w="med" len="med"/>
-                      <a:tailEnd type="none" w="med" len="med"/>
-                    </a:lnL>
-                    <a:lnR w="2540" cap="flat" cmpd="sng" algn="ctr">
-                      <a:solidFill>
-                        <a:srgbClr val="EEEEEE"/>
-                      </a:solidFill>
-                      <a:prstDash val="solid"/>
-                      <a:round/>
-                      <a:headEnd type="none" w="med" len="med"/>
-                      <a:tailEnd type="none" w="med" len="med"/>
-                    </a:lnR>
-                    <a:lnT w="2540" cap="flat" cmpd="sng" algn="ctr">
-                      <a:solidFill>
-                        <a:srgbClr val="EEEEEE"/>
-                      </a:solidFill>
-                      <a:prstDash val="solid"/>
-                      <a:round/>
-                      <a:headEnd type="none" w="med" len="med"/>
-                      <a:tailEnd type="none" w="med" len="med"/>
-                    </a:lnT>
-                    <a:lnB w="2540" cap="flat" cmpd="sng" algn="ctr">
-                      <a:solidFill>
-                        <a:srgbClr val="EEEEEE"/>
-                      </a:solidFill>
-                      <a:prstDash val="solid"/>
-                      <a:round/>
-                      <a:headEnd type="none" w="med" len="med"/>
-                      <a:tailEnd type="none" w="med" len="med"/>
-                    </a:lnB>
-                  </a:tcPr>
-                </a:tc>
-                <a:tc>
-                  <a:txBody>
-                    <a:bodyPr/>
-                    <a:lstStyle/>
-                    <a:p>
-                      <a:pPr algn="ctr" indent="0" marL="0">
-                        <a:buNone/>
-                      </a:pPr>
-                      <a:r>
-                        <a:rPr lang="en-US" sz="500" dirty="0">
-                          <a:solidFill>
-                            <a:srgbClr val="000000"/>
-                          </a:solidFill>
-                          <a:latin typeface="Calibri" pitchFamily="34" charset="0"/>
-                          <a:ea typeface="Calibri" pitchFamily="34" charset="-122"/>
-                          <a:cs typeface="Calibri" pitchFamily="34" charset="-120"/>
-                        </a:rPr>
-                        <a:t>0.47%</a:t>
-                      </a:r>
-                      <a:endParaRPr lang="en-US" sz="500" dirty="0">
-                        <a:latin typeface="Calibri" charset="0"/>
-                        <a:ea typeface="Calibri" charset="0"/>
-                        <a:cs typeface="Calibri" charset="0"/>
-                      </a:endParaRPr>
-                    </a:p>
-                  </a:txBody>
-                  <a:tcPr marL="91440" marR="91440" marT="45720" marB="45720">
-                    <a:lnL w="2540" cap="flat" cmpd="sng" algn="ctr">
-                      <a:solidFill>
-                        <a:srgbClr val="EEEEEE"/>
-                      </a:solidFill>
-                      <a:prstDash val="solid"/>
-                      <a:round/>
-                      <a:headEnd type="none" w="med" len="med"/>
-                      <a:tailEnd type="none" w="med" len="med"/>
-                    </a:lnL>
-                    <a:lnR w="2540" cap="flat" cmpd="sng" algn="ctr">
-                      <a:solidFill>
-                        <a:srgbClr val="EEEEEE"/>
-                      </a:solidFill>
-                      <a:prstDash val="solid"/>
-                      <a:round/>
-                      <a:headEnd type="none" w="med" len="med"/>
-                      <a:tailEnd type="none" w="med" len="med"/>
-                    </a:lnR>
-                    <a:lnT w="2540" cap="flat" cmpd="sng" algn="ctr">
-                      <a:solidFill>
-                        <a:srgbClr val="EEEEEE"/>
-                      </a:solidFill>
-                      <a:prstDash val="solid"/>
-                      <a:round/>
-                      <a:headEnd type="none" w="med" len="med"/>
-                      <a:tailEnd type="none" w="med" len="med"/>
-                    </a:lnT>
-                    <a:lnB w="2540" cap="flat" cmpd="sng" algn="ctr">
-                      <a:solidFill>
-                        <a:srgbClr val="EEEEEE"/>
-                      </a:solidFill>
-                      <a:prstDash val="solid"/>
-                      <a:round/>
-                      <a:headEnd type="none" w="med" len="med"/>
-                      <a:tailEnd type="none" w="med" len="med"/>
-                    </a:lnB>
-                  </a:tcPr>
-                </a:tc>
-                <a:tc>
-                  <a:txBody>
-                    <a:bodyPr/>
-                    <a:lstStyle/>
-                    <a:p>
-                      <a:pPr algn="ctr" indent="0" marL="0">
-                        <a:buNone/>
-                      </a:pPr>
-                      <a:r>
-                        <a:rPr lang="en-US" sz="500" dirty="0">
-                          <a:solidFill>
-                            <a:srgbClr val="000000"/>
-                          </a:solidFill>
-                          <a:latin typeface="Calibri" pitchFamily="34" charset="0"/>
-                          <a:ea typeface="Calibri" pitchFamily="34" charset="-122"/>
-                          <a:cs typeface="Calibri" pitchFamily="34" charset="-120"/>
-                        </a:rPr>
-                        <a:t>0.50%</a:t>
-                      </a:r>
-                      <a:endParaRPr lang="en-US" sz="500" dirty="0">
-                        <a:latin typeface="Calibri" charset="0"/>
-                        <a:ea typeface="Calibri" charset="0"/>
-                        <a:cs typeface="Calibri" charset="0"/>
-                      </a:endParaRPr>
-                    </a:p>
-                  </a:txBody>
-                  <a:tcPr marL="91440" marR="91440" marT="45720" marB="45720">
-                    <a:lnL w="2540" cap="flat" cmpd="sng" algn="ctr">
-                      <a:solidFill>
-                        <a:srgbClr val="EEEEEE"/>
-                      </a:solidFill>
-                      <a:prstDash val="solid"/>
-                      <a:round/>
-                      <a:headEnd type="none" w="med" len="med"/>
-                      <a:tailEnd type="none" w="med" len="med"/>
-                    </a:lnL>
-                    <a:lnR w="2540" cap="flat" cmpd="sng" algn="ctr">
-                      <a:solidFill>
-                        <a:srgbClr val="EEEEEE"/>
-                      </a:solidFill>
-                      <a:prstDash val="solid"/>
-                      <a:round/>
-                      <a:headEnd type="none" w="med" len="med"/>
-                      <a:tailEnd type="none" w="med" len="med"/>
-                    </a:lnR>
-                    <a:lnT w="2540" cap="flat" cmpd="sng" algn="ctr">
-                      <a:solidFill>
-                        <a:srgbClr val="EEEEEE"/>
-                      </a:solidFill>
-                      <a:prstDash val="solid"/>
-                      <a:round/>
-                      <a:headEnd type="none" w="med" len="med"/>
-                      <a:tailEnd type="none" w="med" len="med"/>
-                    </a:lnT>
-                    <a:lnB w="2540" cap="flat" cmpd="sng" algn="ctr">
-                      <a:solidFill>
-                        <a:srgbClr val="EEEEEE"/>
-                      </a:solidFill>
-                      <a:prstDash val="solid"/>
-                      <a:round/>
-                      <a:headEnd type="none" w="med" len="med"/>
-                      <a:tailEnd type="none" w="med" len="med"/>
-                    </a:lnB>
-                  </a:tcPr>
-                </a:tc>
-                <a:tc>
-                  <a:txBody>
-                    <a:bodyPr/>
-                    <a:lstStyle/>
-                    <a:p>
-                      <a:pPr algn="ctr" indent="0" marL="0">
-                        <a:buNone/>
-                      </a:pPr>
-                      <a:r>
-                        <a:rPr lang="en-US" sz="500" dirty="0">
-                          <a:solidFill>
-                            <a:srgbClr val="000000"/>
-                          </a:solidFill>
-                          <a:latin typeface="Calibri" pitchFamily="34" charset="0"/>
-                          <a:ea typeface="Calibri" pitchFamily="34" charset="-122"/>
-                          <a:cs typeface="Calibri" pitchFamily="34" charset="-120"/>
-                        </a:rPr>
-                        <a:t>0.46%</a:t>
-                      </a:r>
-                      <a:endParaRPr lang="en-US" sz="500" dirty="0">
-                        <a:latin typeface="Calibri" charset="0"/>
-                        <a:ea typeface="Calibri" charset="0"/>
-                        <a:cs typeface="Calibri" charset="0"/>
-                      </a:endParaRPr>
-                    </a:p>
-                  </a:txBody>
-                  <a:tcPr marL="91440" marR="91440" marT="45720" marB="45720">
-                    <a:lnL w="2540" cap="flat" cmpd="sng" algn="ctr">
-                      <a:solidFill>
-                        <a:srgbClr val="EEEEEE"/>
-                      </a:solidFill>
-                      <a:prstDash val="solid"/>
-                      <a:round/>
-                      <a:headEnd type="none" w="med" len="med"/>
-                      <a:tailEnd type="none" w="med" len="med"/>
-                    </a:lnL>
-                    <a:lnR w="2540" cap="flat" cmpd="sng" algn="ctr">
-                      <a:solidFill>
-                        <a:srgbClr val="EEEEEE"/>
-                      </a:solidFill>
-                      <a:prstDash val="solid"/>
-                      <a:round/>
-                      <a:headEnd type="none" w="med" len="med"/>
-                      <a:tailEnd type="none" w="med" len="med"/>
-                    </a:lnR>
-                    <a:lnT w="2540" cap="flat" cmpd="sng" algn="ctr">
-                      <a:solidFill>
-                        <a:srgbClr val="EEEEEE"/>
-                      </a:solidFill>
-                      <a:prstDash val="solid"/>
-                      <a:round/>
-                      <a:headEnd type="none" w="med" len="med"/>
-                      <a:tailEnd type="none" w="med" len="med"/>
-                    </a:lnT>
-                    <a:lnB w="2540" cap="flat" cmpd="sng" algn="ctr">
-                      <a:solidFill>
-                        <a:srgbClr val="EEEEEE"/>
-                      </a:solidFill>
-                      <a:prstDash val="solid"/>
-                      <a:round/>
-                      <a:headEnd type="none" w="med" len="med"/>
-                      <a:tailEnd type="none" w="med" len="med"/>
-                    </a:lnB>
-                  </a:tcPr>
-                </a:tc>
-                <a:tc>
-                  <a:txBody>
-                    <a:bodyPr/>
-                    <a:lstStyle/>
-                    <a:p>
-                      <a:pPr algn="ctr" indent="0" marL="0">
-                        <a:buNone/>
-                      </a:pPr>
-                      <a:r>
-                        <a:rPr lang="en-US" sz="500" dirty="0">
-                          <a:solidFill>
-                            <a:srgbClr val="000000"/>
-                          </a:solidFill>
-                          <a:latin typeface="Calibri" pitchFamily="34" charset="0"/>
-                          <a:ea typeface="Calibri" pitchFamily="34" charset="-122"/>
-                          <a:cs typeface="Calibri" pitchFamily="34" charset="-120"/>
-                        </a:rPr>
-                        <a:t>0.56%</a:t>
-                      </a:r>
-                      <a:endParaRPr lang="en-US" sz="500" dirty="0">
-                        <a:latin typeface="Calibri" charset="0"/>
-                        <a:ea typeface="Calibri" charset="0"/>
-                        <a:cs typeface="Calibri" charset="0"/>
-                      </a:endParaRPr>
-                    </a:p>
-                  </a:txBody>
-                  <a:tcPr marL="91440" marR="91440" marT="45720" marB="45720">
-                    <a:lnL w="2540" cap="flat" cmpd="sng" algn="ctr">
-                      <a:solidFill>
-                        <a:srgbClr val="EEEEEE"/>
-                      </a:solidFill>
-                      <a:prstDash val="solid"/>
-                      <a:round/>
-                      <a:headEnd type="none" w="med" len="med"/>
-                      <a:tailEnd type="none" w="med" len="med"/>
-                    </a:lnL>
-                    <a:lnR w="2540" cap="flat" cmpd="sng" algn="ctr">
-                      <a:solidFill>
-                        <a:srgbClr val="EEEEEE"/>
-                      </a:solidFill>
-                      <a:prstDash val="solid"/>
-                      <a:round/>
-                      <a:headEnd type="none" w="med" len="med"/>
-                      <a:tailEnd type="none" w="med" len="med"/>
-                    </a:lnR>
-                    <a:lnT w="2540" cap="flat" cmpd="sng" algn="ctr">
-                      <a:solidFill>
-                        <a:srgbClr val="EEEEEE"/>
-                      </a:solidFill>
-                      <a:prstDash val="solid"/>
-                      <a:round/>
-                      <a:headEnd type="none" w="med" len="med"/>
-                      <a:tailEnd type="none" w="med" len="med"/>
-                    </a:lnT>
-                    <a:lnB w="2540" cap="flat" cmpd="sng" algn="ctr">
-                      <a:solidFill>
-                        <a:srgbClr val="EEEEEE"/>
-                      </a:solidFill>
-                      <a:prstDash val="solid"/>
-                      <a:round/>
-                      <a:headEnd type="none" w="med" len="med"/>
-                      <a:tailEnd type="none" w="med" len="med"/>
-                    </a:lnB>
-                  </a:tcPr>
-                </a:tc>
-                <a:tc>
-                  <a:txBody>
-                    <a:bodyPr/>
-                    <a:lstStyle/>
-                    <a:p>
-                      <a:pPr algn="ctr" indent="0" marL="0">
-                        <a:buNone/>
-                      </a:pPr>
-                      <a:r>
-                        <a:rPr lang="en-US" sz="500" dirty="0">
-                          <a:solidFill>
-                            <a:srgbClr val="000000"/>
-                          </a:solidFill>
-                          <a:latin typeface="Calibri" pitchFamily="34" charset="0"/>
-                          <a:ea typeface="Calibri" pitchFamily="34" charset="-122"/>
-                          <a:cs typeface="Calibri" pitchFamily="34" charset="-120"/>
-                        </a:rPr>
-                        <a:t>0.49%</a:t>
-                      </a:r>
-                      <a:endParaRPr lang="en-US" sz="500" dirty="0">
-                        <a:latin typeface="Calibri" charset="0"/>
-                        <a:ea typeface="Calibri" charset="0"/>
-                        <a:cs typeface="Calibri" charset="0"/>
-                      </a:endParaRPr>
-                    </a:p>
-                  </a:txBody>
-                  <a:tcPr marL="91440" marR="91440" marT="45720" marB="45720">
-                    <a:lnL w="2540" cap="flat" cmpd="sng" algn="ctr">
-                      <a:solidFill>
-                        <a:srgbClr val="EEEEEE"/>
-                      </a:solidFill>
-                      <a:prstDash val="solid"/>
-                      <a:round/>
-                      <a:headEnd type="none" w="med" len="med"/>
-                      <a:tailEnd type="none" w="med" len="med"/>
-                    </a:lnL>
-                    <a:lnR w="2540" cap="flat" cmpd="sng" algn="ctr">
-                      <a:solidFill>
-                        <a:srgbClr val="EEEEEE"/>
-                      </a:solidFill>
-                      <a:prstDash val="solid"/>
-                      <a:round/>
-                      <a:headEnd type="none" w="med" len="med"/>
-                      <a:tailEnd type="none" w="med" len="med"/>
-                    </a:lnR>
-                    <a:lnT w="2540" cap="flat" cmpd="sng" algn="ctr">
-                      <a:solidFill>
-                        <a:srgbClr val="EEEEEE"/>
-                      </a:solidFill>
-                      <a:prstDash val="solid"/>
-                      <a:round/>
-                      <a:headEnd type="none" w="med" len="med"/>
-                      <a:tailEnd type="none" w="med" len="med"/>
-                    </a:lnT>
-                    <a:lnB w="2540" cap="flat" cmpd="sng" algn="ctr">
-                      <a:solidFill>
-                        <a:srgbClr val="EEEEEE"/>
-                      </a:solidFill>
-                      <a:prstDash val="solid"/>
-                      <a:round/>
-                      <a:headEnd type="none" w="med" len="med"/>
-                      <a:tailEnd type="none" w="med" len="med"/>
-                    </a:lnB>
-                  </a:tcPr>
-                </a:tc>
-                <a:tc>
-                  <a:txBody>
-                    <a:bodyPr/>
-                    <a:lstStyle/>
-                    <a:p>
-                      <a:pPr algn="ctr" indent="0" marL="0">
-                        <a:buNone/>
-                      </a:pPr>
-                      <a:r>
-                        <a:rPr lang="en-US" sz="500" dirty="0">
-                          <a:solidFill>
-                            <a:srgbClr val="000000"/>
-                          </a:solidFill>
-                          <a:latin typeface="Calibri" pitchFamily="34" charset="0"/>
-                          <a:ea typeface="Calibri" pitchFamily="34" charset="-122"/>
-                          <a:cs typeface="Calibri" pitchFamily="34" charset="-120"/>
-                        </a:rPr>
-                        <a:t>0.53%</a:t>
-                      </a:r>
-                      <a:endParaRPr lang="en-US" sz="500" dirty="0">
-                        <a:latin typeface="Calibri" charset="0"/>
-                        <a:ea typeface="Calibri" charset="0"/>
-                        <a:cs typeface="Calibri" charset="0"/>
-                      </a:endParaRPr>
-                    </a:p>
-                  </a:txBody>
-                  <a:tcPr marL="91440" marR="91440" marT="45720" marB="45720">
-                    <a:lnL w="2540" cap="flat" cmpd="sng" algn="ctr">
-                      <a:solidFill>
-                        <a:srgbClr val="EEEEEE"/>
-                      </a:solidFill>
-                      <a:prstDash val="solid"/>
-                      <a:round/>
-                      <a:headEnd type="none" w="med" len="med"/>
-                      <a:tailEnd type="none" w="med" len="med"/>
-                    </a:lnL>
-                    <a:lnR w="2540" cap="flat" cmpd="sng" algn="ctr">
-                      <a:solidFill>
-                        <a:srgbClr val="EEEEEE"/>
-                      </a:solidFill>
-                      <a:prstDash val="solid"/>
-                      <a:round/>
-                      <a:headEnd type="none" w="med" len="med"/>
-                      <a:tailEnd type="none" w="med" len="med"/>
-                    </a:lnR>
-                    <a:lnT w="2540" cap="flat" cmpd="sng" algn="ctr">
-                      <a:solidFill>
-                        <a:srgbClr val="EEEEEE"/>
-                      </a:solidFill>
-                      <a:prstDash val="solid"/>
-                      <a:round/>
-                      <a:headEnd type="none" w="med" len="med"/>
-                      <a:tailEnd type="none" w="med" len="med"/>
-                    </a:lnT>
-                    <a:lnB w="2540" cap="flat" cmpd="sng" algn="ctr">
-                      <a:solidFill>
-                        <a:srgbClr val="EEEEEE"/>
-                      </a:solidFill>
-                      <a:prstDash val="solid"/>
-                      <a:round/>
-                      <a:headEnd type="none" w="med" len="med"/>
-                      <a:tailEnd type="none" w="med" len="med"/>
-                    </a:lnB>
-                  </a:tcPr>
-                </a:tc>
-                <a:tc>
-                  <a:txBody>
-                    <a:bodyPr/>
-                    <a:lstStyle/>
-                    <a:p>
-                      <a:pPr algn="ctr" indent="0" marL="0">
-                        <a:buNone/>
-                      </a:pPr>
-                      <a:r>
-                        <a:rPr lang="en-US" sz="500" b="1" dirty="0">
-                          <a:solidFill>
-                            <a:srgbClr val="000000"/>
-                          </a:solidFill>
-                          <a:latin typeface="Calibri" pitchFamily="34" charset="0"/>
-                          <a:ea typeface="Calibri" pitchFamily="34" charset="-122"/>
-                          <a:cs typeface="Calibri" pitchFamily="34" charset="-120"/>
-                        </a:rPr>
-                        <a:t>5.90%</a:t>
+                        <a:t>5.49%</a:t>
                       </a:r>
                       <a:endParaRPr lang="en-US" sz="500" dirty="0">
                         <a:latin typeface="Calibri" charset="0"/>
@@ -20680,7 +21608,7 @@
                           <a:ea typeface="Calibri" pitchFamily="34" charset="-122"/>
                           <a:cs typeface="Calibri" pitchFamily="34" charset="-120"/>
                         </a:rPr>
-                        <a:t>0.37%</a:t>
+                        <a:t>0.39%</a:t>
                       </a:r>
                       <a:endParaRPr lang="en-US" sz="500" dirty="0">
                         <a:latin typeface="Calibri" charset="0"/>
@@ -20745,7 +21673,7 @@
                           <a:ea typeface="Calibri" pitchFamily="34" charset="-122"/>
                           <a:cs typeface="Calibri" pitchFamily="34" charset="-120"/>
                         </a:rPr>
-                        <a:t>0.37%</a:t>
+                        <a:t>0.36%</a:t>
                       </a:r>
                       <a:endParaRPr lang="en-US" sz="500" dirty="0">
                         <a:latin typeface="Calibri" charset="0"/>
@@ -20810,7 +21738,7 @@
                           <a:ea typeface="Calibri" pitchFamily="34" charset="-122"/>
                           <a:cs typeface="Calibri" pitchFamily="34" charset="-120"/>
                         </a:rPr>
-                        <a:t>0.37%</a:t>
+                        <a:t>0.39%</a:t>
                       </a:r>
                       <a:endParaRPr lang="en-US" sz="500" dirty="0">
                         <a:latin typeface="Calibri" charset="0"/>
@@ -20875,7 +21803,7 @@
                           <a:ea typeface="Calibri" pitchFamily="34" charset="-122"/>
                           <a:cs typeface="Calibri" pitchFamily="34" charset="-120"/>
                         </a:rPr>
-                        <a:t>0.37%</a:t>
+                        <a:t>0.38%</a:t>
                       </a:r>
                       <a:endParaRPr lang="en-US" sz="500" dirty="0">
                         <a:latin typeface="Calibri" charset="0"/>
@@ -21558,7 +22486,7 @@
                           <a:ea typeface="Calibri" pitchFamily="34" charset="-122"/>
                           <a:cs typeface="Calibri" pitchFamily="34" charset="-120"/>
                         </a:rPr>
-                        <a:t>0.00%</a:t>
+                        <a:t>0.27%</a:t>
                       </a:r>
                       <a:endParaRPr lang="en-US" sz="500" dirty="0">
                         <a:latin typeface="Calibri" charset="0"/>
@@ -22363,7 +23291,7 @@
                         <a:buNone/>
                       </a:pPr>
                       <a:r>
-                        <a:rPr lang="en-US" sz="500" dirty="0">
+                        <a:rPr lang="en-US" sz="400" dirty="0">
                           <a:solidFill>
                             <a:srgbClr val="000000"/>
                           </a:solidFill>
@@ -22373,7 +23301,7 @@
                         </a:rPr>
                         <a:t>FIP LIQUIDEZ EFECTIVO</a:t>
                       </a:r>
-                      <a:endParaRPr lang="en-US" sz="500" dirty="0">
+                      <a:endParaRPr lang="en-US" sz="400" dirty="0">
                         <a:latin typeface="Calibri" charset="0"/>
                         <a:ea typeface="Calibri" charset="0"/>
                         <a:cs typeface="Calibri" charset="0"/>

--- a/folletos/2026-04/pptx/FIP_VANTRUST_LIQUIDEZ_EFECTIVO.pptx
+++ b/folletos/2026-04/pptx/FIP_VANTRUST_LIQUIDEZ_EFECTIVO.pptx
@@ -4085,7 +4085,7 @@
                 <a:ea typeface="Calibri" pitchFamily="34" charset="-122"/>
                 <a:cs typeface="Calibri" pitchFamily="34" charset="-120"/>
               </a:rPr>
-              <a:t>prueba CLP</a:t>
+              <a:t>prueba 13 CLP</a:t>
             </a:r>
             <a:endParaRPr lang="en-US" sz="800" dirty="0"/>
           </a:p>

--- a/folletos/2026-04/pptx/FIP_VANTRUST_LIQUIDEZ_EFECTIVO.pptx
+++ b/folletos/2026-04/pptx/FIP_VANTRUST_LIQUIDEZ_EFECTIVO.pptx
@@ -585,7 +585,7 @@
                   <c:v>138.73</c:v>
                 </c:pt>
                 <c:pt idx="63">
-                  <c:v>139.25</c:v>
+                  <c:v>103.44</c:v>
                 </c:pt>
               </c:numCache>
             </c:numRef>
@@ -1533,7 +1533,7 @@
                   <c:v>129.09</c:v>
                 </c:pt>
                 <c:pt idx="63">
-                  <c:v>129.43</c:v>
+                  <c:v/>
                 </c:pt>
               </c:numCache>
             </c:numRef>
@@ -4085,7 +4085,7 @@
                 <a:ea typeface="Calibri" pitchFamily="34" charset="-122"/>
                 <a:cs typeface="Calibri" pitchFamily="34" charset="-120"/>
               </a:rPr>
-              <a:t>prueba 13 CLP</a:t>
+              <a:t>prueba CLP</a:t>
             </a:r>
             <a:endParaRPr lang="en-US" sz="800" dirty="0"/>
           </a:p>
@@ -4734,7 +4734,7 @@
                           <a:ea typeface="Calibri" pitchFamily="34" charset="-122"/>
                           <a:cs typeface="Calibri" pitchFamily="34" charset="-120"/>
                         </a:rPr>
-                        <a:t>0.38%</a:t>
+                        <a:t>-25.44%</a:t>
                       </a:r>
                       <a:endParaRPr lang="en-US" sz="750" dirty="0">
                         <a:latin typeface="Calibri" charset="0"/>
@@ -4802,7 +4802,7 @@
                           <a:ea typeface="Calibri" pitchFamily="34" charset="-122"/>
                           <a:cs typeface="Calibri" pitchFamily="34" charset="-120"/>
                         </a:rPr>
-                        <a:t>1.13%</a:t>
+                        <a:t>-24.88%</a:t>
                       </a:r>
                       <a:endParaRPr lang="en-US" sz="750" dirty="0">
                         <a:latin typeface="Calibri" charset="0"/>
@@ -4870,7 +4870,7 @@
                           <a:ea typeface="Calibri" pitchFamily="34" charset="-122"/>
                           <a:cs typeface="Calibri" pitchFamily="34" charset="-120"/>
                         </a:rPr>
-                        <a:t>2.33%</a:t>
+                        <a:t>-23.98%</a:t>
                       </a:r>
                       <a:endParaRPr lang="en-US" sz="750" dirty="0">
                         <a:latin typeface="Calibri" charset="0"/>
@@ -4938,7 +4938,7 @@
                           <a:ea typeface="Calibri" pitchFamily="34" charset="-122"/>
                           <a:cs typeface="Calibri" pitchFamily="34" charset="-120"/>
                         </a:rPr>
-                        <a:t>4.90%</a:t>
+                        <a:t>-22.07%</a:t>
                       </a:r>
                       <a:endParaRPr lang="en-US" sz="750" dirty="0">
                         <a:latin typeface="Calibri" charset="0"/>
@@ -5006,7 +5006,7 @@
                           <a:ea typeface="Calibri" pitchFamily="34" charset="-122"/>
                           <a:cs typeface="Calibri" pitchFamily="34" charset="-120"/>
                         </a:rPr>
-                        <a:t>3.39%</a:t>
+                        <a:t>-74.63%</a:t>
                       </a:r>
                       <a:endParaRPr lang="en-US" sz="750" dirty="0">
                         <a:latin typeface="Calibri" charset="0"/>
@@ -5144,7 +5144,7 @@
                           <a:ea typeface="Calibri" pitchFamily="34" charset="-122"/>
                           <a:cs typeface="Calibri" pitchFamily="34" charset="-120"/>
                         </a:rPr>
-                        <a:t>0.26%</a:t>
+                        <a:t>-100.00%</a:t>
                       </a:r>
                       <a:endParaRPr lang="en-US" sz="750" dirty="0">
                         <a:latin typeface="Calibri" charset="0"/>
@@ -5212,7 +5212,7 @@
                           <a:ea typeface="Calibri" pitchFamily="34" charset="-122"/>
                           <a:cs typeface="Calibri" pitchFamily="34" charset="-120"/>
                         </a:rPr>
-                        <a:t>0.77%</a:t>
+                        <a:t>-100.00%</a:t>
                       </a:r>
                       <a:endParaRPr lang="en-US" sz="750" dirty="0">
                         <a:latin typeface="Calibri" charset="0"/>
@@ -5280,7 +5280,7 @@
                           <a:ea typeface="Calibri" pitchFamily="34" charset="-122"/>
                           <a:cs typeface="Calibri" pitchFamily="34" charset="-120"/>
                         </a:rPr>
-                        <a:t>1.62%</a:t>
+                        <a:t>-100.00%</a:t>
                       </a:r>
                       <a:endParaRPr lang="en-US" sz="750" dirty="0">
                         <a:latin typeface="Calibri" charset="0"/>
@@ -5348,7 +5348,7 @@
                           <a:ea typeface="Calibri" pitchFamily="34" charset="-122"/>
                           <a:cs typeface="Calibri" pitchFamily="34" charset="-120"/>
                         </a:rPr>
-                        <a:t>3.43%</a:t>
+                        <a:t>-100.00%</a:t>
                       </a:r>
                       <a:endParaRPr lang="en-US" sz="750" dirty="0">
                         <a:latin typeface="Calibri" charset="0"/>
@@ -5416,7 +5416,7 @@
                           <a:ea typeface="Calibri" pitchFamily="34" charset="-122"/>
                           <a:cs typeface="Calibri" pitchFamily="34" charset="-120"/>
                         </a:rPr>
-                        <a:t>2.32%</a:t>
+                        <a:t>-300.00%</a:t>
                       </a:r>
                       <a:endParaRPr lang="en-US" sz="750" dirty="0">
                         <a:latin typeface="Calibri" charset="0"/>
@@ -21803,7 +21803,7 @@
                           <a:ea typeface="Calibri" pitchFamily="34" charset="-122"/>
                           <a:cs typeface="Calibri" pitchFamily="34" charset="-120"/>
                         </a:rPr>
-                        <a:t>0.38%</a:t>
+                        <a:t>-25.44%</a:t>
                       </a:r>
                       <a:endParaRPr lang="en-US" sz="500" dirty="0">
                         <a:latin typeface="Calibri" charset="0"/>
@@ -22300,7 +22300,7 @@
                           <a:ea typeface="Calibri" pitchFamily="34" charset="-122"/>
                           <a:cs typeface="Calibri" pitchFamily="34" charset="-120"/>
                         </a:rPr>
-                        <a:t>3.39%</a:t>
+                        <a:t>-74.63%</a:t>
                       </a:r>
                       <a:endParaRPr lang="en-US" sz="500" dirty="0">
                         <a:latin typeface="Calibri" charset="0"/>
@@ -22681,7 +22681,7 @@
                           <a:ea typeface="Calibri" pitchFamily="34" charset="-122"/>
                           <a:cs typeface="Calibri" pitchFamily="34" charset="-120"/>
                         </a:rPr>
-                        <a:t>0.26%</a:t>
+                        <a:t>-100.00%</a:t>
                       </a:r>
                       <a:endParaRPr lang="en-US" sz="500" dirty="0">
                         <a:latin typeface="Calibri" charset="0"/>
@@ -23178,7 +23178,7 @@
                           <a:ea typeface="Calibri" pitchFamily="34" charset="-122"/>
                           <a:cs typeface="Calibri" pitchFamily="34" charset="-120"/>
                         </a:rPr>
-                        <a:t>2.32%</a:t>
+                        <a:t>-300.00%</a:t>
                       </a:r>
                       <a:endParaRPr lang="en-US" sz="500" dirty="0">
                         <a:latin typeface="Calibri" charset="0"/>

--- a/folletos/2026-04/pptx/FIP_VANTRUST_LIQUIDEZ_EFECTIVO.pptx
+++ b/folletos/2026-04/pptx/FIP_VANTRUST_LIQUIDEZ_EFECTIVO.pptx
@@ -4085,7 +4085,7 @@
                 <a:ea typeface="Calibri" pitchFamily="34" charset="-122"/>
                 <a:cs typeface="Calibri" pitchFamily="34" charset="-120"/>
               </a:rPr>
-              <a:t>prueba CLP</a:t>
+              <a:t>prueba 14 CLP</a:t>
             </a:r>
             <a:endParaRPr lang="en-US" sz="800" dirty="0"/>
           </a:p>
